--- a/docs/lecture_slides/Week 6/Week6_Lecture12_Slides_9_28_2026.pptx
+++ b/docs/lecture_slides/Week 6/Week6_Lecture12_Slides_9_28_2026.pptx
@@ -17285,7 +17285,7 @@
         </p:blipFill>
         <p:spPr>
           <a:xfrm>
-            <a:off x="762000" y="2717800"/>
+            <a:off x="762000" y="2489200"/>
             <a:ext cx="10668000" cy="2603500"/>
           </a:xfrm>
           <a:prstGeom prst="rect">
@@ -17293,6 +17293,82 @@
           </a:prstGeom>
         </p:spPr>
       </p:pic>
+      <p:sp>
+        <p:nvSpPr>
+          <p:cNvPr id="7" name="Result">
+            <a:extLst>
+              <a:ext uri="{FF2B5EF4-FFF2-40B4-BE49-F238E27FC236}">
+                <a16:creationId xmlns:a16="http://schemas.microsoft.com/office/drawing/2014/main" id="{572E4A4A-3BD5-CF24-E6F1-9A1E4EB1A29A}"/>
+              </a:ext>
+            </a:extLst>
+          </p:cNvPr>
+          <p:cNvSpPr/>
+          <p:nvPr/>
+        </p:nvSpPr>
+        <p:spPr>
+          <a:xfrm>
+            <a:off x="762000" y="5335478"/>
+            <a:ext cx="10668000" cy="752951"/>
+          </a:xfrm>
+          <a:prstGeom prst="roundRect">
+            <a:avLst>
+              <a:gd name="adj" fmla="val 4000"/>
+            </a:avLst>
+          </a:prstGeom>
+          <a:solidFill>
+            <a:srgbClr val="F2F6FC"/>
+          </a:solidFill>
+          <a:ln w="15875">
+            <a:solidFill>
+              <a:srgbClr val="4472C4"/>
+            </a:solidFill>
+          </a:ln>
+        </p:spPr>
+        <p:style>
+          <a:lnRef idx="2">
+            <a:schemeClr val="accent1">
+              <a:shade val="15000"/>
+            </a:schemeClr>
+          </a:lnRef>
+          <a:fillRef idx="1">
+            <a:schemeClr val="accent1"/>
+          </a:fillRef>
+          <a:effectRef idx="0">
+            <a:schemeClr val="accent1"/>
+          </a:effectRef>
+          <a:fontRef idx="minor">
+            <a:schemeClr val="lt1"/>
+          </a:fontRef>
+        </p:style>
+        <p:txBody>
+          <a:bodyPr wrap="square" lIns="152400" tIns="76200" rIns="152400" bIns="76200" rtlCol="0" anchor="ctr">
+            <a:spAutoFit/>
+          </a:bodyPr>
+          <a:lstStyle/>
+          <a:p>
+            <a:r>
+              <a:rPr lang="en-US" sz="2000" b="1">
+                <a:solidFill>
+                  <a:srgbClr val="C00000"/>
+                </a:solidFill>
+                <a:latin typeface="Calibri" panose="020F0502020204030204" pitchFamily="34" charset="0"/>
+              </a:rPr>
+              <a:t>You've seen these before:</a:t>
+            </a:r>
+          </a:p>
+          <a:p>
+            <a:r>
+              <a:rPr lang="en-US" b="1">
+                <a:solidFill>
+                  <a:srgbClr val="C00000"/>
+                </a:solidFill>
+                <a:latin typeface="Calibri" panose="020F0502020204030204" pitchFamily="34" charset="0"/>
+              </a:rPr>
+              <a:t>SE = s / √n (Week 3) is its spread; the Rec Center histograms (Week 4) were sampling distributions</a:t>
+            </a:r>
+          </a:p>
+        </p:txBody>
+      </p:sp>
     </p:spTree>
     <p:extLst>
       <p:ext uri="{BB962C8B-B14F-4D97-AF65-F5344CB8AC3E}">
@@ -17415,6 +17491,51 @@
                       </p:childTnLst>
                     </p:cTn>
                   </p:par>
+                  <p:par>
+                    <p:cTn id="11" fill="hold">
+                      <p:stCondLst>
+                        <p:cond delay="indefinite"/>
+                      </p:stCondLst>
+                      <p:childTnLst>
+                        <p:par>
+                          <p:cTn id="12" fill="hold">
+                            <p:stCondLst>
+                              <p:cond delay="0"/>
+                            </p:stCondLst>
+                            <p:childTnLst>
+                              <p:par>
+                                <p:cTn id="13" presetID="1" presetClass="entr" presetSubtype="0" fill="hold" grpId="0" nodeType="clickEffect">
+                                  <p:stCondLst>
+                                    <p:cond delay="0"/>
+                                  </p:stCondLst>
+                                  <p:childTnLst>
+                                    <p:set>
+                                      <p:cBhvr>
+                                        <p:cTn id="14" dur="1" fill="hold">
+                                          <p:stCondLst>
+                                            <p:cond delay="0"/>
+                                          </p:stCondLst>
+                                        </p:cTn>
+                                        <p:tgtEl>
+                                          <p:spTgt spid="7"/>
+                                        </p:tgtEl>
+                                        <p:attrNameLst>
+                                          <p:attrName>style.visibility</p:attrName>
+                                        </p:attrNameLst>
+                                      </p:cBhvr>
+                                      <p:to>
+                                        <p:strVal val="visible"/>
+                                      </p:to>
+                                    </p:set>
+                                  </p:childTnLst>
+                                </p:cTn>
+                              </p:par>
+                            </p:childTnLst>
+                          </p:cTn>
+                        </p:par>
+                      </p:childTnLst>
+                    </p:cTn>
+                  </p:par>
                 </p:childTnLst>
               </p:cTn>
               <p:prevCondLst>
@@ -17438,6 +17559,7 @@
     </p:tnLst>
     <p:bldLst>
       <p:bldP spid="6" grpId="0"/>
+      <p:bldP spid="7" grpId="0" animBg="1"/>
     </p:bldLst>
   </p:timing>
 </p:sld>

--- a/docs/lecture_slides/Week 6/Week6_Lecture12_Slides_9_28_2026.pptx
+++ b/docs/lecture_slides/Week 6/Week6_Lecture12_Slides_9_28_2026.pptx
@@ -26,23 +26,6 @@
     <p:sldId id="359" r:id="rId20"/>
     <p:sldId id="335" r:id="rId21"/>
     <p:sldId id="331" r:id="rId22"/>
-    <p:sldId id="332" r:id="rId23"/>
-    <p:sldId id="333" r:id="rId24"/>
-    <p:sldId id="336" r:id="rId25"/>
-    <p:sldId id="337" r:id="rId26"/>
-    <p:sldId id="338" r:id="rId27"/>
-    <p:sldId id="339" r:id="rId28"/>
-    <p:sldId id="340" r:id="rId29"/>
-    <p:sldId id="341" r:id="rId30"/>
-    <p:sldId id="342" r:id="rId31"/>
-    <p:sldId id="343" r:id="rId32"/>
-    <p:sldId id="344" r:id="rId33"/>
-    <p:sldId id="351" r:id="rId34"/>
-    <p:sldId id="352" r:id="rId35"/>
-    <p:sldId id="353" r:id="rId36"/>
-    <p:sldId id="354" r:id="rId37"/>
-    <p:sldId id="355" r:id="rId38"/>
-    <p:sldId id="345" r:id="rId39"/>
   </p:sldIdLst>
   <p:sldSz cx="12192000" cy="6858000"/>
   <p:notesSz cx="6858000" cy="9144000"/>
@@ -296,7 +279,7 @@
           <a:p>
             <a:fld id="{06882561-BD16-4A95-ACA1-5204E478F2FE}" type="datetimeFigureOut">
               <a:rPr lang="en-US" smtClean="0"/>
-              <a:t>9/28/2026</a:t>
+              <a:t>9/29/2026</a:t>
             </a:fld>
             <a:endParaRPr lang="en-US"/>
           </a:p>
@@ -494,7 +477,7 @@
           <a:p>
             <a:fld id="{06882561-BD16-4A95-ACA1-5204E478F2FE}" type="datetimeFigureOut">
               <a:rPr lang="en-US" smtClean="0"/>
-              <a:t>9/28/2026</a:t>
+              <a:t>9/29/2026</a:t>
             </a:fld>
             <a:endParaRPr lang="en-US"/>
           </a:p>
@@ -702,7 +685,7 @@
           <a:p>
             <a:fld id="{06882561-BD16-4A95-ACA1-5204E478F2FE}" type="datetimeFigureOut">
               <a:rPr lang="en-US" smtClean="0"/>
-              <a:t>9/28/2026</a:t>
+              <a:t>9/29/2026</a:t>
             </a:fld>
             <a:endParaRPr lang="en-US"/>
           </a:p>
@@ -900,7 +883,7 @@
           <a:p>
             <a:fld id="{06882561-BD16-4A95-ACA1-5204E478F2FE}" type="datetimeFigureOut">
               <a:rPr lang="en-US" smtClean="0"/>
-              <a:t>9/28/2026</a:t>
+              <a:t>9/29/2026</a:t>
             </a:fld>
             <a:endParaRPr lang="en-US"/>
           </a:p>
@@ -1175,7 +1158,7 @@
           <a:p>
             <a:fld id="{06882561-BD16-4A95-ACA1-5204E478F2FE}" type="datetimeFigureOut">
               <a:rPr lang="en-US" smtClean="0"/>
-              <a:t>9/28/2026</a:t>
+              <a:t>9/29/2026</a:t>
             </a:fld>
             <a:endParaRPr lang="en-US"/>
           </a:p>
@@ -1440,7 +1423,7 @@
           <a:p>
             <a:fld id="{06882561-BD16-4A95-ACA1-5204E478F2FE}" type="datetimeFigureOut">
               <a:rPr lang="en-US" smtClean="0"/>
-              <a:t>9/28/2026</a:t>
+              <a:t>9/29/2026</a:t>
             </a:fld>
             <a:endParaRPr lang="en-US"/>
           </a:p>
@@ -1852,7 +1835,7 @@
           <a:p>
             <a:fld id="{06882561-BD16-4A95-ACA1-5204E478F2FE}" type="datetimeFigureOut">
               <a:rPr lang="en-US" smtClean="0"/>
-              <a:t>9/28/2026</a:t>
+              <a:t>9/29/2026</a:t>
             </a:fld>
             <a:endParaRPr lang="en-US"/>
           </a:p>
@@ -1993,7 +1976,7 @@
           <a:p>
             <a:fld id="{06882561-BD16-4A95-ACA1-5204E478F2FE}" type="datetimeFigureOut">
               <a:rPr lang="en-US" smtClean="0"/>
-              <a:t>9/28/2026</a:t>
+              <a:t>9/29/2026</a:t>
             </a:fld>
             <a:endParaRPr lang="en-US"/>
           </a:p>
@@ -2106,7 +2089,7 @@
           <a:p>
             <a:fld id="{06882561-BD16-4A95-ACA1-5204E478F2FE}" type="datetimeFigureOut">
               <a:rPr lang="en-US" smtClean="0"/>
-              <a:t>9/28/2026</a:t>
+              <a:t>9/29/2026</a:t>
             </a:fld>
             <a:endParaRPr lang="en-US"/>
           </a:p>
@@ -2417,7 +2400,7 @@
           <a:p>
             <a:fld id="{06882561-BD16-4A95-ACA1-5204E478F2FE}" type="datetimeFigureOut">
               <a:rPr lang="en-US" smtClean="0"/>
-              <a:t>9/28/2026</a:t>
+              <a:t>9/29/2026</a:t>
             </a:fld>
             <a:endParaRPr lang="en-US"/>
           </a:p>
@@ -2705,7 +2688,7 @@
           <a:p>
             <a:fld id="{06882561-BD16-4A95-ACA1-5204E478F2FE}" type="datetimeFigureOut">
               <a:rPr lang="en-US" smtClean="0"/>
-              <a:t>9/28/2026</a:t>
+              <a:t>9/29/2026</a:t>
             </a:fld>
             <a:endParaRPr lang="en-US"/>
           </a:p>
@@ -2946,7 +2929,7 @@
           <a:p>
             <a:fld id="{06882561-BD16-4A95-ACA1-5204E478F2FE}" type="datetimeFigureOut">
               <a:rPr lang="en-US" smtClean="0"/>
-              <a:t>9/28/2026</a:t>
+              <a:t>9/29/2026</a:t>
             </a:fld>
             <a:endParaRPr lang="en-US"/>
           </a:p>
@@ -10092,7 +10075,7 @@
 </p:sld>
 </file>
 
-<file path=ppt/slides/slide22.xml><?xml version="1.0" encoding="utf-8"?>
+<file path=ppt/slides/slide3.xml><?xml version="1.0" encoding="utf-8"?>
 <p:sld xmlns:a="http://schemas.openxmlformats.org/drawingml/2006/main" xmlns:r="http://schemas.openxmlformats.org/officeDocument/2006/relationships" xmlns:p="http://schemas.openxmlformats.org/presentationml/2006/main">
   <p:cSld>
     <p:spTree>
@@ -10114,7 +10097,7 @@
           <p:cNvPr id="2" name="Title 1">
             <a:extLst>
               <a:ext uri="{FF2B5EF4-FFF2-40B4-BE49-F238E27FC236}">
-                <a16:creationId xmlns:a16="http://schemas.microsoft.com/office/drawing/2014/main" id="{D1E825F3-CA5C-D321-A12F-235D7E6C102E}"/>
+                <a16:creationId xmlns:a16="http://schemas.microsoft.com/office/drawing/2014/main" id="{D617AB41-6AD1-9EF2-7F95-46A904399681}"/>
               </a:ext>
             </a:extLst>
           </p:cNvPr>
@@ -10138,7 +10121,7 @@
                   <a:srgbClr val="1F3864"/>
                 </a:solidFill>
               </a:rPr>
-              <a:t>What is the standard deviation?</a:t>
+              <a:t>What you should know: sampling designs</a:t>
             </a:r>
           </a:p>
         </p:txBody>
@@ -10148,7 +10131,7 @@
           <p:cNvPr id="4" name="Slide Number Placeholder 3">
             <a:extLst>
               <a:ext uri="{FF2B5EF4-FFF2-40B4-BE49-F238E27FC236}">
-                <a16:creationId xmlns:a16="http://schemas.microsoft.com/office/drawing/2014/main" id="{632F5803-1B77-5AE0-EEB8-17B8E3F9722A}"/>
+                <a16:creationId xmlns:a16="http://schemas.microsoft.com/office/drawing/2014/main" id="{97D44AE5-98B5-B840-6B8A-D345C7C2E2F0}"/>
               </a:ext>
             </a:extLst>
           </p:cNvPr>
@@ -10166,7 +10149,7 @@
           <a:p>
             <a:fld id="{A80A81DD-F10A-4B1C-963A-0ABBB4865886}" type="slidenum">
               <a:rPr lang="en-US" sz="1600" smtClean="0"/>
-              <a:t>22</a:t>
+              <a:t>3</a:t>
             </a:fld>
             <a:endParaRPr lang="en-US" sz="1600"/>
           </a:p>
@@ -10174,10 +10157,247 @@
       </p:sp>
       <p:sp>
         <p:nvSpPr>
+          <p:cNvPr id="5" name="TextBox 4">
+            <a:extLst>
+              <a:ext uri="{FF2B5EF4-FFF2-40B4-BE49-F238E27FC236}">
+                <a16:creationId xmlns:a16="http://schemas.microsoft.com/office/drawing/2014/main" id="{A34AAE17-27CE-D7A3-C663-11BB48ACBF5B}"/>
+              </a:ext>
+            </a:extLst>
+          </p:cNvPr>
+          <p:cNvSpPr txBox="1"/>
+          <p:nvPr/>
+        </p:nvSpPr>
+        <p:spPr>
+          <a:xfrm>
+            <a:off x="762000" y="1879600"/>
+            <a:ext cx="10668000" cy="345440"/>
+          </a:xfrm>
+          <a:prstGeom prst="rect">
+            <a:avLst/>
+          </a:prstGeom>
+          <a:noFill/>
+        </p:spPr>
+        <p:txBody>
+          <a:bodyPr vert="horz" wrap="square" rtlCol="0">
+            <a:spAutoFit/>
+          </a:bodyPr>
+          <a:lstStyle/>
+          <a:p>
+            <a:pPr marL="304800" indent="-304800"/>
+            <a:r>
+              <a:rPr lang="en-US" sz="1600">
+                <a:solidFill>
+                  <a:srgbClr val="000000"/>
+                </a:solidFill>
+              </a:rPr>
+              <a:t>Simple random sample (SRS), and systematic sample</a:t>
+            </a:r>
+          </a:p>
+        </p:txBody>
+      </p:sp>
+      <p:sp>
+        <p:nvSpPr>
+          <p:cNvPr id="6" name="TextBox 5">
+            <a:extLst>
+              <a:ext uri="{FF2B5EF4-FFF2-40B4-BE49-F238E27FC236}">
+                <a16:creationId xmlns:a16="http://schemas.microsoft.com/office/drawing/2014/main" id="{E410A0F8-5E1E-9A1D-B64C-50827EE6C9B2}"/>
+              </a:ext>
+            </a:extLst>
+          </p:cNvPr>
+          <p:cNvSpPr txBox="1"/>
+          <p:nvPr/>
+        </p:nvSpPr>
+        <p:spPr>
+          <a:xfrm>
+            <a:off x="1117600" y="2225040"/>
+            <a:ext cx="10312400" cy="338554"/>
+          </a:xfrm>
+          <a:prstGeom prst="rect">
+            <a:avLst/>
+          </a:prstGeom>
+          <a:noFill/>
+        </p:spPr>
+        <p:txBody>
+          <a:bodyPr vert="horz" wrap="square" rtlCol="0">
+            <a:spAutoFit/>
+          </a:bodyPr>
+          <a:lstStyle/>
+          <a:p>
+            <a:r>
+              <a:rPr lang="en-US" sz="1600" b="1">
+                <a:solidFill>
+                  <a:srgbClr val="C00000"/>
+                </a:solidFill>
+              </a:rPr>
+              <a:t>SRS: every sample of n is equally likely. Systematic: random start, then every kth unit.</a:t>
+            </a:r>
+          </a:p>
+        </p:txBody>
+      </p:sp>
+      <p:sp>
+        <p:nvSpPr>
+          <p:cNvPr id="7" name="TextBox 6">
+            <a:extLst>
+              <a:ext uri="{FF2B5EF4-FFF2-40B4-BE49-F238E27FC236}">
+                <a16:creationId xmlns:a16="http://schemas.microsoft.com/office/drawing/2014/main" id="{47D3CD95-D52E-5227-B663-7C0A72677B6E}"/>
+              </a:ext>
+            </a:extLst>
+          </p:cNvPr>
+          <p:cNvSpPr txBox="1"/>
+          <p:nvPr/>
+        </p:nvSpPr>
+        <p:spPr>
+          <a:xfrm>
+            <a:off x="762000" y="2766794"/>
+            <a:ext cx="10668000" cy="345440"/>
+          </a:xfrm>
+          <a:prstGeom prst="rect">
+            <a:avLst/>
+          </a:prstGeom>
+          <a:noFill/>
+        </p:spPr>
+        <p:txBody>
+          <a:bodyPr vert="horz" wrap="square" rtlCol="0">
+            <a:spAutoFit/>
+          </a:bodyPr>
+          <a:lstStyle/>
+          <a:p>
+            <a:pPr marL="304800" indent="-304800"/>
+            <a:r>
+              <a:rPr lang="en-US" sz="1600">
+                <a:solidFill>
+                  <a:srgbClr val="000000"/>
+                </a:solidFill>
+              </a:rPr>
+              <a:t>Stratified random sample, and cluster sample</a:t>
+            </a:r>
+          </a:p>
+        </p:txBody>
+      </p:sp>
+      <p:sp>
+        <p:nvSpPr>
+          <p:cNvPr id="8" name="TextBox 7">
+            <a:extLst>
+              <a:ext uri="{FF2B5EF4-FFF2-40B4-BE49-F238E27FC236}">
+                <a16:creationId xmlns:a16="http://schemas.microsoft.com/office/drawing/2014/main" id="{1CE3E601-601D-C6B1-8265-C079CB8C9269}"/>
+              </a:ext>
+            </a:extLst>
+          </p:cNvPr>
+          <p:cNvSpPr txBox="1"/>
+          <p:nvPr/>
+        </p:nvSpPr>
+        <p:spPr>
+          <a:xfrm>
+            <a:off x="1117600" y="3112234"/>
+            <a:ext cx="10312400" cy="338554"/>
+          </a:xfrm>
+          <a:prstGeom prst="rect">
+            <a:avLst/>
+          </a:prstGeom>
+          <a:noFill/>
+        </p:spPr>
+        <p:txBody>
+          <a:bodyPr vert="horz" wrap="square" rtlCol="0">
+            <a:spAutoFit/>
+          </a:bodyPr>
+          <a:lstStyle/>
+          <a:p>
+            <a:r>
+              <a:rPr lang="en-US" sz="1600" b="1">
+                <a:solidFill>
+                  <a:srgbClr val="C00000"/>
+                </a:solidFill>
+              </a:rPr>
+              <a:t>Stratified: an SRS from every stratum. Cluster: randomly chosen whole clusters.</a:t>
+            </a:r>
+          </a:p>
+        </p:txBody>
+      </p:sp>
+      <p:sp>
+        <p:nvSpPr>
+          <p:cNvPr id="9" name="TextBox 8">
+            <a:extLst>
+              <a:ext uri="{FF2B5EF4-FFF2-40B4-BE49-F238E27FC236}">
+                <a16:creationId xmlns:a16="http://schemas.microsoft.com/office/drawing/2014/main" id="{FB002BF4-8037-2F73-E27A-7A453477E389}"/>
+              </a:ext>
+            </a:extLst>
+          </p:cNvPr>
+          <p:cNvSpPr txBox="1"/>
+          <p:nvPr/>
+        </p:nvSpPr>
+        <p:spPr>
+          <a:xfrm>
+            <a:off x="762000" y="3653988"/>
+            <a:ext cx="10668000" cy="345440"/>
+          </a:xfrm>
+          <a:prstGeom prst="rect">
+            <a:avLst/>
+          </a:prstGeom>
+          <a:noFill/>
+        </p:spPr>
+        <p:txBody>
+          <a:bodyPr vert="horz" wrap="square" rtlCol="0">
+            <a:spAutoFit/>
+          </a:bodyPr>
+          <a:lstStyle/>
+          <a:p>
+            <a:pPr marL="304800" indent="-304800"/>
+            <a:r>
+              <a:rPr lang="en-US" sz="1600">
+                <a:solidFill>
+                  <a:srgbClr val="000000"/>
+                </a:solidFill>
+              </a:rPr>
+              <a:t>Convenience sample, and voluntary response sample</a:t>
+            </a:r>
+          </a:p>
+        </p:txBody>
+      </p:sp>
+      <p:sp>
+        <p:nvSpPr>
+          <p:cNvPr id="10" name="TextBox 9">
+            <a:extLst>
+              <a:ext uri="{FF2B5EF4-FFF2-40B4-BE49-F238E27FC236}">
+                <a16:creationId xmlns:a16="http://schemas.microsoft.com/office/drawing/2014/main" id="{10F3B3E3-D27C-E008-C93E-ED70BD2A4754}"/>
+              </a:ext>
+            </a:extLst>
+          </p:cNvPr>
+          <p:cNvSpPr txBox="1"/>
+          <p:nvPr/>
+        </p:nvSpPr>
+        <p:spPr>
+          <a:xfrm>
+            <a:off x="1117600" y="3999428"/>
+            <a:ext cx="10312400" cy="338554"/>
+          </a:xfrm>
+          <a:prstGeom prst="rect">
+            <a:avLst/>
+          </a:prstGeom>
+          <a:noFill/>
+        </p:spPr>
+        <p:txBody>
+          <a:bodyPr vert="horz" wrap="square" rtlCol="0">
+            <a:spAutoFit/>
+          </a:bodyPr>
+          <a:lstStyle/>
+          <a:p>
+            <a:r>
+              <a:rPr lang="en-US" sz="1600" b="1">
+                <a:solidFill>
+                  <a:srgbClr val="C00000"/>
+                </a:solidFill>
+              </a:rPr>
+              <a:t>The easiest to reach, or self-selected. Both are biased at any sample size.</a:t>
+            </a:r>
+          </a:p>
+        </p:txBody>
+      </p:sp>
+      <p:sp>
+        <p:nvSpPr>
           <p:cNvPr id="3" name="Title rule">
             <a:extLst>
               <a:ext uri="{FF2B5EF4-FFF2-40B4-BE49-F238E27FC236}">
-                <a16:creationId xmlns:a16="http://schemas.microsoft.com/office/drawing/2014/main" id="{784C6B91-DD86-0BA1-4A71-C454C38471E5}"/>
+                <a16:creationId xmlns:a16="http://schemas.microsoft.com/office/drawing/2014/main" id="{B469CAAB-2B69-6863-7C28-0C5959E5734B}"/>
               </a:ext>
             </a:extLst>
           </p:cNvPr>
@@ -10240,9052 +10460,10 @@
           </a:p>
         </p:txBody>
       </p:sp>
-      <p:pic>
-        <p:nvPicPr>
-          <p:cNvPr id="8" name="l12_sigma_quiz.png">
-            <a:extLst>
-              <a:ext uri="{FF2B5EF4-FFF2-40B4-BE49-F238E27FC236}">
-                <a16:creationId xmlns:a16="http://schemas.microsoft.com/office/drawing/2014/main" id="{F8CB8C23-CBC6-E0A0-7350-3BEEA36A9D76}"/>
-              </a:ext>
-            </a:extLst>
-          </p:cNvPr>
-          <p:cNvPicPr>
-            <a:picLocks/>
-          </p:cNvPicPr>
-          <p:nvPr/>
-        </p:nvPicPr>
-        <p:blipFill>
-          <a:blip r:embed="rId2">
-            <a:extLst>
-              <a:ext uri="{28A0092B-C50C-407E-A947-70E740481C1C}">
-                <a14:useLocalDpi xmlns:a14="http://schemas.microsoft.com/office/drawing/2010/main" val="0"/>
-              </a:ext>
-            </a:extLst>
-          </a:blip>
-          <a:stretch>
-            <a:fillRect/>
-          </a:stretch>
-        </p:blipFill>
-        <p:spPr>
-          <a:xfrm>
-            <a:off x="762000" y="2336800"/>
-            <a:ext cx="10668000" cy="2730500"/>
-          </a:xfrm>
-          <a:prstGeom prst="rect">
-            <a:avLst/>
-          </a:prstGeom>
-        </p:spPr>
-      </p:pic>
-      <p:sp>
-        <p:nvSpPr>
-          <p:cNvPr id="7" name="Question">
-            <a:extLst>
-              <a:ext uri="{FF2B5EF4-FFF2-40B4-BE49-F238E27FC236}">
-                <a16:creationId xmlns:a16="http://schemas.microsoft.com/office/drawing/2014/main" id="{20E949D1-02B4-D5F9-4113-43BD7220E796}"/>
-              </a:ext>
-            </a:extLst>
-          </p:cNvPr>
-          <p:cNvSpPr txBox="1"/>
-          <p:nvPr/>
-        </p:nvSpPr>
-        <p:spPr>
-          <a:xfrm>
-            <a:off x="762000" y="1879600"/>
-            <a:ext cx="10668000" cy="381000"/>
-          </a:xfrm>
-          <a:prstGeom prst="rect">
-            <a:avLst/>
-          </a:prstGeom>
-          <a:noFill/>
-        </p:spPr>
-        <p:txBody>
-          <a:bodyPr vert="horz" wrap="square" rtlCol="0">
-            <a:spAutoFit/>
-          </a:bodyPr>
-          <a:lstStyle/>
-          <a:p>
-            <a:pPr>
-              <a:spcAft>
-                <a:spcPts val="200"/>
-              </a:spcAft>
-            </a:pPr>
-            <a:r>
-              <a:rPr lang="en-US" b="1">
-                <a:solidFill>
-                  <a:srgbClr val="C00000"/>
-                </a:solidFill>
-                <a:latin typeface="Calibri" panose="020F0502020204030204" pitchFamily="34" charset="0"/>
-              </a:rPr>
-              <a:t>Estimate σ for curve A and for curve B.</a:t>
-            </a:r>
-          </a:p>
-        </p:txBody>
-      </p:sp>
-      <p:sp>
-        <p:nvSpPr>
-          <p:cNvPr id="10" name="Result">
-            <a:extLst>
-              <a:ext uri="{FF2B5EF4-FFF2-40B4-BE49-F238E27FC236}">
-                <a16:creationId xmlns:a16="http://schemas.microsoft.com/office/drawing/2014/main" id="{70240C24-164F-D324-F6CF-EC707319DB77}"/>
-              </a:ext>
-            </a:extLst>
-          </p:cNvPr>
-          <p:cNvSpPr/>
-          <p:nvPr/>
-        </p:nvSpPr>
-        <p:spPr>
-          <a:xfrm>
-            <a:off x="762000" y="5168900"/>
-            <a:ext cx="10668000" cy="470595"/>
-          </a:xfrm>
-          <a:prstGeom prst="roundRect">
-            <a:avLst>
-              <a:gd name="adj" fmla="val 4000"/>
-            </a:avLst>
-          </a:prstGeom>
-          <a:solidFill>
-            <a:srgbClr val="F2F6FC"/>
-          </a:solidFill>
-          <a:ln w="15875">
-            <a:solidFill>
-              <a:srgbClr val="4472C4"/>
-            </a:solidFill>
-          </a:ln>
-        </p:spPr>
-        <p:style>
-          <a:lnRef idx="2">
-            <a:schemeClr val="accent1">
-              <a:shade val="15000"/>
-            </a:schemeClr>
-          </a:lnRef>
-          <a:fillRef idx="1">
-            <a:schemeClr val="accent1"/>
-          </a:fillRef>
-          <a:effectRef idx="0">
-            <a:schemeClr val="accent1"/>
-          </a:effectRef>
-          <a:fontRef idx="minor">
-            <a:schemeClr val="lt1"/>
-          </a:fontRef>
-        </p:style>
-        <p:txBody>
-          <a:bodyPr wrap="square" lIns="152400" tIns="76200" rIns="152400" bIns="76200" rtlCol="0" anchor="ctr">
-            <a:spAutoFit/>
-          </a:bodyPr>
-          <a:lstStyle/>
-          <a:p>
-            <a:r>
-              <a:rPr lang="el-GR" sz="2000" b="1">
-                <a:solidFill>
-                  <a:srgbClr val="C00000"/>
-                </a:solidFill>
-                <a:latin typeface="Calibri" panose="020F0502020204030204" pitchFamily="34" charset="0"/>
-              </a:rPr>
-              <a:t>A:  σ ≈ 5            B:  σ ≈ 0.5</a:t>
-            </a:r>
-            <a:endParaRPr lang="en-US" sz="2000" b="1">
-              <a:solidFill>
-                <a:srgbClr val="C00000"/>
-              </a:solidFill>
-              <a:latin typeface="Calibri" panose="020F0502020204030204" pitchFamily="34" charset="0"/>
-            </a:endParaRPr>
-          </a:p>
-        </p:txBody>
-      </p:sp>
-    </p:spTree>
-    <p:extLst>
-      <p:ext uri="{BB962C8B-B14F-4D97-AF65-F5344CB8AC3E}">
-        <p14:creationId xmlns:p14="http://schemas.microsoft.com/office/powerpoint/2010/main" val="416247535"/>
-      </p:ext>
-    </p:extLst>
-  </p:cSld>
-  <p:clrMapOvr>
-    <a:masterClrMapping/>
-  </p:clrMapOvr>
-  <p:timing>
-    <p:tnLst>
-      <p:par>
-        <p:cTn id="1" dur="indefinite" restart="never" nodeType="tmRoot">
-          <p:childTnLst>
-            <p:seq concurrent="1" nextAc="seek">
-              <p:cTn id="2" dur="indefinite" nodeType="mainSeq">
-                <p:childTnLst>
-                  <p:par>
-                    <p:cTn id="3" fill="hold">
-                      <p:stCondLst>
-                        <p:cond delay="indefinite"/>
-                      </p:stCondLst>
-                      <p:childTnLst>
-                        <p:par>
-                          <p:cTn id="4" fill="hold">
-                            <p:stCondLst>
-                              <p:cond delay="0"/>
-                            </p:stCondLst>
-                            <p:childTnLst>
-                              <p:par>
-                                <p:cTn id="5" presetID="1" presetClass="entr" presetSubtype="0" fill="hold" grpId="0" nodeType="clickEffect">
-                                  <p:stCondLst>
-                                    <p:cond delay="0"/>
-                                  </p:stCondLst>
-                                  <p:childTnLst>
-                                    <p:set>
-                                      <p:cBhvr>
-                                        <p:cTn id="6" dur="1" fill="hold">
-                                          <p:stCondLst>
-                                            <p:cond delay="0"/>
-                                          </p:stCondLst>
-                                        </p:cTn>
-                                        <p:tgtEl>
-                                          <p:spTgt spid="10"/>
-                                        </p:tgtEl>
-                                        <p:attrNameLst>
-                                          <p:attrName>style.visibility</p:attrName>
-                                        </p:attrNameLst>
-                                      </p:cBhvr>
-                                      <p:to>
-                                        <p:strVal val="visible"/>
-                                      </p:to>
-                                    </p:set>
-                                  </p:childTnLst>
-                                </p:cTn>
-                              </p:par>
-                            </p:childTnLst>
-                          </p:cTn>
-                        </p:par>
-                      </p:childTnLst>
-                    </p:cTn>
-                  </p:par>
-                </p:childTnLst>
-              </p:cTn>
-              <p:prevCondLst>
-                <p:cond evt="onPrev" delay="0">
-                  <p:tgtEl>
-                    <p:sldTgt/>
-                  </p:tgtEl>
-                </p:cond>
-              </p:prevCondLst>
-              <p:nextCondLst>
-                <p:cond evt="onNext" delay="0">
-                  <p:tgtEl>
-                    <p:sldTgt/>
-                  </p:tgtEl>
-                </p:cond>
-              </p:nextCondLst>
-            </p:seq>
-          </p:childTnLst>
-        </p:cTn>
-      </p:par>
-    </p:tnLst>
-    <p:bldLst>
-      <p:bldP spid="10" grpId="0" animBg="1"/>
-    </p:bldLst>
-  </p:timing>
-</p:sld>
-</file>
-
-<file path=ppt/slides/slide23.xml><?xml version="1.0" encoding="utf-8"?>
-<p:sld xmlns:a="http://schemas.openxmlformats.org/drawingml/2006/main" xmlns:r="http://schemas.openxmlformats.org/officeDocument/2006/relationships" xmlns:p="http://schemas.openxmlformats.org/presentationml/2006/main">
-  <p:cSld>
-    <p:spTree>
-      <p:nvGrpSpPr>
-        <p:cNvPr id="1" name=""/>
-        <p:cNvGrpSpPr/>
-        <p:nvPr/>
-      </p:nvGrpSpPr>
-      <p:grpSpPr>
-        <a:xfrm>
-          <a:off x="0" y="0"/>
-          <a:ext cx="0" cy="0"/>
-          <a:chOff x="0" y="0"/>
-          <a:chExt cx="0" cy="0"/>
-        </a:xfrm>
-      </p:grpSpPr>
-      <p:sp>
-        <p:nvSpPr>
-          <p:cNvPr id="2" name="Title 1">
-            <a:extLst>
-              <a:ext uri="{FF2B5EF4-FFF2-40B4-BE49-F238E27FC236}">
-                <a16:creationId xmlns:a16="http://schemas.microsoft.com/office/drawing/2014/main" id="{D1E825F3-CA5C-D321-A12F-235D7E6C102E}"/>
-              </a:ext>
-            </a:extLst>
-          </p:cNvPr>
-          <p:cNvSpPr>
-            <a:spLocks noGrp="1"/>
-          </p:cNvSpPr>
-          <p:nvPr>
-            <p:ph type="title"/>
-          </p:nvPr>
-        </p:nvSpPr>
-        <p:spPr/>
-        <p:txBody>
-          <a:bodyPr>
-            <a:noAutofit/>
-          </a:bodyPr>
-          <a:lstStyle/>
-          <a:p>
-            <a:r>
-              <a:rPr lang="en-US">
-                <a:solidFill>
-                  <a:srgbClr val="1F3864"/>
-                </a:solidFill>
-              </a:rPr>
-              <a:t>Example: back to that exam</a:t>
-            </a:r>
-          </a:p>
-        </p:txBody>
-      </p:sp>
-      <p:sp>
-        <p:nvSpPr>
-          <p:cNvPr id="4" name="Slide Number Placeholder 3">
-            <a:extLst>
-              <a:ext uri="{FF2B5EF4-FFF2-40B4-BE49-F238E27FC236}">
-                <a16:creationId xmlns:a16="http://schemas.microsoft.com/office/drawing/2014/main" id="{632F5803-1B77-5AE0-EEB8-17B8E3F9722A}"/>
-              </a:ext>
-            </a:extLst>
-          </p:cNvPr>
-          <p:cNvSpPr>
-            <a:spLocks noGrp="1"/>
-          </p:cNvSpPr>
-          <p:nvPr>
-            <p:ph type="sldNum" sz="quarter" idx="12"/>
-          </p:nvPr>
-        </p:nvSpPr>
-        <p:spPr/>
-        <p:txBody>
-          <a:bodyPr/>
-          <a:lstStyle/>
-          <a:p>
-            <a:fld id="{A80A81DD-F10A-4B1C-963A-0ABBB4865886}" type="slidenum">
-              <a:rPr lang="en-US" sz="1600" smtClean="0"/>
-              <a:t>23</a:t>
-            </a:fld>
-            <a:endParaRPr lang="en-US" sz="1600"/>
-          </a:p>
-        </p:txBody>
-      </p:sp>
-      <p:sp>
-        <p:nvSpPr>
-          <p:cNvPr id="3" name="Title rule">
-            <a:extLst>
-              <a:ext uri="{FF2B5EF4-FFF2-40B4-BE49-F238E27FC236}">
-                <a16:creationId xmlns:a16="http://schemas.microsoft.com/office/drawing/2014/main" id="{784C6B91-DD86-0BA1-4A71-C454C38471E5}"/>
-              </a:ext>
-            </a:extLst>
-          </p:cNvPr>
-          <p:cNvSpPr/>
-          <p:nvPr/>
-        </p:nvSpPr>
-        <p:spPr>
-          <a:xfrm>
-            <a:off x="838200" y="1600200"/>
-            <a:ext cx="10515600" cy="38100"/>
-          </a:xfrm>
-          <a:prstGeom prst="rect">
-            <a:avLst/>
-          </a:prstGeom>
-          <a:solidFill>
-            <a:srgbClr val="4472C4"/>
-          </a:solidFill>
-          <a:ln w="12700" cap="flat" cmpd="sng" algn="ctr">
-            <a:noFill/>
-            <a:prstDash val="solid"/>
-            <a:miter lim="800000"/>
-          </a:ln>
-          <a:effectLst/>
-          <a:extLst>
-            <a:ext uri="{91240B29-F687-4F45-9708-019B960494DF}">
-              <a14:hiddenLine xmlns:a14="http://schemas.microsoft.com/office/drawing/2010/main" w="12700" cap="flat" cmpd="sng" algn="ctr">
-                <a:solidFill>
-                  <a:schemeClr val="accent1">
-                    <a:shade val="15000"/>
-                  </a:schemeClr>
-                </a:solidFill>
-                <a:prstDash val="solid"/>
-                <a:miter lim="800000"/>
-              </a14:hiddenLine>
-            </a:ext>
-          </a:extLst>
-        </p:spPr>
-        <p:style>
-          <a:lnRef idx="2">
-            <a:schemeClr val="accent1">
-              <a:shade val="15000"/>
-            </a:schemeClr>
-          </a:lnRef>
-          <a:fillRef idx="1">
-            <a:schemeClr val="accent1"/>
-          </a:fillRef>
-          <a:effectRef idx="0">
-            <a:schemeClr val="accent1"/>
-          </a:effectRef>
-          <a:fontRef idx="minor">
-            <a:schemeClr val="lt1"/>
-          </a:fontRef>
-        </p:style>
-        <p:txBody>
-          <a:bodyPr rtlCol="0" anchor="ctr"/>
-          <a:lstStyle/>
-          <a:p>
-            <a:pPr algn="ctr"/>
-            <a:endParaRPr lang="en-US"/>
-          </a:p>
-        </p:txBody>
-      </p:sp>
-      <p:pic>
-        <p:nvPicPr>
-          <p:cNvPr id="8" name="l12_exam_rule.png">
-            <a:extLst>
-              <a:ext uri="{FF2B5EF4-FFF2-40B4-BE49-F238E27FC236}">
-                <a16:creationId xmlns:a16="http://schemas.microsoft.com/office/drawing/2014/main" id="{C53968A6-8A00-682D-1114-1AE14E32D311}"/>
-              </a:ext>
-            </a:extLst>
-          </p:cNvPr>
-          <p:cNvPicPr>
-            <a:picLocks/>
-          </p:cNvPicPr>
-          <p:nvPr/>
-        </p:nvPicPr>
-        <p:blipFill>
-          <a:blip r:embed="rId2">
-            <a:extLst>
-              <a:ext uri="{28A0092B-C50C-407E-A947-70E740481C1C}">
-                <a14:useLocalDpi xmlns:a14="http://schemas.microsoft.com/office/drawing/2010/main" val="0"/>
-              </a:ext>
-            </a:extLst>
-          </a:blip>
-          <a:stretch>
-            <a:fillRect/>
-          </a:stretch>
-        </p:blipFill>
-        <p:spPr>
-          <a:xfrm>
-            <a:off x="762000" y="3168710"/>
-            <a:ext cx="10668000" cy="2603500"/>
-          </a:xfrm>
-          <a:prstGeom prst="rect">
-            <a:avLst/>
-          </a:prstGeom>
-        </p:spPr>
-      </p:pic>
-      <p:sp>
-        <p:nvSpPr>
-          <p:cNvPr id="7" name="Context">
-            <a:extLst>
-              <a:ext uri="{FF2B5EF4-FFF2-40B4-BE49-F238E27FC236}">
-                <a16:creationId xmlns:a16="http://schemas.microsoft.com/office/drawing/2014/main" id="{CF55BC9C-FE59-7CE1-3E3C-35668F20C89D}"/>
-              </a:ext>
-            </a:extLst>
-          </p:cNvPr>
-          <p:cNvSpPr txBox="1"/>
-          <p:nvPr/>
-        </p:nvSpPr>
-        <p:spPr>
-          <a:xfrm>
-            <a:off x="762000" y="1879600"/>
-            <a:ext cx="10668000" cy="381000"/>
-          </a:xfrm>
-          <a:prstGeom prst="rect">
-            <a:avLst/>
-          </a:prstGeom>
-          <a:noFill/>
-        </p:spPr>
-        <p:txBody>
-          <a:bodyPr vert="horz" wrap="square" rtlCol="0">
-            <a:spAutoFit/>
-          </a:bodyPr>
-          <a:lstStyle/>
-          <a:p>
-            <a:pPr>
-              <a:spcAft>
-                <a:spcPts val="200"/>
-              </a:spcAft>
-            </a:pPr>
-            <a:r>
-              <a:rPr lang="en-US">
-                <a:solidFill>
-                  <a:srgbClr val="000000"/>
-                </a:solidFill>
-                <a:latin typeface="Calibri" panose="020F0502020204030204" pitchFamily="34" charset="0"/>
-              </a:rPr>
-              <a:t>Exam scores in the class are roughly bell shaped.</a:t>
-            </a:r>
-          </a:p>
-        </p:txBody>
-      </p:sp>
-      <p:sp>
-        <p:nvSpPr>
-          <p:cNvPr id="10" name="Numbers">
-            <a:extLst>
-              <a:ext uri="{FF2B5EF4-FFF2-40B4-BE49-F238E27FC236}">
-                <a16:creationId xmlns:a16="http://schemas.microsoft.com/office/drawing/2014/main" id="{92E05A5F-195C-FC9C-FB48-DCC9A453F8CA}"/>
-              </a:ext>
-            </a:extLst>
-          </p:cNvPr>
-          <p:cNvSpPr txBox="1"/>
-          <p:nvPr/>
-        </p:nvSpPr>
-        <p:spPr>
-          <a:xfrm>
-            <a:off x="762000" y="2286000"/>
-            <a:ext cx="10668000" cy="400110"/>
-          </a:xfrm>
-          <a:prstGeom prst="rect">
-            <a:avLst/>
-          </a:prstGeom>
-          <a:noFill/>
-        </p:spPr>
-        <p:txBody>
-          <a:bodyPr vert="horz" wrap="square" rtlCol="0">
-            <a:spAutoFit/>
-          </a:bodyPr>
-          <a:lstStyle/>
-          <a:p>
-            <a:pPr>
-              <a:spcAft>
-                <a:spcPts val="200"/>
-              </a:spcAft>
-            </a:pPr>
-            <a:r>
-              <a:rPr lang="en-US" sz="2000" b="1">
-                <a:solidFill>
-                  <a:srgbClr val="000000"/>
-                </a:solidFill>
-                <a:latin typeface="Calibri" panose="020F0502020204030204" pitchFamily="34" charset="0"/>
-              </a:rPr>
-              <a:t>x̄ = 74 points        s = 8 points</a:t>
-            </a:r>
-          </a:p>
-        </p:txBody>
-      </p:sp>
-      <p:sp>
-        <p:nvSpPr>
-          <p:cNvPr id="11" name="Question">
-            <a:extLst>
-              <a:ext uri="{FF2B5EF4-FFF2-40B4-BE49-F238E27FC236}">
-                <a16:creationId xmlns:a16="http://schemas.microsoft.com/office/drawing/2014/main" id="{5F652965-0C94-ADB1-E9E6-6ADE8E4A4B33}"/>
-              </a:ext>
-            </a:extLst>
-          </p:cNvPr>
-          <p:cNvSpPr txBox="1"/>
-          <p:nvPr/>
-        </p:nvSpPr>
-        <p:spPr>
-          <a:xfrm>
-            <a:off x="762000" y="2711510"/>
-            <a:ext cx="10668000" cy="381000"/>
-          </a:xfrm>
-          <a:prstGeom prst="rect">
-            <a:avLst/>
-          </a:prstGeom>
-          <a:noFill/>
-        </p:spPr>
-        <p:txBody>
-          <a:bodyPr vert="horz" wrap="square" rtlCol="0">
-            <a:spAutoFit/>
-          </a:bodyPr>
-          <a:lstStyle/>
-          <a:p>
-            <a:pPr>
-              <a:spcAft>
-                <a:spcPts val="200"/>
-              </a:spcAft>
-            </a:pPr>
-            <a:r>
-              <a:rPr lang="en-US" b="1">
-                <a:solidFill>
-                  <a:srgbClr val="C00000"/>
-                </a:solidFill>
-                <a:latin typeface="Calibri" panose="020F0502020204030204" pitchFamily="34" charset="0"/>
-              </a:rPr>
-              <a:t>What percentage of scores falls in each shaded region?</a:t>
-            </a:r>
-          </a:p>
-        </p:txBody>
-      </p:sp>
-      <p:sp>
-        <p:nvSpPr>
-          <p:cNvPr id="12" name="Result">
-            <a:extLst>
-              <a:ext uri="{FF2B5EF4-FFF2-40B4-BE49-F238E27FC236}">
-                <a16:creationId xmlns:a16="http://schemas.microsoft.com/office/drawing/2014/main" id="{F1DD6977-8EFC-53AF-2BA8-8C567861A9CE}"/>
-              </a:ext>
-            </a:extLst>
-          </p:cNvPr>
-          <p:cNvSpPr/>
-          <p:nvPr/>
-        </p:nvSpPr>
-        <p:spPr>
-          <a:xfrm>
-            <a:off x="762000" y="5873810"/>
-            <a:ext cx="10668000" cy="470595"/>
-          </a:xfrm>
-          <a:prstGeom prst="roundRect">
-            <a:avLst>
-              <a:gd name="adj" fmla="val 4000"/>
-            </a:avLst>
-          </a:prstGeom>
-          <a:solidFill>
-            <a:srgbClr val="F2F6FC"/>
-          </a:solidFill>
-          <a:ln w="15875">
-            <a:solidFill>
-              <a:srgbClr val="4472C4"/>
-            </a:solidFill>
-          </a:ln>
-        </p:spPr>
-        <p:style>
-          <a:lnRef idx="2">
-            <a:schemeClr val="accent1">
-              <a:shade val="15000"/>
-            </a:schemeClr>
-          </a:lnRef>
-          <a:fillRef idx="1">
-            <a:schemeClr val="accent1"/>
-          </a:fillRef>
-          <a:effectRef idx="0">
-            <a:schemeClr val="accent1"/>
-          </a:effectRef>
-          <a:fontRef idx="minor">
-            <a:schemeClr val="lt1"/>
-          </a:fontRef>
-        </p:style>
-        <p:txBody>
-          <a:bodyPr wrap="square" lIns="152400" tIns="76200" rIns="152400" bIns="76200" rtlCol="0" anchor="ctr">
-            <a:spAutoFit/>
-          </a:bodyPr>
-          <a:lstStyle/>
-          <a:p>
-            <a:r>
-              <a:rPr lang="en-US" sz="2000" b="1">
-                <a:solidFill>
-                  <a:srgbClr val="C00000"/>
-                </a:solidFill>
-                <a:latin typeface="Calibri" panose="020F0502020204030204" pitchFamily="34" charset="0"/>
-              </a:rPr>
-              <a:t>(a)  about 68%            (b)  about 16%            (c)  about 95%</a:t>
-            </a:r>
-          </a:p>
-        </p:txBody>
-      </p:sp>
-    </p:spTree>
-    <p:extLst>
-      <p:ext uri="{BB962C8B-B14F-4D97-AF65-F5344CB8AC3E}">
-        <p14:creationId xmlns:p14="http://schemas.microsoft.com/office/powerpoint/2010/main" val="2358832662"/>
-      </p:ext>
-    </p:extLst>
-  </p:cSld>
-  <p:clrMapOvr>
-    <a:masterClrMapping/>
-  </p:clrMapOvr>
-  <p:timing>
-    <p:tnLst>
-      <p:par>
-        <p:cTn id="1" dur="indefinite" restart="never" nodeType="tmRoot">
-          <p:childTnLst>
-            <p:seq concurrent="1" nextAc="seek">
-              <p:cTn id="2" dur="indefinite" nodeType="mainSeq">
-                <p:childTnLst>
-                  <p:par>
-                    <p:cTn id="3" fill="hold">
-                      <p:stCondLst>
-                        <p:cond delay="indefinite"/>
-                      </p:stCondLst>
-                      <p:childTnLst>
-                        <p:par>
-                          <p:cTn id="4" fill="hold">
-                            <p:stCondLst>
-                              <p:cond delay="0"/>
-                            </p:stCondLst>
-                            <p:childTnLst>
-                              <p:par>
-                                <p:cTn id="5" presetID="1" presetClass="entr" presetSubtype="0" fill="hold" grpId="0" nodeType="clickEffect">
-                                  <p:stCondLst>
-                                    <p:cond delay="0"/>
-                                  </p:stCondLst>
-                                  <p:childTnLst>
-                                    <p:set>
-                                      <p:cBhvr>
-                                        <p:cTn id="6" dur="1" fill="hold">
-                                          <p:stCondLst>
-                                            <p:cond delay="0"/>
-                                          </p:stCondLst>
-                                        </p:cTn>
-                                        <p:tgtEl>
-                                          <p:spTgt spid="12"/>
-                                        </p:tgtEl>
-                                        <p:attrNameLst>
-                                          <p:attrName>style.visibility</p:attrName>
-                                        </p:attrNameLst>
-                                      </p:cBhvr>
-                                      <p:to>
-                                        <p:strVal val="visible"/>
-                                      </p:to>
-                                    </p:set>
-                                  </p:childTnLst>
-                                </p:cTn>
-                              </p:par>
-                            </p:childTnLst>
-                          </p:cTn>
-                        </p:par>
-                      </p:childTnLst>
-                    </p:cTn>
-                  </p:par>
-                </p:childTnLst>
-              </p:cTn>
-              <p:prevCondLst>
-                <p:cond evt="onPrev" delay="0">
-                  <p:tgtEl>
-                    <p:sldTgt/>
-                  </p:tgtEl>
-                </p:cond>
-              </p:prevCondLst>
-              <p:nextCondLst>
-                <p:cond evt="onNext" delay="0">
-                  <p:tgtEl>
-                    <p:sldTgt/>
-                  </p:tgtEl>
-                </p:cond>
-              </p:nextCondLst>
-            </p:seq>
-          </p:childTnLst>
-        </p:cTn>
-      </p:par>
-    </p:tnLst>
-    <p:bldLst>
-      <p:bldP spid="12" grpId="0" animBg="1"/>
-    </p:bldLst>
-  </p:timing>
-</p:sld>
-</file>
-
-<file path=ppt/slides/slide24.xml><?xml version="1.0" encoding="utf-8"?>
-<p:sld xmlns:a="http://schemas.openxmlformats.org/drawingml/2006/main" xmlns:r="http://schemas.openxmlformats.org/officeDocument/2006/relationships" xmlns:p="http://schemas.openxmlformats.org/presentationml/2006/main">
-  <p:cSld>
-    <p:spTree>
-      <p:nvGrpSpPr>
-        <p:cNvPr id="1" name=""/>
-        <p:cNvGrpSpPr/>
-        <p:nvPr/>
-      </p:nvGrpSpPr>
-      <p:grpSpPr>
-        <a:xfrm>
-          <a:off x="0" y="0"/>
-          <a:ext cx="0" cy="0"/>
-          <a:chOff x="0" y="0"/>
-          <a:chExt cx="0" cy="0"/>
-        </a:xfrm>
-      </p:grpSpPr>
-      <p:sp>
-        <p:nvSpPr>
-          <p:cNvPr id="2" name="Title 1">
-            <a:extLst>
-              <a:ext uri="{FF2B5EF4-FFF2-40B4-BE49-F238E27FC236}">
-                <a16:creationId xmlns:a16="http://schemas.microsoft.com/office/drawing/2014/main" id="{D1E825F3-CA5C-D321-A12F-235D7E6C102E}"/>
-              </a:ext>
-            </a:extLst>
-          </p:cNvPr>
-          <p:cNvSpPr>
-            <a:spLocks noGrp="1"/>
-          </p:cNvSpPr>
-          <p:nvPr>
-            <p:ph type="title"/>
-          </p:nvPr>
-        </p:nvSpPr>
-        <p:spPr/>
-        <p:txBody>
-          <a:bodyPr>
-            <a:noAutofit/>
-          </a:bodyPr>
-          <a:lstStyle/>
-          <a:p>
-            <a:r>
-              <a:rPr lang="en-US">
-                <a:solidFill>
-                  <a:srgbClr val="1F3864"/>
-                </a:solidFill>
-              </a:rPr>
-              <a:t>Outliers: the two-standard-deviation rule</a:t>
-            </a:r>
-          </a:p>
-        </p:txBody>
-      </p:sp>
-      <p:sp>
-        <p:nvSpPr>
-          <p:cNvPr id="4" name="Slide Number Placeholder 3">
-            <a:extLst>
-              <a:ext uri="{FF2B5EF4-FFF2-40B4-BE49-F238E27FC236}">
-                <a16:creationId xmlns:a16="http://schemas.microsoft.com/office/drawing/2014/main" id="{632F5803-1B77-5AE0-EEB8-17B8E3F9722A}"/>
-              </a:ext>
-            </a:extLst>
-          </p:cNvPr>
-          <p:cNvSpPr>
-            <a:spLocks noGrp="1"/>
-          </p:cNvSpPr>
-          <p:nvPr>
-            <p:ph type="sldNum" sz="quarter" idx="12"/>
-          </p:nvPr>
-        </p:nvSpPr>
-        <p:spPr/>
-        <p:txBody>
-          <a:bodyPr/>
-          <a:lstStyle/>
-          <a:p>
-            <a:fld id="{A80A81DD-F10A-4B1C-963A-0ABBB4865886}" type="slidenum">
-              <a:rPr lang="en-US" sz="1600" smtClean="0"/>
-              <a:t>24</a:t>
-            </a:fld>
-            <a:endParaRPr lang="en-US" sz="1600"/>
-          </a:p>
-        </p:txBody>
-      </p:sp>
-      <p:sp>
-        <p:nvSpPr>
-          <p:cNvPr id="5" name="TextBox 4">
-            <a:extLst>
-              <a:ext uri="{FF2B5EF4-FFF2-40B4-BE49-F238E27FC236}">
-                <a16:creationId xmlns:a16="http://schemas.microsoft.com/office/drawing/2014/main" id="{F2C3E119-33DB-B84A-C9CB-1DA41099D1A1}"/>
-              </a:ext>
-            </a:extLst>
-          </p:cNvPr>
-          <p:cNvSpPr txBox="1"/>
-          <p:nvPr/>
-        </p:nvSpPr>
-        <p:spPr>
-          <a:xfrm>
-            <a:off x="762000" y="1841500"/>
-            <a:ext cx="3175000" cy="345440"/>
-          </a:xfrm>
-          <a:prstGeom prst="rect">
-            <a:avLst/>
-          </a:prstGeom>
-          <a:noFill/>
-        </p:spPr>
-        <p:txBody>
-          <a:bodyPr vert="horz" wrap="square" rtlCol="0">
-            <a:spAutoFit/>
-          </a:bodyPr>
-          <a:lstStyle/>
-          <a:p>
-            <a:r>
-              <a:rPr lang="en-US" sz="1600" b="1">
-                <a:solidFill>
-                  <a:srgbClr val="C00000"/>
-                </a:solidFill>
-              </a:rPr>
-              <a:t>outlier</a:t>
-            </a:r>
-          </a:p>
-        </p:txBody>
-      </p:sp>
-      <p:sp>
-        <p:nvSpPr>
-          <p:cNvPr id="6" name="TextBox 5">
-            <a:extLst>
-              <a:ext uri="{FF2B5EF4-FFF2-40B4-BE49-F238E27FC236}">
-                <a16:creationId xmlns:a16="http://schemas.microsoft.com/office/drawing/2014/main" id="{377D380C-8635-8A53-300D-33D0068157E3}"/>
-              </a:ext>
-            </a:extLst>
-          </p:cNvPr>
-          <p:cNvSpPr txBox="1"/>
-          <p:nvPr/>
-        </p:nvSpPr>
-        <p:spPr>
-          <a:xfrm>
-            <a:off x="4038600" y="1841499"/>
-            <a:ext cx="7391400" cy="584775"/>
-          </a:xfrm>
-          <a:prstGeom prst="rect">
-            <a:avLst/>
-          </a:prstGeom>
-          <a:noFill/>
-        </p:spPr>
-        <p:txBody>
-          <a:bodyPr vert="horz" wrap="square" rtlCol="0">
-            <a:spAutoFit/>
-          </a:bodyPr>
-          <a:lstStyle/>
-          <a:p>
-            <a:r>
-              <a:rPr lang="en-US" sz="1600">
-                <a:solidFill>
-                  <a:srgbClr val="000000"/>
-                </a:solidFill>
-              </a:rPr>
-              <a:t>a value at least 2 standard deviations from the mean, |z| ≥ 2 (about 5% of bell-shaped data)</a:t>
-            </a:r>
-            <a:endParaRPr lang="en-US" sz="1600" i="1">
-              <a:solidFill>
-                <a:srgbClr val="595959"/>
-              </a:solidFill>
-            </a:endParaRPr>
-          </a:p>
-        </p:txBody>
-      </p:sp>
-      <p:sp>
-        <p:nvSpPr>
-          <p:cNvPr id="3" name="Title rule">
-            <a:extLst>
-              <a:ext uri="{FF2B5EF4-FFF2-40B4-BE49-F238E27FC236}">
-                <a16:creationId xmlns:a16="http://schemas.microsoft.com/office/drawing/2014/main" id="{784C6B91-DD86-0BA1-4A71-C454C38471E5}"/>
-              </a:ext>
-            </a:extLst>
-          </p:cNvPr>
-          <p:cNvSpPr/>
-          <p:nvPr/>
-        </p:nvSpPr>
-        <p:spPr>
-          <a:xfrm>
-            <a:off x="838200" y="1600200"/>
-            <a:ext cx="10515600" cy="38100"/>
-          </a:xfrm>
-          <a:prstGeom prst="rect">
-            <a:avLst/>
-          </a:prstGeom>
-          <a:solidFill>
-            <a:srgbClr val="4472C4"/>
-          </a:solidFill>
-          <a:ln w="12700" cap="flat" cmpd="sng" algn="ctr">
-            <a:noFill/>
-            <a:prstDash val="solid"/>
-            <a:miter lim="800000"/>
-          </a:ln>
-          <a:effectLst/>
-          <a:extLst>
-            <a:ext uri="{91240B29-F687-4F45-9708-019B960494DF}">
-              <a14:hiddenLine xmlns:a14="http://schemas.microsoft.com/office/drawing/2010/main" w="12700" cap="flat" cmpd="sng" algn="ctr">
-                <a:solidFill>
-                  <a:schemeClr val="accent1">
-                    <a:shade val="15000"/>
-                  </a:schemeClr>
-                </a:solidFill>
-                <a:prstDash val="solid"/>
-                <a:miter lim="800000"/>
-              </a14:hiddenLine>
-            </a:ext>
-          </a:extLst>
-        </p:spPr>
-        <p:style>
-          <a:lnRef idx="2">
-            <a:schemeClr val="accent1">
-              <a:shade val="15000"/>
-            </a:schemeClr>
-          </a:lnRef>
-          <a:fillRef idx="1">
-            <a:schemeClr val="accent1"/>
-          </a:fillRef>
-          <a:effectRef idx="0">
-            <a:schemeClr val="accent1"/>
-          </a:effectRef>
-          <a:fontRef idx="minor">
-            <a:schemeClr val="lt1"/>
-          </a:fontRef>
-        </p:style>
-        <p:txBody>
-          <a:bodyPr rtlCol="0" anchor="ctr"/>
-          <a:lstStyle/>
-          <a:p>
-            <a:pPr algn="ctr"/>
-            <a:endParaRPr lang="en-US"/>
-          </a:p>
-        </p:txBody>
-      </p:sp>
-      <p:pic>
-        <p:nvPicPr>
-          <p:cNvPr id="8" name="l12_outlier_tails.png">
-            <a:extLst>
-              <a:ext uri="{FF2B5EF4-FFF2-40B4-BE49-F238E27FC236}">
-                <a16:creationId xmlns:a16="http://schemas.microsoft.com/office/drawing/2014/main" id="{D1B24087-7230-44DD-8234-627133E4C665}"/>
-              </a:ext>
-            </a:extLst>
-          </p:cNvPr>
-          <p:cNvPicPr>
-            <a:picLocks/>
-          </p:cNvPicPr>
-          <p:nvPr/>
-        </p:nvPicPr>
-        <p:blipFill>
-          <a:blip r:embed="rId2">
-            <a:extLst>
-              <a:ext uri="{28A0092B-C50C-407E-A947-70E740481C1C}">
-                <a14:useLocalDpi xmlns:a14="http://schemas.microsoft.com/office/drawing/2010/main" val="0"/>
-              </a:ext>
-            </a:extLst>
-          </a:blip>
-          <a:stretch>
-            <a:fillRect/>
-          </a:stretch>
-        </p:blipFill>
-        <p:spPr>
-          <a:xfrm>
-            <a:off x="762000" y="3342738"/>
-            <a:ext cx="10668000" cy="2603500"/>
-          </a:xfrm>
-          <a:prstGeom prst="rect">
-            <a:avLst/>
-          </a:prstGeom>
-        </p:spPr>
-      </p:pic>
-    </p:spTree>
-    <p:extLst>
-      <p:ext uri="{BB962C8B-B14F-4D97-AF65-F5344CB8AC3E}">
-        <p14:creationId xmlns:p14="http://schemas.microsoft.com/office/powerpoint/2010/main" val="3981073960"/>
-      </p:ext>
-    </p:extLst>
-  </p:cSld>
-  <p:clrMapOvr>
-    <a:masterClrMapping/>
-  </p:clrMapOvr>
-  <p:timing>
-    <p:tnLst>
-      <p:par>
-        <p:cTn id="1" dur="indefinite" restart="never" nodeType="tmRoot">
-          <p:childTnLst>
-            <p:seq concurrent="1" nextAc="seek">
-              <p:cTn id="2" dur="indefinite" nodeType="mainSeq">
-                <p:childTnLst>
-                  <p:par>
-                    <p:cTn id="3" fill="hold">
-                      <p:stCondLst>
-                        <p:cond delay="indefinite"/>
-                      </p:stCondLst>
-                      <p:childTnLst>
-                        <p:par>
-                          <p:cTn id="4" fill="hold">
-                            <p:stCondLst>
-                              <p:cond delay="0"/>
-                            </p:stCondLst>
-                            <p:childTnLst>
-                              <p:par>
-                                <p:cTn id="5" presetID="34" presetClass="entr" presetSubtype="0" fill="hold" grpId="0" nodeType="clickEffect">
-                                  <p:stCondLst>
-                                    <p:cond delay="0"/>
-                                  </p:stCondLst>
-                                  <p:childTnLst>
-                                    <p:set>
-                                      <p:cBhvr>
-                                        <p:cTn id="6" dur="1" fill="hold">
-                                          <p:stCondLst>
-                                            <p:cond delay="0"/>
-                                          </p:stCondLst>
-                                        </p:cTn>
-                                        <p:tgtEl>
-                                          <p:spTgt spid="6"/>
-                                        </p:tgtEl>
-                                        <p:attrNameLst>
-                                          <p:attrName>style.visibility</p:attrName>
-                                        </p:attrNameLst>
-                                      </p:cBhvr>
-                                      <p:to>
-                                        <p:strVal val="visible"/>
-                                      </p:to>
-                                    </p:set>
-                                    <p:anim from="(-#ppt_w/2)" to="(#ppt_x)" calcmode="lin" valueType="num">
-                                      <p:cBhvr>
-                                        <p:cTn id="7" dur="600" fill="hold">
-                                          <p:stCondLst>
-                                            <p:cond delay="0"/>
-                                          </p:stCondLst>
-                                        </p:cTn>
-                                        <p:tgtEl>
-                                          <p:spTgt spid="6"/>
-                                        </p:tgtEl>
-                                        <p:attrNameLst>
-                                          <p:attrName>ppt_x</p:attrName>
-                                        </p:attrNameLst>
-                                      </p:cBhvr>
-                                    </p:anim>
-                                    <p:anim from="0" to="-1.0" calcmode="lin" valueType="num">
-                                      <p:cBhvr>
-                                        <p:cTn id="8" dur="200" decel="50000" autoRev="1" fill="hold">
-                                          <p:stCondLst>
-                                            <p:cond delay="600"/>
-                                          </p:stCondLst>
-                                        </p:cTn>
-                                        <p:tgtEl>
-                                          <p:spTgt spid="6"/>
-                                        </p:tgtEl>
-                                        <p:attrNameLst>
-                                          <p:attrName>xshear</p:attrName>
-                                        </p:attrNameLst>
-                                      </p:cBhvr>
-                                    </p:anim>
-                                    <p:animScale>
-                                      <p:cBhvr>
-                                        <p:cTn id="9" dur="200" decel="100000" autoRev="1" fill="hold">
-                                          <p:stCondLst>
-                                            <p:cond delay="600"/>
-                                          </p:stCondLst>
-                                        </p:cTn>
-                                        <p:tgtEl>
-                                          <p:spTgt spid="6"/>
-                                        </p:tgtEl>
-                                      </p:cBhvr>
-                                      <p:from x="100000" y="100000"/>
-                                      <p:to x="80000" y="100000"/>
-                                    </p:animScale>
-                                    <p:anim by="(#ppt_h/3+#ppt_w*0.1)" calcmode="lin" valueType="num">
-                                      <p:cBhvr additive="sum">
-                                        <p:cTn id="10" dur="200" decel="100000" autoRev="1" fill="hold">
-                                          <p:stCondLst>
-                                            <p:cond delay="600"/>
-                                          </p:stCondLst>
-                                        </p:cTn>
-                                        <p:tgtEl>
-                                          <p:spTgt spid="6"/>
-                                        </p:tgtEl>
-                                        <p:attrNameLst>
-                                          <p:attrName>ppt_x</p:attrName>
-                                        </p:attrNameLst>
-                                      </p:cBhvr>
-                                    </p:anim>
-                                  </p:childTnLst>
-                                </p:cTn>
-                              </p:par>
-                            </p:childTnLst>
-                          </p:cTn>
-                        </p:par>
-                      </p:childTnLst>
-                    </p:cTn>
-                  </p:par>
-                </p:childTnLst>
-              </p:cTn>
-              <p:prevCondLst>
-                <p:cond evt="onPrev" delay="0">
-                  <p:tgtEl>
-                    <p:sldTgt/>
-                  </p:tgtEl>
-                </p:cond>
-              </p:prevCondLst>
-              <p:nextCondLst>
-                <p:cond evt="onNext" delay="0">
-                  <p:tgtEl>
-                    <p:sldTgt/>
-                  </p:tgtEl>
-                </p:cond>
-              </p:nextCondLst>
-            </p:seq>
-          </p:childTnLst>
-        </p:cTn>
-      </p:par>
-    </p:tnLst>
-    <p:bldLst>
-      <p:bldP spid="6" grpId="0"/>
-    </p:bldLst>
-  </p:timing>
-</p:sld>
-</file>
-
-<file path=ppt/slides/slide25.xml><?xml version="1.0" encoding="utf-8"?>
-<p:sld xmlns:a="http://schemas.openxmlformats.org/drawingml/2006/main" xmlns:r="http://schemas.openxmlformats.org/officeDocument/2006/relationships" xmlns:p="http://schemas.openxmlformats.org/presentationml/2006/main">
-  <p:cSld>
-    <p:spTree>
-      <p:nvGrpSpPr>
-        <p:cNvPr id="1" name=""/>
-        <p:cNvGrpSpPr/>
-        <p:nvPr/>
-      </p:nvGrpSpPr>
-      <p:grpSpPr>
-        <a:xfrm>
-          <a:off x="0" y="0"/>
-          <a:ext cx="0" cy="0"/>
-          <a:chOff x="0" y="0"/>
-          <a:chExt cx="0" cy="0"/>
-        </a:xfrm>
-      </p:grpSpPr>
-      <p:sp>
-        <p:nvSpPr>
-          <p:cNvPr id="2" name="Title 1">
-            <a:extLst>
-              <a:ext uri="{FF2B5EF4-FFF2-40B4-BE49-F238E27FC236}">
-                <a16:creationId xmlns:a16="http://schemas.microsoft.com/office/drawing/2014/main" id="{D1E825F3-CA5C-D321-A12F-235D7E6C102E}"/>
-              </a:ext>
-            </a:extLst>
-          </p:cNvPr>
-          <p:cNvSpPr>
-            <a:spLocks noGrp="1"/>
-          </p:cNvSpPr>
-          <p:nvPr>
-            <p:ph type="title"/>
-          </p:nvPr>
-        </p:nvSpPr>
-        <p:spPr/>
-        <p:txBody>
-          <a:bodyPr>
-            <a:noAutofit/>
-          </a:bodyPr>
-          <a:lstStyle/>
-          <a:p>
-            <a:r>
-              <a:rPr lang="en-US" dirty="0">
-                <a:solidFill>
-                  <a:srgbClr val="1F3864"/>
-                </a:solidFill>
-              </a:rPr>
-              <a:t>When the two outlier rules disagree</a:t>
-            </a:r>
-          </a:p>
-        </p:txBody>
-      </p:sp>
-      <p:sp>
-        <p:nvSpPr>
-          <p:cNvPr id="4" name="Slide Number Placeholder 3">
-            <a:extLst>
-              <a:ext uri="{FF2B5EF4-FFF2-40B4-BE49-F238E27FC236}">
-                <a16:creationId xmlns:a16="http://schemas.microsoft.com/office/drawing/2014/main" id="{632F5803-1B77-5AE0-EEB8-17B8E3F9722A}"/>
-              </a:ext>
-            </a:extLst>
-          </p:cNvPr>
-          <p:cNvSpPr>
-            <a:spLocks noGrp="1"/>
-          </p:cNvSpPr>
-          <p:nvPr>
-            <p:ph type="sldNum" sz="quarter" idx="12"/>
-          </p:nvPr>
-        </p:nvSpPr>
-        <p:spPr/>
-        <p:txBody>
-          <a:bodyPr/>
-          <a:lstStyle/>
-          <a:p>
-            <a:fld id="{A80A81DD-F10A-4B1C-963A-0ABBB4865886}" type="slidenum">
-              <a:rPr lang="en-US" sz="1600" smtClean="0"/>
-              <a:t>25</a:t>
-            </a:fld>
-            <a:endParaRPr lang="en-US" sz="1600"/>
-          </a:p>
-        </p:txBody>
-      </p:sp>
-      <p:sp>
-        <p:nvSpPr>
-          <p:cNvPr id="3" name="Title rule">
-            <a:extLst>
-              <a:ext uri="{FF2B5EF4-FFF2-40B4-BE49-F238E27FC236}">
-                <a16:creationId xmlns:a16="http://schemas.microsoft.com/office/drawing/2014/main" id="{784C6B91-DD86-0BA1-4A71-C454C38471E5}"/>
-              </a:ext>
-            </a:extLst>
-          </p:cNvPr>
-          <p:cNvSpPr/>
-          <p:nvPr/>
-        </p:nvSpPr>
-        <p:spPr>
-          <a:xfrm>
-            <a:off x="838200" y="1600200"/>
-            <a:ext cx="10515600" cy="38100"/>
-          </a:xfrm>
-          <a:prstGeom prst="rect">
-            <a:avLst/>
-          </a:prstGeom>
-          <a:solidFill>
-            <a:srgbClr val="4472C4"/>
-          </a:solidFill>
-          <a:ln w="12700" cap="flat" cmpd="sng" algn="ctr">
-            <a:noFill/>
-            <a:prstDash val="solid"/>
-            <a:miter lim="800000"/>
-          </a:ln>
-          <a:effectLst/>
-          <a:extLst>
-            <a:ext uri="{91240B29-F687-4F45-9708-019B960494DF}">
-              <a14:hiddenLine xmlns:a14="http://schemas.microsoft.com/office/drawing/2010/main" w="12700" cap="flat" cmpd="sng" algn="ctr">
-                <a:solidFill>
-                  <a:schemeClr val="accent1">
-                    <a:shade val="15000"/>
-                  </a:schemeClr>
-                </a:solidFill>
-                <a:prstDash val="solid"/>
-                <a:miter lim="800000"/>
-              </a14:hiddenLine>
-            </a:ext>
-          </a:extLst>
-        </p:spPr>
-        <p:style>
-          <a:lnRef idx="2">
-            <a:schemeClr val="accent1">
-              <a:shade val="15000"/>
-            </a:schemeClr>
-          </a:lnRef>
-          <a:fillRef idx="1">
-            <a:schemeClr val="accent1"/>
-          </a:fillRef>
-          <a:effectRef idx="0">
-            <a:schemeClr val="accent1"/>
-          </a:effectRef>
-          <a:fontRef idx="minor">
-            <a:schemeClr val="lt1"/>
-          </a:fontRef>
-        </p:style>
-        <p:txBody>
-          <a:bodyPr rtlCol="0" anchor="ctr"/>
-          <a:lstStyle/>
-          <a:p>
-            <a:pPr algn="ctr"/>
-            <a:endParaRPr lang="en-US"/>
-          </a:p>
-        </p:txBody>
-      </p:sp>
-      <p:pic>
-        <p:nvPicPr>
-          <p:cNvPr id="8" name="l12_iqr_vs_2s.png">
-            <a:extLst>
-              <a:ext uri="{FF2B5EF4-FFF2-40B4-BE49-F238E27FC236}">
-                <a16:creationId xmlns:a16="http://schemas.microsoft.com/office/drawing/2014/main" id="{9726356A-CEE9-02DB-FC74-0346021E026E}"/>
-              </a:ext>
-            </a:extLst>
-          </p:cNvPr>
-          <p:cNvPicPr>
-            <a:picLocks/>
-          </p:cNvPicPr>
-          <p:nvPr/>
-        </p:nvPicPr>
-        <p:blipFill>
-          <a:blip r:embed="rId2">
-            <a:extLst>
-              <a:ext uri="{28A0092B-C50C-407E-A947-70E740481C1C}">
-                <a14:useLocalDpi xmlns:a14="http://schemas.microsoft.com/office/drawing/2010/main" val="0"/>
-              </a:ext>
-            </a:extLst>
-          </a:blip>
-          <a:stretch>
-            <a:fillRect/>
-          </a:stretch>
-        </p:blipFill>
-        <p:spPr>
-          <a:xfrm>
-            <a:off x="762000" y="2311400"/>
-            <a:ext cx="10668000" cy="2984500"/>
-          </a:xfrm>
-          <a:prstGeom prst="rect">
-            <a:avLst/>
-          </a:prstGeom>
-        </p:spPr>
-      </p:pic>
-      <p:sp>
-        <p:nvSpPr>
-          <p:cNvPr id="10" name="Question">
-            <a:extLst>
-              <a:ext uri="{FF2B5EF4-FFF2-40B4-BE49-F238E27FC236}">
-                <a16:creationId xmlns:a16="http://schemas.microsoft.com/office/drawing/2014/main" id="{50F8E818-D879-9E92-5AAA-A8CE731F9AEF}"/>
-              </a:ext>
-            </a:extLst>
-          </p:cNvPr>
-          <p:cNvSpPr txBox="1"/>
-          <p:nvPr/>
-        </p:nvSpPr>
-        <p:spPr>
-          <a:xfrm>
-            <a:off x="762000" y="1879600"/>
-            <a:ext cx="10668000" cy="381000"/>
-          </a:xfrm>
-          <a:prstGeom prst="rect">
-            <a:avLst/>
-          </a:prstGeom>
-          <a:noFill/>
-        </p:spPr>
-        <p:txBody>
-          <a:bodyPr vert="horz" wrap="square" rtlCol="0">
-            <a:spAutoFit/>
-          </a:bodyPr>
-          <a:lstStyle/>
-          <a:p>
-            <a:pPr>
-              <a:spcAft>
-                <a:spcPts val="200"/>
-              </a:spcAft>
-            </a:pPr>
-            <a:r>
-              <a:rPr lang="en-US" b="1">
-                <a:solidFill>
-                  <a:srgbClr val="C00000"/>
-                </a:solidFill>
-                <a:latin typeface="Calibri" panose="020F0502020204030204" pitchFamily="34" charset="0"/>
-              </a:rPr>
-              <a:t>Do the 1.5 × IQR rule and the ± 2s rule flag the same students?</a:t>
-            </a:r>
-          </a:p>
-        </p:txBody>
-      </p:sp>
-      <p:sp>
-        <p:nvSpPr>
-          <p:cNvPr id="11" name="Result">
-            <a:extLst>
-              <a:ext uri="{FF2B5EF4-FFF2-40B4-BE49-F238E27FC236}">
-                <a16:creationId xmlns:a16="http://schemas.microsoft.com/office/drawing/2014/main" id="{7EDE5771-9447-42A3-D148-2D679D81E8C5}"/>
-              </a:ext>
-            </a:extLst>
-          </p:cNvPr>
-          <p:cNvSpPr/>
-          <p:nvPr/>
-        </p:nvSpPr>
-        <p:spPr>
-          <a:xfrm>
-            <a:off x="762000" y="5397500"/>
-            <a:ext cx="10668000" cy="784324"/>
-          </a:xfrm>
-          <a:prstGeom prst="roundRect">
-            <a:avLst>
-              <a:gd name="adj" fmla="val 4000"/>
-            </a:avLst>
-          </a:prstGeom>
-          <a:solidFill>
-            <a:srgbClr val="F2F6FC"/>
-          </a:solidFill>
-          <a:ln w="15875">
-            <a:solidFill>
-              <a:srgbClr val="4472C4"/>
-            </a:solidFill>
-          </a:ln>
-        </p:spPr>
-        <p:style>
-          <a:lnRef idx="2">
-            <a:schemeClr val="accent1">
-              <a:shade val="15000"/>
-            </a:schemeClr>
-          </a:lnRef>
-          <a:fillRef idx="1">
-            <a:schemeClr val="accent1"/>
-          </a:fillRef>
-          <a:effectRef idx="0">
-            <a:schemeClr val="accent1"/>
-          </a:effectRef>
-          <a:fontRef idx="minor">
-            <a:schemeClr val="lt1"/>
-          </a:fontRef>
-        </p:style>
-        <p:txBody>
-          <a:bodyPr wrap="square" lIns="152400" tIns="76200" rIns="152400" bIns="76200" rtlCol="0" anchor="ctr">
-            <a:spAutoFit/>
-          </a:bodyPr>
-          <a:lstStyle/>
-          <a:p>
-            <a:r>
-              <a:rPr lang="en-US" sz="2000" b="1">
-                <a:solidFill>
-                  <a:srgbClr val="C00000"/>
-                </a:solidFill>
-                <a:latin typeface="Calibri" panose="020F0502020204030204" pitchFamily="34" charset="0"/>
-              </a:rPr>
-              <a:t>No:  the IQR rule flags 13 students, the ± 2s rule only 6</a:t>
-            </a:r>
-          </a:p>
-          <a:p>
-            <a:r>
-              <a:rPr lang="en-US" b="1">
-                <a:solidFill>
-                  <a:srgbClr val="C00000"/>
-                </a:solidFill>
-                <a:latin typeface="Calibri" panose="020F0502020204030204" pitchFamily="34" charset="0"/>
-              </a:rPr>
-              <a:t>Why:  the 92-inch value inflates s and pushes the 2s fence out; the quartiles barely move</a:t>
-            </a:r>
-          </a:p>
-        </p:txBody>
-      </p:sp>
-    </p:spTree>
-    <p:extLst>
-      <p:ext uri="{BB962C8B-B14F-4D97-AF65-F5344CB8AC3E}">
-        <p14:creationId xmlns:p14="http://schemas.microsoft.com/office/powerpoint/2010/main" val="1036997357"/>
-      </p:ext>
-    </p:extLst>
-  </p:cSld>
-  <p:clrMapOvr>
-    <a:masterClrMapping/>
-  </p:clrMapOvr>
-  <p:timing>
-    <p:tnLst>
-      <p:par>
-        <p:cTn id="1" dur="indefinite" restart="never" nodeType="tmRoot">
-          <p:childTnLst>
-            <p:seq concurrent="1" nextAc="seek">
-              <p:cTn id="2" dur="indefinite" nodeType="mainSeq">
-                <p:childTnLst>
-                  <p:par>
-                    <p:cTn id="3" fill="hold">
-                      <p:stCondLst>
-                        <p:cond delay="indefinite"/>
-                      </p:stCondLst>
-                      <p:childTnLst>
-                        <p:par>
-                          <p:cTn id="4" fill="hold">
-                            <p:stCondLst>
-                              <p:cond delay="0"/>
-                            </p:stCondLst>
-                            <p:childTnLst>
-                              <p:par>
-                                <p:cTn id="5" presetID="1" presetClass="entr" presetSubtype="0" fill="hold" grpId="0" nodeType="clickEffect">
-                                  <p:stCondLst>
-                                    <p:cond delay="0"/>
-                                  </p:stCondLst>
-                                  <p:childTnLst>
-                                    <p:set>
-                                      <p:cBhvr>
-                                        <p:cTn id="6" dur="1" fill="hold">
-                                          <p:stCondLst>
-                                            <p:cond delay="0"/>
-                                          </p:stCondLst>
-                                        </p:cTn>
-                                        <p:tgtEl>
-                                          <p:spTgt spid="11"/>
-                                        </p:tgtEl>
-                                        <p:attrNameLst>
-                                          <p:attrName>style.visibility</p:attrName>
-                                        </p:attrNameLst>
-                                      </p:cBhvr>
-                                      <p:to>
-                                        <p:strVal val="visible"/>
-                                      </p:to>
-                                    </p:set>
-                                  </p:childTnLst>
-                                </p:cTn>
-                              </p:par>
-                            </p:childTnLst>
-                          </p:cTn>
-                        </p:par>
-                      </p:childTnLst>
-                    </p:cTn>
-                  </p:par>
-                </p:childTnLst>
-              </p:cTn>
-              <p:prevCondLst>
-                <p:cond evt="onPrev" delay="0">
-                  <p:tgtEl>
-                    <p:sldTgt/>
-                  </p:tgtEl>
-                </p:cond>
-              </p:prevCondLst>
-              <p:nextCondLst>
-                <p:cond evt="onNext" delay="0">
-                  <p:tgtEl>
-                    <p:sldTgt/>
-                  </p:tgtEl>
-                </p:cond>
-              </p:nextCondLst>
-            </p:seq>
-          </p:childTnLst>
-        </p:cTn>
-      </p:par>
-    </p:tnLst>
-    <p:bldLst>
-      <p:bldP spid="11" grpId="0" animBg="1"/>
-    </p:bldLst>
-  </p:timing>
-</p:sld>
-</file>
-
-<file path=ppt/slides/slide26.xml><?xml version="1.0" encoding="utf-8"?>
-<p:sld xmlns:a="http://schemas.openxmlformats.org/drawingml/2006/main" xmlns:r="http://schemas.openxmlformats.org/officeDocument/2006/relationships" xmlns:p="http://schemas.openxmlformats.org/presentationml/2006/main">
-  <p:cSld>
-    <p:spTree>
-      <p:nvGrpSpPr>
-        <p:cNvPr id="1" name=""/>
-        <p:cNvGrpSpPr/>
-        <p:nvPr/>
-      </p:nvGrpSpPr>
-      <p:grpSpPr>
-        <a:xfrm>
-          <a:off x="0" y="0"/>
-          <a:ext cx="0" cy="0"/>
-          <a:chOff x="0" y="0"/>
-          <a:chExt cx="0" cy="0"/>
-        </a:xfrm>
-      </p:grpSpPr>
-      <p:sp>
-        <p:nvSpPr>
-          <p:cNvPr id="2" name="Title 1">
-            <a:extLst>
-              <a:ext uri="{FF2B5EF4-FFF2-40B4-BE49-F238E27FC236}">
-                <a16:creationId xmlns:a16="http://schemas.microsoft.com/office/drawing/2014/main" id="{C08D30B1-1864-30EF-7EAB-9BEE656C0012}"/>
-              </a:ext>
-            </a:extLst>
-          </p:cNvPr>
-          <p:cNvSpPr>
-            <a:spLocks noGrp="1"/>
-          </p:cNvSpPr>
-          <p:nvPr>
-            <p:ph type="title"/>
-          </p:nvPr>
-        </p:nvSpPr>
-        <p:spPr/>
-        <p:txBody>
-          <a:bodyPr>
-            <a:noAutofit/>
-          </a:bodyPr>
-          <a:lstStyle/>
-          <a:p>
-            <a:r>
-              <a:rPr lang="en-US">
-                <a:solidFill>
-                  <a:srgbClr val="1F3864"/>
-                </a:solidFill>
-              </a:rPr>
-              <a:t>Computing quantiles from a normal distribution</a:t>
-            </a:r>
-          </a:p>
-        </p:txBody>
-      </p:sp>
-      <p:sp>
-        <p:nvSpPr>
-          <p:cNvPr id="4" name="Slide Number Placeholder 3">
-            <a:extLst>
-              <a:ext uri="{FF2B5EF4-FFF2-40B4-BE49-F238E27FC236}">
-                <a16:creationId xmlns:a16="http://schemas.microsoft.com/office/drawing/2014/main" id="{3F875068-D051-44AE-498E-1BEBEDE3A7C8}"/>
-              </a:ext>
-            </a:extLst>
-          </p:cNvPr>
-          <p:cNvSpPr>
-            <a:spLocks noGrp="1"/>
-          </p:cNvSpPr>
-          <p:nvPr>
-            <p:ph type="sldNum" sz="quarter" idx="12"/>
-          </p:nvPr>
-        </p:nvSpPr>
-        <p:spPr/>
-        <p:txBody>
-          <a:bodyPr/>
-          <a:lstStyle/>
-          <a:p>
-            <a:fld id="{A80A81DD-F10A-4B1C-963A-0ABBB4865886}" type="slidenum">
-              <a:rPr lang="en-US" sz="1600" smtClean="0"/>
-              <a:t>26</a:t>
-            </a:fld>
-            <a:endParaRPr lang="en-US" sz="1600"/>
-          </a:p>
-        </p:txBody>
-      </p:sp>
-      <p:sp>
-        <p:nvSpPr>
-          <p:cNvPr id="3" name="Title rule">
-            <a:extLst>
-              <a:ext uri="{FF2B5EF4-FFF2-40B4-BE49-F238E27FC236}">
-                <a16:creationId xmlns:a16="http://schemas.microsoft.com/office/drawing/2014/main" id="{30656AA8-9645-F028-C769-A313710853CC}"/>
-              </a:ext>
-            </a:extLst>
-          </p:cNvPr>
-          <p:cNvSpPr/>
-          <p:nvPr/>
-        </p:nvSpPr>
-        <p:spPr>
-          <a:xfrm>
-            <a:off x="838200" y="1600200"/>
-            <a:ext cx="10515600" cy="38100"/>
-          </a:xfrm>
-          <a:prstGeom prst="rect">
-            <a:avLst/>
-          </a:prstGeom>
-          <a:solidFill>
-            <a:srgbClr val="4472C4"/>
-          </a:solidFill>
-          <a:ln w="12700" cap="flat" cmpd="sng" algn="ctr">
-            <a:noFill/>
-            <a:prstDash val="solid"/>
-            <a:miter lim="800000"/>
-          </a:ln>
-          <a:effectLst/>
-          <a:extLst>
-            <a:ext uri="{91240B29-F687-4F45-9708-019B960494DF}">
-              <a14:hiddenLine xmlns:a14="http://schemas.microsoft.com/office/drawing/2010/main" w="12700" cap="flat" cmpd="sng" algn="ctr">
-                <a:solidFill>
-                  <a:schemeClr val="accent1">
-                    <a:shade val="15000"/>
-                  </a:schemeClr>
-                </a:solidFill>
-                <a:prstDash val="solid"/>
-                <a:miter lim="800000"/>
-              </a14:hiddenLine>
-            </a:ext>
-          </a:extLst>
-        </p:spPr>
-        <p:style>
-          <a:lnRef idx="2">
-            <a:schemeClr val="accent1">
-              <a:shade val="15000"/>
-            </a:schemeClr>
-          </a:lnRef>
-          <a:fillRef idx="1">
-            <a:schemeClr val="accent1"/>
-          </a:fillRef>
-          <a:effectRef idx="0">
-            <a:schemeClr val="accent1"/>
-          </a:effectRef>
-          <a:fontRef idx="minor">
-            <a:schemeClr val="lt1"/>
-          </a:fontRef>
-        </p:style>
-        <p:txBody>
-          <a:bodyPr rtlCol="0" anchor="ctr"/>
-          <a:lstStyle/>
-          <a:p>
-            <a:pPr algn="ctr"/>
-            <a:endParaRPr lang="en-US"/>
-          </a:p>
-        </p:txBody>
-      </p:sp>
-      <p:sp>
-        <p:nvSpPr>
-          <p:cNvPr id="8" name="Context">
-            <a:extLst>
-              <a:ext uri="{FF2B5EF4-FFF2-40B4-BE49-F238E27FC236}">
-                <a16:creationId xmlns:a16="http://schemas.microsoft.com/office/drawing/2014/main" id="{43A41ED3-3E8E-3932-79F2-9D3446B16257}"/>
-              </a:ext>
-            </a:extLst>
-          </p:cNvPr>
-          <p:cNvSpPr txBox="1"/>
-          <p:nvPr/>
-        </p:nvSpPr>
-        <p:spPr>
-          <a:xfrm>
-            <a:off x="762000" y="1879600"/>
-            <a:ext cx="10668000" cy="381000"/>
-          </a:xfrm>
-          <a:prstGeom prst="rect">
-            <a:avLst/>
-          </a:prstGeom>
-          <a:noFill/>
-        </p:spPr>
-        <p:txBody>
-          <a:bodyPr vert="horz" wrap="square" rtlCol="0">
-            <a:spAutoFit/>
-          </a:bodyPr>
-          <a:lstStyle/>
-          <a:p>
-            <a:pPr>
-              <a:spcAft>
-                <a:spcPts val="200"/>
-              </a:spcAft>
-            </a:pPr>
-            <a:r>
-              <a:rPr lang="en-US">
-                <a:solidFill>
-                  <a:srgbClr val="000000"/>
-                </a:solidFill>
-                <a:latin typeface="Calibri" panose="020F0502020204030204" pitchFamily="34" charset="0"/>
-              </a:rPr>
-              <a:t>Heights of 262 female students are roughly bell shaped.</a:t>
-            </a:r>
-          </a:p>
-        </p:txBody>
-      </p:sp>
-      <p:sp>
-        <p:nvSpPr>
-          <p:cNvPr id="9" name="Numbers">
-            <a:extLst>
-              <a:ext uri="{FF2B5EF4-FFF2-40B4-BE49-F238E27FC236}">
-                <a16:creationId xmlns:a16="http://schemas.microsoft.com/office/drawing/2014/main" id="{2A898F99-DE61-3DEE-BDF5-928306D5E174}"/>
-              </a:ext>
-            </a:extLst>
-          </p:cNvPr>
-          <p:cNvSpPr txBox="1"/>
-          <p:nvPr/>
-        </p:nvSpPr>
-        <p:spPr>
-          <a:xfrm>
-            <a:off x="762000" y="2286000"/>
-            <a:ext cx="10668000" cy="400110"/>
-          </a:xfrm>
-          <a:prstGeom prst="rect">
-            <a:avLst/>
-          </a:prstGeom>
-          <a:noFill/>
-        </p:spPr>
-        <p:txBody>
-          <a:bodyPr vert="horz" wrap="square" rtlCol="0">
-            <a:spAutoFit/>
-          </a:bodyPr>
-          <a:lstStyle/>
-          <a:p>
-            <a:pPr>
-              <a:spcAft>
-                <a:spcPts val="200"/>
-              </a:spcAft>
-            </a:pPr>
-            <a:r>
-              <a:rPr lang="en-US" sz="2000" b="1">
-                <a:solidFill>
-                  <a:srgbClr val="000000"/>
-                </a:solidFill>
-                <a:latin typeface="Calibri" panose="020F0502020204030204" pitchFamily="34" charset="0"/>
-              </a:rPr>
-              <a:t>x̄ = 65.4 in        s = 3.38 in        one student is 70 in</a:t>
-            </a:r>
-          </a:p>
-        </p:txBody>
-      </p:sp>
-      <p:sp>
-        <p:nvSpPr>
-          <p:cNvPr id="10" name="Question">
-            <a:extLst>
-              <a:ext uri="{FF2B5EF4-FFF2-40B4-BE49-F238E27FC236}">
-                <a16:creationId xmlns:a16="http://schemas.microsoft.com/office/drawing/2014/main" id="{355C0675-00BA-C3E0-29AC-19450337789A}"/>
-              </a:ext>
-            </a:extLst>
-          </p:cNvPr>
-          <p:cNvSpPr txBox="1"/>
-          <p:nvPr/>
-        </p:nvSpPr>
-        <p:spPr>
-          <a:xfrm>
-            <a:off x="762000" y="2711510"/>
-            <a:ext cx="10668000" cy="671979"/>
-          </a:xfrm>
-          <a:prstGeom prst="rect">
-            <a:avLst/>
-          </a:prstGeom>
-          <a:noFill/>
-        </p:spPr>
-        <p:txBody>
-          <a:bodyPr vert="horz" wrap="square" rtlCol="0">
-            <a:spAutoFit/>
-          </a:bodyPr>
-          <a:lstStyle/>
-          <a:p>
-            <a:pPr>
-              <a:spcAft>
-                <a:spcPts val="200"/>
-              </a:spcAft>
-            </a:pPr>
-            <a:r>
-              <a:rPr lang="en-US" b="1">
-                <a:solidFill>
-                  <a:srgbClr val="C00000"/>
-                </a:solidFill>
-                <a:latin typeface="Calibri" panose="020F0502020204030204" pitchFamily="34" charset="0"/>
-              </a:rPr>
-              <a:t>(a)  What is her z-score?</a:t>
-            </a:r>
-          </a:p>
-          <a:p>
-            <a:pPr>
-              <a:spcAft>
-                <a:spcPts val="200"/>
-              </a:spcAft>
-            </a:pPr>
-            <a:r>
-              <a:rPr lang="en-US" b="1">
-                <a:solidFill>
-                  <a:srgbClr val="C00000"/>
-                </a:solidFill>
-                <a:latin typeface="Calibri" panose="020F0502020204030204" pitchFamily="34" charset="0"/>
-              </a:rPr>
-              <a:t>(b)  What percentage of the women are shorter than she is?</a:t>
-            </a:r>
-          </a:p>
-        </p:txBody>
-      </p:sp>
-      <p:sp>
-        <p:nvSpPr>
-          <p:cNvPr id="11" name="Result">
-            <a:extLst>
-              <a:ext uri="{FF2B5EF4-FFF2-40B4-BE49-F238E27FC236}">
-                <a16:creationId xmlns:a16="http://schemas.microsoft.com/office/drawing/2014/main" id="{BE0DA1F1-E460-BE02-2835-97E3A1D05123}"/>
-              </a:ext>
-            </a:extLst>
-          </p:cNvPr>
-          <p:cNvSpPr/>
-          <p:nvPr/>
-        </p:nvSpPr>
-        <p:spPr>
-          <a:xfrm>
-            <a:off x="762000" y="3535889"/>
-            <a:ext cx="10668000" cy="784324"/>
-          </a:xfrm>
-          <a:prstGeom prst="roundRect">
-            <a:avLst>
-              <a:gd name="adj" fmla="val 4000"/>
-            </a:avLst>
-          </a:prstGeom>
-          <a:solidFill>
-            <a:srgbClr val="F2F6FC"/>
-          </a:solidFill>
-          <a:ln w="15875">
-            <a:solidFill>
-              <a:srgbClr val="4472C4"/>
-            </a:solidFill>
-          </a:ln>
-        </p:spPr>
-        <p:style>
-          <a:lnRef idx="2">
-            <a:schemeClr val="accent1">
-              <a:shade val="15000"/>
-            </a:schemeClr>
-          </a:lnRef>
-          <a:fillRef idx="1">
-            <a:schemeClr val="accent1"/>
-          </a:fillRef>
-          <a:effectRef idx="0">
-            <a:schemeClr val="accent1"/>
-          </a:effectRef>
-          <a:fontRef idx="minor">
-            <a:schemeClr val="lt1"/>
-          </a:fontRef>
-        </p:style>
-        <p:txBody>
-          <a:bodyPr wrap="square" lIns="152400" tIns="76200" rIns="152400" bIns="76200" rtlCol="0" anchor="ctr">
-            <a:spAutoFit/>
-          </a:bodyPr>
-          <a:lstStyle/>
-          <a:p>
-            <a:r>
-              <a:rPr lang="en-US" sz="2000" b="1">
-                <a:solidFill>
-                  <a:srgbClr val="C00000"/>
-                </a:solidFill>
-                <a:latin typeface="Calibri" panose="020F0502020204030204" pitchFamily="34" charset="0"/>
-              </a:rPr>
-              <a:t>(a)  z = 1.36</a:t>
-            </a:r>
-          </a:p>
-          <a:p>
-            <a:r>
-              <a:rPr lang="en-US" sz="2000" b="1">
-                <a:solidFill>
-                  <a:srgbClr val="C00000"/>
-                </a:solidFill>
-                <a:latin typeface="Calibri" panose="020F0502020204030204" pitchFamily="34" charset="0"/>
-              </a:rPr>
-              <a:t>(b)  The empirical rule cannot say: 1.36 is not a whole number of standard deviations</a:t>
-            </a:r>
-          </a:p>
-        </p:txBody>
-      </p:sp>
-    </p:spTree>
-    <p:extLst>
-      <p:ext uri="{BB962C8B-B14F-4D97-AF65-F5344CB8AC3E}">
-        <p14:creationId xmlns:p14="http://schemas.microsoft.com/office/powerpoint/2010/main" val="2181907198"/>
-      </p:ext>
-    </p:extLst>
-  </p:cSld>
-  <p:clrMapOvr>
-    <a:masterClrMapping/>
-  </p:clrMapOvr>
-  <p:timing>
-    <p:tnLst>
-      <p:par>
-        <p:cTn id="1" dur="indefinite" restart="never" nodeType="tmRoot">
-          <p:childTnLst>
-            <p:seq concurrent="1" nextAc="seek">
-              <p:cTn id="2" dur="indefinite" nodeType="mainSeq">
-                <p:childTnLst>
-                  <p:par>
-                    <p:cTn id="3" fill="hold">
-                      <p:stCondLst>
-                        <p:cond delay="indefinite"/>
-                      </p:stCondLst>
-                      <p:childTnLst>
-                        <p:par>
-                          <p:cTn id="4" fill="hold">
-                            <p:stCondLst>
-                              <p:cond delay="0"/>
-                            </p:stCondLst>
-                            <p:childTnLst>
-                              <p:par>
-                                <p:cTn id="5" presetID="1" presetClass="entr" presetSubtype="0" fill="hold" grpId="0" nodeType="clickEffect">
-                                  <p:stCondLst>
-                                    <p:cond delay="0"/>
-                                  </p:stCondLst>
-                                  <p:childTnLst>
-                                    <p:set>
-                                      <p:cBhvr>
-                                        <p:cTn id="6" dur="1" fill="hold">
-                                          <p:stCondLst>
-                                            <p:cond delay="0"/>
-                                          </p:stCondLst>
-                                        </p:cTn>
-                                        <p:tgtEl>
-                                          <p:spTgt spid="11"/>
-                                        </p:tgtEl>
-                                        <p:attrNameLst>
-                                          <p:attrName>style.visibility</p:attrName>
-                                        </p:attrNameLst>
-                                      </p:cBhvr>
-                                      <p:to>
-                                        <p:strVal val="visible"/>
-                                      </p:to>
-                                    </p:set>
-                                  </p:childTnLst>
-                                </p:cTn>
-                              </p:par>
-                            </p:childTnLst>
-                          </p:cTn>
-                        </p:par>
-                      </p:childTnLst>
-                    </p:cTn>
-                  </p:par>
-                </p:childTnLst>
-              </p:cTn>
-              <p:prevCondLst>
-                <p:cond evt="onPrev" delay="0">
-                  <p:tgtEl>
-                    <p:sldTgt/>
-                  </p:tgtEl>
-                </p:cond>
-              </p:prevCondLst>
-              <p:nextCondLst>
-                <p:cond evt="onNext" delay="0">
-                  <p:tgtEl>
-                    <p:sldTgt/>
-                  </p:tgtEl>
-                </p:cond>
-              </p:nextCondLst>
-            </p:seq>
-          </p:childTnLst>
-        </p:cTn>
-      </p:par>
-    </p:tnLst>
-    <p:bldLst>
-      <p:bldP spid="11" grpId="0" animBg="1"/>
-    </p:bldLst>
-  </p:timing>
-</p:sld>
-</file>
-
-<file path=ppt/slides/slide27.xml><?xml version="1.0" encoding="utf-8"?>
-<p:sld xmlns:a="http://schemas.openxmlformats.org/drawingml/2006/main" xmlns:r="http://schemas.openxmlformats.org/officeDocument/2006/relationships" xmlns:p="http://schemas.openxmlformats.org/presentationml/2006/main">
-  <p:cSld>
-    <p:spTree>
-      <p:nvGrpSpPr>
-        <p:cNvPr id="1" name=""/>
-        <p:cNvGrpSpPr/>
-        <p:nvPr/>
-      </p:nvGrpSpPr>
-      <p:grpSpPr>
-        <a:xfrm>
-          <a:off x="0" y="0"/>
-          <a:ext cx="0" cy="0"/>
-          <a:chOff x="0" y="0"/>
-          <a:chExt cx="0" cy="0"/>
-        </a:xfrm>
-      </p:grpSpPr>
-      <p:sp>
-        <p:nvSpPr>
-          <p:cNvPr id="2" name="Title 1">
-            <a:extLst>
-              <a:ext uri="{FF2B5EF4-FFF2-40B4-BE49-F238E27FC236}">
-                <a16:creationId xmlns:a16="http://schemas.microsoft.com/office/drawing/2014/main" id="{D1E825F3-CA5C-D321-A12F-235D7E6C102E}"/>
-              </a:ext>
-            </a:extLst>
-          </p:cNvPr>
-          <p:cNvSpPr>
-            <a:spLocks noGrp="1"/>
-          </p:cNvSpPr>
-          <p:nvPr>
-            <p:ph type="title"/>
-          </p:nvPr>
-        </p:nvSpPr>
-        <p:spPr/>
-        <p:txBody>
-          <a:bodyPr>
-            <a:noAutofit/>
-          </a:bodyPr>
-          <a:lstStyle/>
-          <a:p>
-            <a:r>
-              <a:rPr lang="en-US">
-                <a:solidFill>
-                  <a:srgbClr val="1F3864"/>
-                </a:solidFill>
-              </a:rPr>
-              <a:t>How it used to be done: the Z-table</a:t>
-            </a:r>
-          </a:p>
-        </p:txBody>
-      </p:sp>
-      <p:sp>
-        <p:nvSpPr>
-          <p:cNvPr id="4" name="Slide Number Placeholder 3">
-            <a:extLst>
-              <a:ext uri="{FF2B5EF4-FFF2-40B4-BE49-F238E27FC236}">
-                <a16:creationId xmlns:a16="http://schemas.microsoft.com/office/drawing/2014/main" id="{632F5803-1B77-5AE0-EEB8-17B8E3F9722A}"/>
-              </a:ext>
-            </a:extLst>
-          </p:cNvPr>
-          <p:cNvSpPr>
-            <a:spLocks noGrp="1"/>
-          </p:cNvSpPr>
-          <p:nvPr>
-            <p:ph type="sldNum" sz="quarter" idx="12"/>
-          </p:nvPr>
-        </p:nvSpPr>
-        <p:spPr/>
-        <p:txBody>
-          <a:bodyPr/>
-          <a:lstStyle/>
-          <a:p>
-            <a:fld id="{A80A81DD-F10A-4B1C-963A-0ABBB4865886}" type="slidenum">
-              <a:rPr lang="en-US" sz="1600" smtClean="0"/>
-              <a:t>27</a:t>
-            </a:fld>
-            <a:endParaRPr lang="en-US" sz="1600"/>
-          </a:p>
-        </p:txBody>
-      </p:sp>
-      <p:sp>
-        <p:nvSpPr>
-          <p:cNvPr id="5" name="TextBox 4">
-            <a:extLst>
-              <a:ext uri="{FF2B5EF4-FFF2-40B4-BE49-F238E27FC236}">
-                <a16:creationId xmlns:a16="http://schemas.microsoft.com/office/drawing/2014/main" id="{F2C3E119-33DB-B84A-C9CB-1DA41099D1A1}"/>
-              </a:ext>
-            </a:extLst>
-          </p:cNvPr>
-          <p:cNvSpPr txBox="1"/>
-          <p:nvPr/>
-        </p:nvSpPr>
-        <p:spPr>
-          <a:xfrm>
-            <a:off x="762000" y="1841500"/>
-            <a:ext cx="3175000" cy="345440"/>
-          </a:xfrm>
-          <a:prstGeom prst="rect">
-            <a:avLst/>
-          </a:prstGeom>
-          <a:noFill/>
-        </p:spPr>
-        <p:txBody>
-          <a:bodyPr vert="horz" wrap="square" rtlCol="0">
-            <a:spAutoFit/>
-          </a:bodyPr>
-          <a:lstStyle/>
-          <a:p>
-            <a:r>
-              <a:rPr lang="en-US" sz="1600" b="1">
-                <a:solidFill>
-                  <a:srgbClr val="C00000"/>
-                </a:solidFill>
-              </a:rPr>
-              <a:t>the standard normal table</a:t>
-            </a:r>
-          </a:p>
-        </p:txBody>
-      </p:sp>
-      <p:sp>
-        <p:nvSpPr>
-          <p:cNvPr id="6" name="TextBox 5">
-            <a:extLst>
-              <a:ext uri="{FF2B5EF4-FFF2-40B4-BE49-F238E27FC236}">
-                <a16:creationId xmlns:a16="http://schemas.microsoft.com/office/drawing/2014/main" id="{377D380C-8635-8A53-300D-33D0068157E3}"/>
-              </a:ext>
-            </a:extLst>
-          </p:cNvPr>
-          <p:cNvSpPr txBox="1"/>
-          <p:nvPr/>
-        </p:nvSpPr>
-        <p:spPr>
-          <a:xfrm>
-            <a:off x="4038600" y="1841499"/>
-            <a:ext cx="7391400" cy="338554"/>
-          </a:xfrm>
-          <a:prstGeom prst="rect">
-            <a:avLst/>
-          </a:prstGeom>
-          <a:noFill/>
-        </p:spPr>
-        <p:txBody>
-          <a:bodyPr vert="horz" wrap="square" rtlCol="0">
-            <a:spAutoFit/>
-          </a:bodyPr>
-          <a:lstStyle/>
-          <a:p>
-            <a:r>
-              <a:rPr lang="en-US" sz="1600">
-                <a:solidFill>
-                  <a:srgbClr val="000000"/>
-                </a:solidFill>
-              </a:rPr>
-              <a:t>each entry is the area to the LEFT of z</a:t>
-            </a:r>
-            <a:endParaRPr lang="en-US" sz="1600" i="1">
-              <a:solidFill>
-                <a:srgbClr val="000000"/>
-              </a:solidFill>
-            </a:endParaRPr>
-          </a:p>
-        </p:txBody>
-      </p:sp>
-      <p:sp>
-        <p:nvSpPr>
-          <p:cNvPr id="3" name="Title rule">
-            <a:extLst>
-              <a:ext uri="{FF2B5EF4-FFF2-40B4-BE49-F238E27FC236}">
-                <a16:creationId xmlns:a16="http://schemas.microsoft.com/office/drawing/2014/main" id="{784C6B91-DD86-0BA1-4A71-C454C38471E5}"/>
-              </a:ext>
-            </a:extLst>
-          </p:cNvPr>
-          <p:cNvSpPr/>
-          <p:nvPr/>
-        </p:nvSpPr>
-        <p:spPr>
-          <a:xfrm>
-            <a:off x="838200" y="1600200"/>
-            <a:ext cx="10515600" cy="38100"/>
-          </a:xfrm>
-          <a:prstGeom prst="rect">
-            <a:avLst/>
-          </a:prstGeom>
-          <a:solidFill>
-            <a:srgbClr val="4472C4"/>
-          </a:solidFill>
-          <a:ln w="12700" cap="flat" cmpd="sng" algn="ctr">
-            <a:noFill/>
-            <a:prstDash val="solid"/>
-            <a:miter lim="800000"/>
-          </a:ln>
-          <a:effectLst/>
-          <a:extLst>
-            <a:ext uri="{91240B29-F687-4F45-9708-019B960494DF}">
-              <a14:hiddenLine xmlns:a14="http://schemas.microsoft.com/office/drawing/2010/main" w="12700" cap="flat" cmpd="sng" algn="ctr">
-                <a:solidFill>
-                  <a:schemeClr val="accent1">
-                    <a:shade val="15000"/>
-                  </a:schemeClr>
-                </a:solidFill>
-                <a:prstDash val="solid"/>
-                <a:miter lim="800000"/>
-              </a14:hiddenLine>
-            </a:ext>
-          </a:extLst>
-        </p:spPr>
-        <p:style>
-          <a:lnRef idx="2">
-            <a:schemeClr val="accent1">
-              <a:shade val="15000"/>
-            </a:schemeClr>
-          </a:lnRef>
-          <a:fillRef idx="1">
-            <a:schemeClr val="accent1"/>
-          </a:fillRef>
-          <a:effectRef idx="0">
-            <a:schemeClr val="accent1"/>
-          </a:effectRef>
-          <a:fontRef idx="minor">
-            <a:schemeClr val="lt1"/>
-          </a:fontRef>
-        </p:style>
-        <p:txBody>
-          <a:bodyPr rtlCol="0" anchor="ctr"/>
-          <a:lstStyle/>
-          <a:p>
-            <a:pPr algn="ctr"/>
-            <a:endParaRPr lang="en-US"/>
-          </a:p>
-        </p:txBody>
-      </p:sp>
-      <p:pic>
-        <p:nvPicPr>
-          <p:cNvPr id="8" name="l12_ztable.png">
-            <a:extLst>
-              <a:ext uri="{FF2B5EF4-FFF2-40B4-BE49-F238E27FC236}">
-                <a16:creationId xmlns:a16="http://schemas.microsoft.com/office/drawing/2014/main" id="{AF56AAFD-6AD4-FD39-F3A4-F9BCB7F3E97A}"/>
-              </a:ext>
-            </a:extLst>
-          </p:cNvPr>
-          <p:cNvPicPr>
-            <a:picLocks/>
-          </p:cNvPicPr>
-          <p:nvPr/>
-        </p:nvPicPr>
-        <p:blipFill>
-          <a:blip r:embed="rId2">
-            <a:extLst>
-              <a:ext uri="{28A0092B-C50C-407E-A947-70E740481C1C}">
-                <a14:useLocalDpi xmlns:a14="http://schemas.microsoft.com/office/drawing/2010/main" val="0"/>
-              </a:ext>
-            </a:extLst>
-          </a:blip>
-          <a:stretch>
-            <a:fillRect/>
-          </a:stretch>
-        </p:blipFill>
-        <p:spPr>
-          <a:xfrm>
-            <a:off x="1270000" y="2336800"/>
-            <a:ext cx="9652000" cy="2921000"/>
-          </a:xfrm>
-          <a:prstGeom prst="rect">
-            <a:avLst/>
-          </a:prstGeom>
-        </p:spPr>
-      </p:pic>
-      <p:sp>
-        <p:nvSpPr>
-          <p:cNvPr id="7" name="Result">
-            <a:extLst>
-              <a:ext uri="{FF2B5EF4-FFF2-40B4-BE49-F238E27FC236}">
-                <a16:creationId xmlns:a16="http://schemas.microsoft.com/office/drawing/2014/main" id="{6ECC2FD2-AE00-2EA1-4AAD-42F866DFAB3E}"/>
-              </a:ext>
-            </a:extLst>
-          </p:cNvPr>
-          <p:cNvSpPr/>
-          <p:nvPr/>
-        </p:nvSpPr>
-        <p:spPr>
-          <a:xfrm>
-            <a:off x="762000" y="5359400"/>
-            <a:ext cx="10668000" cy="470595"/>
-          </a:xfrm>
-          <a:prstGeom prst="roundRect">
-            <a:avLst>
-              <a:gd name="adj" fmla="val 4000"/>
-            </a:avLst>
-          </a:prstGeom>
-          <a:solidFill>
-            <a:srgbClr val="F2F6FC"/>
-          </a:solidFill>
-          <a:ln w="15875">
-            <a:solidFill>
-              <a:srgbClr val="4472C4"/>
-            </a:solidFill>
-          </a:ln>
-        </p:spPr>
-        <p:style>
-          <a:lnRef idx="2">
-            <a:schemeClr val="accent1">
-              <a:shade val="15000"/>
-            </a:schemeClr>
-          </a:lnRef>
-          <a:fillRef idx="1">
-            <a:schemeClr val="accent1"/>
-          </a:fillRef>
-          <a:effectRef idx="0">
-            <a:schemeClr val="accent1"/>
-          </a:effectRef>
-          <a:fontRef idx="minor">
-            <a:schemeClr val="lt1"/>
-          </a:fontRef>
-        </p:style>
-        <p:txBody>
-          <a:bodyPr wrap="square" lIns="152400" tIns="76200" rIns="152400" bIns="76200" rtlCol="0" anchor="ctr">
-            <a:spAutoFit/>
-          </a:bodyPr>
-          <a:lstStyle/>
-          <a:p>
-            <a:r>
-              <a:rPr lang="en-US" sz="2000" b="1">
-                <a:solidFill>
-                  <a:srgbClr val="C00000"/>
-                </a:solidFill>
-                <a:latin typeface="Calibri" panose="020F0502020204030204" pitchFamily="34" charset="0"/>
-              </a:rPr>
-              <a:t>z = 1.36:  row 1.3, column .06  →  0.9131, so about 91% are shorter</a:t>
-            </a:r>
-          </a:p>
-        </p:txBody>
-      </p:sp>
-    </p:spTree>
-    <p:extLst>
-      <p:ext uri="{BB962C8B-B14F-4D97-AF65-F5344CB8AC3E}">
-        <p14:creationId xmlns:p14="http://schemas.microsoft.com/office/powerpoint/2010/main" val="1275963259"/>
-      </p:ext>
-    </p:extLst>
-  </p:cSld>
-  <p:clrMapOvr>
-    <a:masterClrMapping/>
-  </p:clrMapOvr>
-  <p:timing>
-    <p:tnLst>
-      <p:par>
-        <p:cTn id="1" dur="indefinite" restart="never" nodeType="tmRoot">
-          <p:childTnLst>
-            <p:seq concurrent="1" nextAc="seek">
-              <p:cTn id="2" dur="indefinite" nodeType="mainSeq">
-                <p:childTnLst>
-                  <p:par>
-                    <p:cTn id="3" fill="hold">
-                      <p:stCondLst>
-                        <p:cond delay="indefinite"/>
-                      </p:stCondLst>
-                      <p:childTnLst>
-                        <p:par>
-                          <p:cTn id="4" fill="hold">
-                            <p:stCondLst>
-                              <p:cond delay="0"/>
-                            </p:stCondLst>
-                            <p:childTnLst>
-                              <p:par>
-                                <p:cTn id="5" presetID="34" presetClass="entr" presetSubtype="0" fill="hold" grpId="0" nodeType="clickEffect">
-                                  <p:stCondLst>
-                                    <p:cond delay="0"/>
-                                  </p:stCondLst>
-                                  <p:childTnLst>
-                                    <p:set>
-                                      <p:cBhvr>
-                                        <p:cTn id="6" dur="1" fill="hold">
-                                          <p:stCondLst>
-                                            <p:cond delay="0"/>
-                                          </p:stCondLst>
-                                        </p:cTn>
-                                        <p:tgtEl>
-                                          <p:spTgt spid="6"/>
-                                        </p:tgtEl>
-                                        <p:attrNameLst>
-                                          <p:attrName>style.visibility</p:attrName>
-                                        </p:attrNameLst>
-                                      </p:cBhvr>
-                                      <p:to>
-                                        <p:strVal val="visible"/>
-                                      </p:to>
-                                    </p:set>
-                                    <p:anim from="(-#ppt_w/2)" to="(#ppt_x)" calcmode="lin" valueType="num">
-                                      <p:cBhvr>
-                                        <p:cTn id="7" dur="600" fill="hold">
-                                          <p:stCondLst>
-                                            <p:cond delay="0"/>
-                                          </p:stCondLst>
-                                        </p:cTn>
-                                        <p:tgtEl>
-                                          <p:spTgt spid="6"/>
-                                        </p:tgtEl>
-                                        <p:attrNameLst>
-                                          <p:attrName>ppt_x</p:attrName>
-                                        </p:attrNameLst>
-                                      </p:cBhvr>
-                                    </p:anim>
-                                    <p:anim from="0" to="-1.0" calcmode="lin" valueType="num">
-                                      <p:cBhvr>
-                                        <p:cTn id="8" dur="200" decel="50000" autoRev="1" fill="hold">
-                                          <p:stCondLst>
-                                            <p:cond delay="600"/>
-                                          </p:stCondLst>
-                                        </p:cTn>
-                                        <p:tgtEl>
-                                          <p:spTgt spid="6"/>
-                                        </p:tgtEl>
-                                        <p:attrNameLst>
-                                          <p:attrName>xshear</p:attrName>
-                                        </p:attrNameLst>
-                                      </p:cBhvr>
-                                    </p:anim>
-                                    <p:animScale>
-                                      <p:cBhvr>
-                                        <p:cTn id="9" dur="200" decel="100000" autoRev="1" fill="hold">
-                                          <p:stCondLst>
-                                            <p:cond delay="600"/>
-                                          </p:stCondLst>
-                                        </p:cTn>
-                                        <p:tgtEl>
-                                          <p:spTgt spid="6"/>
-                                        </p:tgtEl>
-                                      </p:cBhvr>
-                                      <p:from x="100000" y="100000"/>
-                                      <p:to x="80000" y="100000"/>
-                                    </p:animScale>
-                                    <p:anim by="(#ppt_h/3+#ppt_w*0.1)" calcmode="lin" valueType="num">
-                                      <p:cBhvr additive="sum">
-                                        <p:cTn id="10" dur="200" decel="100000" autoRev="1" fill="hold">
-                                          <p:stCondLst>
-                                            <p:cond delay="600"/>
-                                          </p:stCondLst>
-                                        </p:cTn>
-                                        <p:tgtEl>
-                                          <p:spTgt spid="6"/>
-                                        </p:tgtEl>
-                                        <p:attrNameLst>
-                                          <p:attrName>ppt_x</p:attrName>
-                                        </p:attrNameLst>
-                                      </p:cBhvr>
-                                    </p:anim>
-                                  </p:childTnLst>
-                                </p:cTn>
-                              </p:par>
-                            </p:childTnLst>
-                          </p:cTn>
-                        </p:par>
-                      </p:childTnLst>
-                    </p:cTn>
-                  </p:par>
-                  <p:par>
-                    <p:cTn id="11" fill="hold">
-                      <p:stCondLst>
-                        <p:cond delay="indefinite"/>
-                      </p:stCondLst>
-                      <p:childTnLst>
-                        <p:par>
-                          <p:cTn id="12" fill="hold">
-                            <p:stCondLst>
-                              <p:cond delay="0"/>
-                            </p:stCondLst>
-                            <p:childTnLst>
-                              <p:par>
-                                <p:cTn id="13" presetID="1" presetClass="entr" presetSubtype="0" fill="hold" grpId="0" nodeType="clickEffect">
-                                  <p:stCondLst>
-                                    <p:cond delay="0"/>
-                                  </p:stCondLst>
-                                  <p:childTnLst>
-                                    <p:set>
-                                      <p:cBhvr>
-                                        <p:cTn id="14" dur="1" fill="hold">
-                                          <p:stCondLst>
-                                            <p:cond delay="0"/>
-                                          </p:stCondLst>
-                                        </p:cTn>
-                                        <p:tgtEl>
-                                          <p:spTgt spid="7"/>
-                                        </p:tgtEl>
-                                        <p:attrNameLst>
-                                          <p:attrName>style.visibility</p:attrName>
-                                        </p:attrNameLst>
-                                      </p:cBhvr>
-                                      <p:to>
-                                        <p:strVal val="visible"/>
-                                      </p:to>
-                                    </p:set>
-                                  </p:childTnLst>
-                                </p:cTn>
-                              </p:par>
-                            </p:childTnLst>
-                          </p:cTn>
-                        </p:par>
-                      </p:childTnLst>
-                    </p:cTn>
-                  </p:par>
-                </p:childTnLst>
-              </p:cTn>
-              <p:prevCondLst>
-                <p:cond evt="onPrev" delay="0">
-                  <p:tgtEl>
-                    <p:sldTgt/>
-                  </p:tgtEl>
-                </p:cond>
-              </p:prevCondLst>
-              <p:nextCondLst>
-                <p:cond evt="onNext" delay="0">
-                  <p:tgtEl>
-                    <p:sldTgt/>
-                  </p:tgtEl>
-                </p:cond>
-              </p:nextCondLst>
-            </p:seq>
-          </p:childTnLst>
-        </p:cTn>
-      </p:par>
-    </p:tnLst>
-    <p:bldLst>
-      <p:bldP spid="6" grpId="0"/>
-      <p:bldP spid="7" grpId="0" animBg="1"/>
-    </p:bldLst>
-  </p:timing>
-</p:sld>
-</file>
-
-<file path=ppt/slides/slide28.xml><?xml version="1.0" encoding="utf-8"?>
-<p:sld xmlns:a="http://schemas.openxmlformats.org/drawingml/2006/main" xmlns:r="http://schemas.openxmlformats.org/officeDocument/2006/relationships" xmlns:p="http://schemas.openxmlformats.org/presentationml/2006/main">
-  <p:cSld>
-    <p:spTree>
-      <p:nvGrpSpPr>
-        <p:cNvPr id="1" name=""/>
-        <p:cNvGrpSpPr/>
-        <p:nvPr/>
-      </p:nvGrpSpPr>
-      <p:grpSpPr>
-        <a:xfrm>
-          <a:off x="0" y="0"/>
-          <a:ext cx="0" cy="0"/>
-          <a:chOff x="0" y="0"/>
-          <a:chExt cx="0" cy="0"/>
-        </a:xfrm>
-      </p:grpSpPr>
-      <p:sp>
-        <p:nvSpPr>
-          <p:cNvPr id="2" name="Title 1">
-            <a:extLst>
-              <a:ext uri="{FF2B5EF4-FFF2-40B4-BE49-F238E27FC236}">
-                <a16:creationId xmlns:a16="http://schemas.microsoft.com/office/drawing/2014/main" id="{D617AB41-6AD1-9EF2-7F95-46A904399681}"/>
-              </a:ext>
-            </a:extLst>
-          </p:cNvPr>
-          <p:cNvSpPr>
-            <a:spLocks noGrp="1"/>
-          </p:cNvSpPr>
-          <p:nvPr>
-            <p:ph type="title"/>
-          </p:nvPr>
-        </p:nvSpPr>
-        <p:spPr/>
-        <p:txBody>
-          <a:bodyPr>
-            <a:noAutofit/>
-          </a:bodyPr>
-          <a:lstStyle/>
-          <a:p>
-            <a:r>
-              <a:rPr lang="en-US">
-                <a:solidFill>
-                  <a:srgbClr val="1F3864"/>
-                </a:solidFill>
-              </a:rPr>
-              <a:t>Today: the computer does the lookup</a:t>
-            </a:r>
-          </a:p>
-        </p:txBody>
-      </p:sp>
-      <p:sp>
-        <p:nvSpPr>
-          <p:cNvPr id="4" name="Slide Number Placeholder 3">
-            <a:extLst>
-              <a:ext uri="{FF2B5EF4-FFF2-40B4-BE49-F238E27FC236}">
-                <a16:creationId xmlns:a16="http://schemas.microsoft.com/office/drawing/2014/main" id="{97D44AE5-98B5-B840-6B8A-D345C7C2E2F0}"/>
-              </a:ext>
-            </a:extLst>
-          </p:cNvPr>
-          <p:cNvSpPr>
-            <a:spLocks noGrp="1"/>
-          </p:cNvSpPr>
-          <p:nvPr>
-            <p:ph type="sldNum" sz="quarter" idx="12"/>
-          </p:nvPr>
-        </p:nvSpPr>
-        <p:spPr/>
-        <p:txBody>
-          <a:bodyPr/>
-          <a:lstStyle/>
-          <a:p>
-            <a:fld id="{A80A81DD-F10A-4B1C-963A-0ABBB4865886}" type="slidenum">
-              <a:rPr lang="en-US" sz="1600" smtClean="0"/>
-              <a:t>28</a:t>
-            </a:fld>
-            <a:endParaRPr lang="en-US" sz="1600"/>
-          </a:p>
-        </p:txBody>
-      </p:sp>
-      <p:sp>
-        <p:nvSpPr>
-          <p:cNvPr id="5" name="TextBox 4">
-            <a:extLst>
-              <a:ext uri="{FF2B5EF4-FFF2-40B4-BE49-F238E27FC236}">
-                <a16:creationId xmlns:a16="http://schemas.microsoft.com/office/drawing/2014/main" id="{A34AAE17-27CE-D7A3-C663-11BB48ACBF5B}"/>
-              </a:ext>
-            </a:extLst>
-          </p:cNvPr>
-          <p:cNvSpPr txBox="1"/>
-          <p:nvPr/>
-        </p:nvSpPr>
-        <p:spPr>
-          <a:xfrm>
-            <a:off x="762000" y="1879600"/>
-            <a:ext cx="10668000" cy="345440"/>
-          </a:xfrm>
-          <a:prstGeom prst="rect">
-            <a:avLst/>
-          </a:prstGeom>
-          <a:noFill/>
-        </p:spPr>
-        <p:txBody>
-          <a:bodyPr vert="horz" wrap="square" rtlCol="0">
-            <a:spAutoFit/>
-          </a:bodyPr>
-          <a:lstStyle/>
-          <a:p>
-            <a:pPr marL="304800" indent="-304800"/>
-            <a:r>
-              <a:rPr lang="en-US" sz="1600">
-                <a:solidFill>
-                  <a:srgbClr val="000000"/>
-                </a:solidFill>
-              </a:rPr>
-              <a:t>From a value to an area: pnorm</a:t>
-            </a:r>
-          </a:p>
-        </p:txBody>
-      </p:sp>
-      <p:sp>
-        <p:nvSpPr>
-          <p:cNvPr id="6" name="TextBox 5">
-            <a:extLst>
-              <a:ext uri="{FF2B5EF4-FFF2-40B4-BE49-F238E27FC236}">
-                <a16:creationId xmlns:a16="http://schemas.microsoft.com/office/drawing/2014/main" id="{E410A0F8-5E1E-9A1D-B64C-50827EE6C9B2}"/>
-              </a:ext>
-            </a:extLst>
-          </p:cNvPr>
-          <p:cNvSpPr txBox="1"/>
-          <p:nvPr/>
-        </p:nvSpPr>
-        <p:spPr>
-          <a:xfrm>
-            <a:off x="1117600" y="2225040"/>
-            <a:ext cx="10312400" cy="338554"/>
-          </a:xfrm>
-          <a:prstGeom prst="rect">
-            <a:avLst/>
-          </a:prstGeom>
-          <a:noFill/>
-        </p:spPr>
-        <p:txBody>
-          <a:bodyPr vert="horz" wrap="square" rtlCol="0">
-            <a:spAutoFit/>
-          </a:bodyPr>
-          <a:lstStyle/>
-          <a:p>
-            <a:r>
-              <a:rPr lang="en-US" sz="1600" b="1">
-                <a:solidFill>
-                  <a:srgbClr val="C00000"/>
-                </a:solidFill>
-              </a:rPr>
-              <a:t>pnorm(1.36) = 0.9131</a:t>
-            </a:r>
-          </a:p>
-        </p:txBody>
-      </p:sp>
-      <p:sp>
-        <p:nvSpPr>
-          <p:cNvPr id="7" name="TextBox 6">
-            <a:extLst>
-              <a:ext uri="{FF2B5EF4-FFF2-40B4-BE49-F238E27FC236}">
-                <a16:creationId xmlns:a16="http://schemas.microsoft.com/office/drawing/2014/main" id="{47D3CD95-D52E-5227-B663-7C0A72677B6E}"/>
-              </a:ext>
-            </a:extLst>
-          </p:cNvPr>
-          <p:cNvSpPr txBox="1"/>
-          <p:nvPr/>
-        </p:nvSpPr>
-        <p:spPr>
-          <a:xfrm>
-            <a:off x="762000" y="2766794"/>
-            <a:ext cx="10668000" cy="345440"/>
-          </a:xfrm>
-          <a:prstGeom prst="rect">
-            <a:avLst/>
-          </a:prstGeom>
-          <a:noFill/>
-        </p:spPr>
-        <p:txBody>
-          <a:bodyPr vert="horz" wrap="square" rtlCol="0">
-            <a:spAutoFit/>
-          </a:bodyPr>
-          <a:lstStyle/>
-          <a:p>
-            <a:pPr marL="304800" indent="-304800"/>
-            <a:r>
-              <a:rPr lang="en-US" sz="1600">
-                <a:solidFill>
-                  <a:srgbClr val="000000"/>
-                </a:solidFill>
-              </a:rPr>
-              <a:t>From an area to a value: qnorm</a:t>
-            </a:r>
-          </a:p>
-        </p:txBody>
-      </p:sp>
-      <p:sp>
-        <p:nvSpPr>
-          <p:cNvPr id="8" name="TextBox 7">
-            <a:extLst>
-              <a:ext uri="{FF2B5EF4-FFF2-40B4-BE49-F238E27FC236}">
-                <a16:creationId xmlns:a16="http://schemas.microsoft.com/office/drawing/2014/main" id="{1CE3E601-601D-C6B1-8265-C079CB8C9269}"/>
-              </a:ext>
-            </a:extLst>
-          </p:cNvPr>
-          <p:cNvSpPr txBox="1"/>
-          <p:nvPr/>
-        </p:nvSpPr>
-        <p:spPr>
-          <a:xfrm>
-            <a:off x="1117600" y="3112234"/>
-            <a:ext cx="10312400" cy="338554"/>
-          </a:xfrm>
-          <a:prstGeom prst="rect">
-            <a:avLst/>
-          </a:prstGeom>
-          <a:noFill/>
-        </p:spPr>
-        <p:txBody>
-          <a:bodyPr vert="horz" wrap="square" rtlCol="0">
-            <a:spAutoFit/>
-          </a:bodyPr>
-          <a:lstStyle/>
-          <a:p>
-            <a:r>
-              <a:rPr lang="en-US" sz="1600" b="1">
-                <a:solidFill>
-                  <a:srgbClr val="C00000"/>
-                </a:solidFill>
-              </a:rPr>
-              <a:t>qnorm(0.90) = 1.28</a:t>
-            </a:r>
-          </a:p>
-        </p:txBody>
-      </p:sp>
-      <p:sp>
-        <p:nvSpPr>
-          <p:cNvPr id="9" name="TextBox 8">
-            <a:extLst>
-              <a:ext uri="{FF2B5EF4-FFF2-40B4-BE49-F238E27FC236}">
-                <a16:creationId xmlns:a16="http://schemas.microsoft.com/office/drawing/2014/main" id="{FB002BF4-8037-2F73-E27A-7A453477E389}"/>
-              </a:ext>
-            </a:extLst>
-          </p:cNvPr>
-          <p:cNvSpPr txBox="1"/>
-          <p:nvPr/>
-        </p:nvSpPr>
-        <p:spPr>
-          <a:xfrm>
-            <a:off x="762000" y="3653988"/>
-            <a:ext cx="10668000" cy="345440"/>
-          </a:xfrm>
-          <a:prstGeom prst="rect">
-            <a:avLst/>
-          </a:prstGeom>
-          <a:noFill/>
-        </p:spPr>
-        <p:txBody>
-          <a:bodyPr vert="horz" wrap="square" rtlCol="0">
-            <a:spAutoFit/>
-          </a:bodyPr>
-          <a:lstStyle/>
-          <a:p>
-            <a:pPr marL="304800" indent="-304800"/>
-            <a:r>
-              <a:rPr lang="en-US" sz="1600">
-                <a:solidFill>
-                  <a:srgbClr val="000000"/>
-                </a:solidFill>
-              </a:rPr>
-              <a:t>No R in front of you?</a:t>
-            </a:r>
-          </a:p>
-        </p:txBody>
-      </p:sp>
-      <p:sp>
-        <p:nvSpPr>
-          <p:cNvPr id="10" name="TextBox 9">
-            <a:extLst>
-              <a:ext uri="{FF2B5EF4-FFF2-40B4-BE49-F238E27FC236}">
-                <a16:creationId xmlns:a16="http://schemas.microsoft.com/office/drawing/2014/main" id="{10F3B3E3-D27C-E008-C93E-ED70BD2A4754}"/>
-              </a:ext>
-            </a:extLst>
-          </p:cNvPr>
-          <p:cNvSpPr txBox="1"/>
-          <p:nvPr/>
-        </p:nvSpPr>
-        <p:spPr>
-          <a:xfrm>
-            <a:off x="1117600" y="3999428"/>
-            <a:ext cx="10312400" cy="338554"/>
-          </a:xfrm>
-          <a:prstGeom prst="rect">
-            <a:avLst/>
-          </a:prstGeom>
-          <a:noFill/>
-        </p:spPr>
-        <p:txBody>
-          <a:bodyPr vert="horz" wrap="square" rtlCol="0">
-            <a:spAutoFit/>
-          </a:bodyPr>
-          <a:lstStyle/>
-          <a:p>
-            <a:r>
-              <a:rPr lang="en-US" sz="1600" b="1">
-                <a:solidFill>
-                  <a:srgbClr val="C00000"/>
-                </a:solidFill>
-              </a:rPr>
-              <a:t>The normal calculator at stat-tools.jmks-homelab.dev does both.</a:t>
-            </a:r>
-          </a:p>
-        </p:txBody>
-      </p:sp>
-      <p:sp>
-        <p:nvSpPr>
-          <p:cNvPr id="3" name="Title rule">
-            <a:extLst>
-              <a:ext uri="{FF2B5EF4-FFF2-40B4-BE49-F238E27FC236}">
-                <a16:creationId xmlns:a16="http://schemas.microsoft.com/office/drawing/2014/main" id="{B469CAAB-2B69-6863-7C28-0C5959E5734B}"/>
-              </a:ext>
-            </a:extLst>
-          </p:cNvPr>
-          <p:cNvSpPr/>
-          <p:nvPr/>
-        </p:nvSpPr>
-        <p:spPr>
-          <a:xfrm>
-            <a:off x="838200" y="1600200"/>
-            <a:ext cx="10515600" cy="38100"/>
-          </a:xfrm>
-          <a:prstGeom prst="rect">
-            <a:avLst/>
-          </a:prstGeom>
-          <a:solidFill>
-            <a:srgbClr val="4472C4"/>
-          </a:solidFill>
-          <a:ln w="12700" cap="flat" cmpd="sng" algn="ctr">
-            <a:noFill/>
-            <a:prstDash val="solid"/>
-            <a:miter lim="800000"/>
-          </a:ln>
-          <a:effectLst/>
-          <a:extLst>
-            <a:ext uri="{91240B29-F687-4F45-9708-019B960494DF}">
-              <a14:hiddenLine xmlns:a14="http://schemas.microsoft.com/office/drawing/2010/main" w="12700" cap="flat" cmpd="sng" algn="ctr">
-                <a:solidFill>
-                  <a:schemeClr val="accent1">
-                    <a:shade val="15000"/>
-                  </a:schemeClr>
-                </a:solidFill>
-                <a:prstDash val="solid"/>
-                <a:miter lim="800000"/>
-              </a14:hiddenLine>
-            </a:ext>
-          </a:extLst>
-        </p:spPr>
-        <p:style>
-          <a:lnRef idx="2">
-            <a:schemeClr val="accent1">
-              <a:shade val="15000"/>
-            </a:schemeClr>
-          </a:lnRef>
-          <a:fillRef idx="1">
-            <a:schemeClr val="accent1"/>
-          </a:fillRef>
-          <a:effectRef idx="0">
-            <a:schemeClr val="accent1"/>
-          </a:effectRef>
-          <a:fontRef idx="minor">
-            <a:schemeClr val="lt1"/>
-          </a:fontRef>
-        </p:style>
-        <p:txBody>
-          <a:bodyPr rtlCol="0" anchor="ctr"/>
-          <a:lstStyle/>
-          <a:p>
-            <a:pPr algn="ctr"/>
-            <a:endParaRPr lang="en-US"/>
-          </a:p>
-        </p:txBody>
-      </p:sp>
-    </p:spTree>
-    <p:extLst>
-      <p:ext uri="{BB962C8B-B14F-4D97-AF65-F5344CB8AC3E}">
-        <p14:creationId xmlns:p14="http://schemas.microsoft.com/office/powerpoint/2010/main" val="4261664775"/>
-      </p:ext>
-    </p:extLst>
-  </p:cSld>
-  <p:clrMapOvr>
-    <a:masterClrMapping/>
-  </p:clrMapOvr>
-  <p:timing>
-    <p:tnLst>
-      <p:par>
-        <p:cTn id="1" dur="indefinite" restart="never" nodeType="tmRoot">
-          <p:childTnLst>
-            <p:seq concurrent="1" nextAc="seek">
-              <p:cTn id="2" dur="indefinite" nodeType="mainSeq">
-                <p:childTnLst>
-                  <p:par>
-                    <p:cTn id="3" fill="hold">
-                      <p:stCondLst>
-                        <p:cond delay="indefinite"/>
-                      </p:stCondLst>
-                      <p:childTnLst>
-                        <p:par>
-                          <p:cTn id="4" fill="hold">
-                            <p:stCondLst>
-                              <p:cond delay="0"/>
-                            </p:stCondLst>
-                            <p:childTnLst>
-                              <p:par>
-                                <p:cTn id="5" presetID="34" presetClass="entr" presetSubtype="0" fill="hold" grpId="0" nodeType="clickEffect">
-                                  <p:stCondLst>
-                                    <p:cond delay="0"/>
-                                  </p:stCondLst>
-                                  <p:childTnLst>
-                                    <p:set>
-                                      <p:cBhvr>
-                                        <p:cTn id="6" dur="1" fill="hold">
-                                          <p:stCondLst>
-                                            <p:cond delay="0"/>
-                                          </p:stCondLst>
-                                        </p:cTn>
-                                        <p:tgtEl>
-                                          <p:spTgt spid="6"/>
-                                        </p:tgtEl>
-                                        <p:attrNameLst>
-                                          <p:attrName>style.visibility</p:attrName>
-                                        </p:attrNameLst>
-                                      </p:cBhvr>
-                                      <p:to>
-                                        <p:strVal val="visible"/>
-                                      </p:to>
-                                    </p:set>
-                                    <p:anim from="(-#ppt_w/2)" to="(#ppt_x)" calcmode="lin" valueType="num">
-                                      <p:cBhvr>
-                                        <p:cTn id="7" dur="600" fill="hold">
-                                          <p:stCondLst>
-                                            <p:cond delay="0"/>
-                                          </p:stCondLst>
-                                        </p:cTn>
-                                        <p:tgtEl>
-                                          <p:spTgt spid="6"/>
-                                        </p:tgtEl>
-                                        <p:attrNameLst>
-                                          <p:attrName>ppt_x</p:attrName>
-                                        </p:attrNameLst>
-                                      </p:cBhvr>
-                                    </p:anim>
-                                    <p:anim from="0" to="-1.0" calcmode="lin" valueType="num">
-                                      <p:cBhvr>
-                                        <p:cTn id="8" dur="200" decel="50000" autoRev="1" fill="hold">
-                                          <p:stCondLst>
-                                            <p:cond delay="600"/>
-                                          </p:stCondLst>
-                                        </p:cTn>
-                                        <p:tgtEl>
-                                          <p:spTgt spid="6"/>
-                                        </p:tgtEl>
-                                        <p:attrNameLst>
-                                          <p:attrName>xshear</p:attrName>
-                                        </p:attrNameLst>
-                                      </p:cBhvr>
-                                    </p:anim>
-                                    <p:animScale>
-                                      <p:cBhvr>
-                                        <p:cTn id="9" dur="200" decel="100000" autoRev="1" fill="hold">
-                                          <p:stCondLst>
-                                            <p:cond delay="600"/>
-                                          </p:stCondLst>
-                                        </p:cTn>
-                                        <p:tgtEl>
-                                          <p:spTgt spid="6"/>
-                                        </p:tgtEl>
-                                      </p:cBhvr>
-                                      <p:from x="100000" y="100000"/>
-                                      <p:to x="80000" y="100000"/>
-                                    </p:animScale>
-                                    <p:anim by="(#ppt_h/3+#ppt_w*0.1)" calcmode="lin" valueType="num">
-                                      <p:cBhvr additive="sum">
-                                        <p:cTn id="10" dur="200" decel="100000" autoRev="1" fill="hold">
-                                          <p:stCondLst>
-                                            <p:cond delay="600"/>
-                                          </p:stCondLst>
-                                        </p:cTn>
-                                        <p:tgtEl>
-                                          <p:spTgt spid="6"/>
-                                        </p:tgtEl>
-                                        <p:attrNameLst>
-                                          <p:attrName>ppt_x</p:attrName>
-                                        </p:attrNameLst>
-                                      </p:cBhvr>
-                                    </p:anim>
-                                  </p:childTnLst>
-                                </p:cTn>
-                              </p:par>
-                            </p:childTnLst>
-                          </p:cTn>
-                        </p:par>
-                      </p:childTnLst>
-                    </p:cTn>
-                  </p:par>
-                  <p:par>
-                    <p:cTn id="11" fill="hold">
-                      <p:stCondLst>
-                        <p:cond delay="indefinite"/>
-                      </p:stCondLst>
-                      <p:childTnLst>
-                        <p:par>
-                          <p:cTn id="12" fill="hold">
-                            <p:stCondLst>
-                              <p:cond delay="0"/>
-                            </p:stCondLst>
-                            <p:childTnLst>
-                              <p:par>
-                                <p:cTn id="13" presetID="34" presetClass="entr" presetSubtype="0" fill="hold" grpId="0" nodeType="clickEffect">
-                                  <p:stCondLst>
-                                    <p:cond delay="0"/>
-                                  </p:stCondLst>
-                                  <p:childTnLst>
-                                    <p:set>
-                                      <p:cBhvr>
-                                        <p:cTn id="14" dur="1" fill="hold">
-                                          <p:stCondLst>
-                                            <p:cond delay="0"/>
-                                          </p:stCondLst>
-                                        </p:cTn>
-                                        <p:tgtEl>
-                                          <p:spTgt spid="8"/>
-                                        </p:tgtEl>
-                                        <p:attrNameLst>
-                                          <p:attrName>style.visibility</p:attrName>
-                                        </p:attrNameLst>
-                                      </p:cBhvr>
-                                      <p:to>
-                                        <p:strVal val="visible"/>
-                                      </p:to>
-                                    </p:set>
-                                    <p:anim from="(-#ppt_w/2)" to="(#ppt_x)" calcmode="lin" valueType="num">
-                                      <p:cBhvr>
-                                        <p:cTn id="15" dur="600" fill="hold">
-                                          <p:stCondLst>
-                                            <p:cond delay="0"/>
-                                          </p:stCondLst>
-                                        </p:cTn>
-                                        <p:tgtEl>
-                                          <p:spTgt spid="8"/>
-                                        </p:tgtEl>
-                                        <p:attrNameLst>
-                                          <p:attrName>ppt_x</p:attrName>
-                                        </p:attrNameLst>
-                                      </p:cBhvr>
-                                    </p:anim>
-                                    <p:anim from="0" to="-1.0" calcmode="lin" valueType="num">
-                                      <p:cBhvr>
-                                        <p:cTn id="16" dur="200" decel="50000" autoRev="1" fill="hold">
-                                          <p:stCondLst>
-                                            <p:cond delay="600"/>
-                                          </p:stCondLst>
-                                        </p:cTn>
-                                        <p:tgtEl>
-                                          <p:spTgt spid="8"/>
-                                        </p:tgtEl>
-                                        <p:attrNameLst>
-                                          <p:attrName>xshear</p:attrName>
-                                        </p:attrNameLst>
-                                      </p:cBhvr>
-                                    </p:anim>
-                                    <p:animScale>
-                                      <p:cBhvr>
-                                        <p:cTn id="17" dur="200" decel="100000" autoRev="1" fill="hold">
-                                          <p:stCondLst>
-                                            <p:cond delay="600"/>
-                                          </p:stCondLst>
-                                        </p:cTn>
-                                        <p:tgtEl>
-                                          <p:spTgt spid="8"/>
-                                        </p:tgtEl>
-                                      </p:cBhvr>
-                                      <p:from x="100000" y="100000"/>
-                                      <p:to x="80000" y="100000"/>
-                                    </p:animScale>
-                                    <p:anim by="(#ppt_h/3+#ppt_w*0.1)" calcmode="lin" valueType="num">
-                                      <p:cBhvr additive="sum">
-                                        <p:cTn id="18" dur="200" decel="100000" autoRev="1" fill="hold">
-                                          <p:stCondLst>
-                                            <p:cond delay="600"/>
-                                          </p:stCondLst>
-                                        </p:cTn>
-                                        <p:tgtEl>
-                                          <p:spTgt spid="8"/>
-                                        </p:tgtEl>
-                                        <p:attrNameLst>
-                                          <p:attrName>ppt_x</p:attrName>
-                                        </p:attrNameLst>
-                                      </p:cBhvr>
-                                    </p:anim>
-                                  </p:childTnLst>
-                                </p:cTn>
-                              </p:par>
-                            </p:childTnLst>
-                          </p:cTn>
-                        </p:par>
-                      </p:childTnLst>
-                    </p:cTn>
-                  </p:par>
-                  <p:par>
-                    <p:cTn id="19" fill="hold">
-                      <p:stCondLst>
-                        <p:cond delay="indefinite"/>
-                      </p:stCondLst>
-                      <p:childTnLst>
-                        <p:par>
-                          <p:cTn id="20" fill="hold">
-                            <p:stCondLst>
-                              <p:cond delay="0"/>
-                            </p:stCondLst>
-                            <p:childTnLst>
-                              <p:par>
-                                <p:cTn id="21" presetID="34" presetClass="entr" presetSubtype="0" fill="hold" grpId="0" nodeType="clickEffect">
-                                  <p:stCondLst>
-                                    <p:cond delay="0"/>
-                                  </p:stCondLst>
-                                  <p:childTnLst>
-                                    <p:set>
-                                      <p:cBhvr>
-                                        <p:cTn id="22" dur="1" fill="hold">
-                                          <p:stCondLst>
-                                            <p:cond delay="0"/>
-                                          </p:stCondLst>
-                                        </p:cTn>
-                                        <p:tgtEl>
-                                          <p:spTgt spid="10"/>
-                                        </p:tgtEl>
-                                        <p:attrNameLst>
-                                          <p:attrName>style.visibility</p:attrName>
-                                        </p:attrNameLst>
-                                      </p:cBhvr>
-                                      <p:to>
-                                        <p:strVal val="visible"/>
-                                      </p:to>
-                                    </p:set>
-                                    <p:anim from="(-#ppt_w/2)" to="(#ppt_x)" calcmode="lin" valueType="num">
-                                      <p:cBhvr>
-                                        <p:cTn id="23" dur="600" fill="hold">
-                                          <p:stCondLst>
-                                            <p:cond delay="0"/>
-                                          </p:stCondLst>
-                                        </p:cTn>
-                                        <p:tgtEl>
-                                          <p:spTgt spid="10"/>
-                                        </p:tgtEl>
-                                        <p:attrNameLst>
-                                          <p:attrName>ppt_x</p:attrName>
-                                        </p:attrNameLst>
-                                      </p:cBhvr>
-                                    </p:anim>
-                                    <p:anim from="0" to="-1.0" calcmode="lin" valueType="num">
-                                      <p:cBhvr>
-                                        <p:cTn id="24" dur="200" decel="50000" autoRev="1" fill="hold">
-                                          <p:stCondLst>
-                                            <p:cond delay="600"/>
-                                          </p:stCondLst>
-                                        </p:cTn>
-                                        <p:tgtEl>
-                                          <p:spTgt spid="10"/>
-                                        </p:tgtEl>
-                                        <p:attrNameLst>
-                                          <p:attrName>xshear</p:attrName>
-                                        </p:attrNameLst>
-                                      </p:cBhvr>
-                                    </p:anim>
-                                    <p:animScale>
-                                      <p:cBhvr>
-                                        <p:cTn id="25" dur="200" decel="100000" autoRev="1" fill="hold">
-                                          <p:stCondLst>
-                                            <p:cond delay="600"/>
-                                          </p:stCondLst>
-                                        </p:cTn>
-                                        <p:tgtEl>
-                                          <p:spTgt spid="10"/>
-                                        </p:tgtEl>
-                                      </p:cBhvr>
-                                      <p:from x="100000" y="100000"/>
-                                      <p:to x="80000" y="100000"/>
-                                    </p:animScale>
-                                    <p:anim by="(#ppt_h/3+#ppt_w*0.1)" calcmode="lin" valueType="num">
-                                      <p:cBhvr additive="sum">
-                                        <p:cTn id="26" dur="200" decel="100000" autoRev="1" fill="hold">
-                                          <p:stCondLst>
-                                            <p:cond delay="600"/>
-                                          </p:stCondLst>
-                                        </p:cTn>
-                                        <p:tgtEl>
-                                          <p:spTgt spid="10"/>
-                                        </p:tgtEl>
-                                        <p:attrNameLst>
-                                          <p:attrName>ppt_x</p:attrName>
-                                        </p:attrNameLst>
-                                      </p:cBhvr>
-                                    </p:anim>
-                                  </p:childTnLst>
-                                </p:cTn>
-                              </p:par>
-                            </p:childTnLst>
-                          </p:cTn>
-                        </p:par>
-                      </p:childTnLst>
-                    </p:cTn>
-                  </p:par>
-                </p:childTnLst>
-              </p:cTn>
-              <p:prevCondLst>
-                <p:cond evt="onPrev" delay="0">
-                  <p:tgtEl>
-                    <p:sldTgt/>
-                  </p:tgtEl>
-                </p:cond>
-              </p:prevCondLst>
-              <p:nextCondLst>
-                <p:cond evt="onNext" delay="0">
-                  <p:tgtEl>
-                    <p:sldTgt/>
-                  </p:tgtEl>
-                </p:cond>
-              </p:nextCondLst>
-            </p:seq>
-          </p:childTnLst>
-        </p:cTn>
-      </p:par>
-    </p:tnLst>
-    <p:bldLst>
-      <p:bldP spid="6" grpId="0"/>
-      <p:bldP spid="8" grpId="0"/>
-      <p:bldP spid="10" grpId="0"/>
-    </p:bldLst>
-  </p:timing>
-</p:sld>
-</file>
-
-<file path=ppt/slides/slide29.xml><?xml version="1.0" encoding="utf-8"?>
-<p:sld xmlns:a="http://schemas.openxmlformats.org/drawingml/2006/main" xmlns:r="http://schemas.openxmlformats.org/officeDocument/2006/relationships" xmlns:p="http://schemas.openxmlformats.org/presentationml/2006/main">
-  <p:cSld>
-    <p:spTree>
-      <p:nvGrpSpPr>
-        <p:cNvPr id="1" name=""/>
-        <p:cNvGrpSpPr/>
-        <p:nvPr/>
-      </p:nvGrpSpPr>
-      <p:grpSpPr>
-        <a:xfrm>
-          <a:off x="0" y="0"/>
-          <a:ext cx="0" cy="0"/>
-          <a:chOff x="0" y="0"/>
-          <a:chExt cx="0" cy="0"/>
-        </a:xfrm>
-      </p:grpSpPr>
-      <p:sp>
-        <p:nvSpPr>
-          <p:cNvPr id="2" name="Title 1">
-            <a:extLst>
-              <a:ext uri="{FF2B5EF4-FFF2-40B4-BE49-F238E27FC236}">
-                <a16:creationId xmlns:a16="http://schemas.microsoft.com/office/drawing/2014/main" id="{D617AB41-6AD1-9EF2-7F95-46A904399681}"/>
-              </a:ext>
-            </a:extLst>
-          </p:cNvPr>
-          <p:cNvSpPr>
-            <a:spLocks noGrp="1"/>
-          </p:cNvSpPr>
-          <p:nvPr>
-            <p:ph type="title"/>
-          </p:nvPr>
-        </p:nvSpPr>
-        <p:spPr/>
-        <p:txBody>
-          <a:bodyPr>
-            <a:noAutofit/>
-          </a:bodyPr>
-          <a:lstStyle/>
-          <a:p>
-            <a:r>
-              <a:rPr lang="en-US">
-                <a:solidFill>
-                  <a:srgbClr val="1F3864"/>
-                </a:solidFill>
-              </a:rPr>
-              <a:t>A note about transformations of variables</a:t>
-            </a:r>
-          </a:p>
-        </p:txBody>
-      </p:sp>
-      <p:sp>
-        <p:nvSpPr>
-          <p:cNvPr id="4" name="Slide Number Placeholder 3">
-            <a:extLst>
-              <a:ext uri="{FF2B5EF4-FFF2-40B4-BE49-F238E27FC236}">
-                <a16:creationId xmlns:a16="http://schemas.microsoft.com/office/drawing/2014/main" id="{97D44AE5-98B5-B840-6B8A-D345C7C2E2F0}"/>
-              </a:ext>
-            </a:extLst>
-          </p:cNvPr>
-          <p:cNvSpPr>
-            <a:spLocks noGrp="1"/>
-          </p:cNvSpPr>
-          <p:nvPr>
-            <p:ph type="sldNum" sz="quarter" idx="12"/>
-          </p:nvPr>
-        </p:nvSpPr>
-        <p:spPr/>
-        <p:txBody>
-          <a:bodyPr/>
-          <a:lstStyle/>
-          <a:p>
-            <a:fld id="{A80A81DD-F10A-4B1C-963A-0ABBB4865886}" type="slidenum">
-              <a:rPr lang="en-US" sz="1600" smtClean="0"/>
-              <a:t>29</a:t>
-            </a:fld>
-            <a:endParaRPr lang="en-US" sz="1600"/>
-          </a:p>
-        </p:txBody>
-      </p:sp>
-      <p:sp>
-        <p:nvSpPr>
-          <p:cNvPr id="5" name="TextBox 4">
-            <a:extLst>
-              <a:ext uri="{FF2B5EF4-FFF2-40B4-BE49-F238E27FC236}">
-                <a16:creationId xmlns:a16="http://schemas.microsoft.com/office/drawing/2014/main" id="{A34AAE17-27CE-D7A3-C663-11BB48ACBF5B}"/>
-              </a:ext>
-            </a:extLst>
-          </p:cNvPr>
-          <p:cNvSpPr txBox="1"/>
-          <p:nvPr/>
-        </p:nvSpPr>
-        <p:spPr>
-          <a:xfrm>
-            <a:off x="762000" y="1879600"/>
-            <a:ext cx="10668000" cy="345440"/>
-          </a:xfrm>
-          <a:prstGeom prst="rect">
-            <a:avLst/>
-          </a:prstGeom>
-          <a:noFill/>
-        </p:spPr>
-        <p:txBody>
-          <a:bodyPr vert="horz" wrap="square" rtlCol="0">
-            <a:spAutoFit/>
-          </a:bodyPr>
-          <a:lstStyle/>
-          <a:p>
-            <a:pPr marL="304800" indent="-304800"/>
-            <a:r>
-              <a:rPr lang="en-US" sz="1600">
-                <a:solidFill>
-                  <a:srgbClr val="000000"/>
-                </a:solidFill>
-              </a:rPr>
-              <a:t>Changing units</a:t>
-            </a:r>
-          </a:p>
-        </p:txBody>
-      </p:sp>
-      <p:sp>
-        <p:nvSpPr>
-          <p:cNvPr id="6" name="TextBox 5">
-            <a:extLst>
-              <a:ext uri="{FF2B5EF4-FFF2-40B4-BE49-F238E27FC236}">
-                <a16:creationId xmlns:a16="http://schemas.microsoft.com/office/drawing/2014/main" id="{E410A0F8-5E1E-9A1D-B64C-50827EE6C9B2}"/>
-              </a:ext>
-            </a:extLst>
-          </p:cNvPr>
-          <p:cNvSpPr txBox="1"/>
-          <p:nvPr/>
-        </p:nvSpPr>
-        <p:spPr>
-          <a:xfrm>
-            <a:off x="1117600" y="2225040"/>
-            <a:ext cx="10312400" cy="338554"/>
-          </a:xfrm>
-          <a:prstGeom prst="rect">
-            <a:avLst/>
-          </a:prstGeom>
-          <a:noFill/>
-        </p:spPr>
-        <p:txBody>
-          <a:bodyPr vert="horz" wrap="square" rtlCol="0">
-            <a:spAutoFit/>
-          </a:bodyPr>
-          <a:lstStyle/>
-          <a:p>
-            <a:r>
-              <a:rPr lang="en-US" sz="1600" b="1">
-                <a:solidFill>
-                  <a:srgbClr val="C00000"/>
-                </a:solidFill>
-              </a:rPr>
-              <a:t>We often need to change the units of a variable: °F to °C, feet to meters, dollars to euros.</a:t>
-            </a:r>
-          </a:p>
-        </p:txBody>
-      </p:sp>
-      <p:sp>
-        <p:nvSpPr>
-          <p:cNvPr id="7" name="TextBox 6">
-            <a:extLst>
-              <a:ext uri="{FF2B5EF4-FFF2-40B4-BE49-F238E27FC236}">
-                <a16:creationId xmlns:a16="http://schemas.microsoft.com/office/drawing/2014/main" id="{47D3CD95-D52E-5227-B663-7C0A72677B6E}"/>
-              </a:ext>
-            </a:extLst>
-          </p:cNvPr>
-          <p:cNvSpPr txBox="1"/>
-          <p:nvPr/>
-        </p:nvSpPr>
-        <p:spPr>
-          <a:xfrm>
-            <a:off x="762000" y="2766794"/>
-            <a:ext cx="10668000" cy="345440"/>
-          </a:xfrm>
-          <a:prstGeom prst="rect">
-            <a:avLst/>
-          </a:prstGeom>
-          <a:noFill/>
-        </p:spPr>
-        <p:txBody>
-          <a:bodyPr vert="horz" wrap="square" rtlCol="0">
-            <a:spAutoFit/>
-          </a:bodyPr>
-          <a:lstStyle/>
-          <a:p>
-            <a:pPr marL="304800" indent="-304800"/>
-            <a:r>
-              <a:rPr lang="en-US" sz="1600">
-                <a:solidFill>
-                  <a:srgbClr val="000000"/>
-                </a:solidFill>
-              </a:rPr>
-              <a:t>Linear transformations: adding, subtracting, multiplying, dividing</a:t>
-            </a:r>
-          </a:p>
-        </p:txBody>
-      </p:sp>
-      <p:sp>
-        <p:nvSpPr>
-          <p:cNvPr id="8" name="TextBox 7">
-            <a:extLst>
-              <a:ext uri="{FF2B5EF4-FFF2-40B4-BE49-F238E27FC236}">
-                <a16:creationId xmlns:a16="http://schemas.microsoft.com/office/drawing/2014/main" id="{1CE3E601-601D-C6B1-8265-C079CB8C9269}"/>
-              </a:ext>
-            </a:extLst>
-          </p:cNvPr>
-          <p:cNvSpPr txBox="1"/>
-          <p:nvPr/>
-        </p:nvSpPr>
-        <p:spPr>
-          <a:xfrm>
-            <a:off x="1117600" y="3112234"/>
-            <a:ext cx="10312400" cy="338554"/>
-          </a:xfrm>
-          <a:prstGeom prst="rect">
-            <a:avLst/>
-          </a:prstGeom>
-          <a:noFill/>
-        </p:spPr>
-        <p:txBody>
-          <a:bodyPr vert="horz" wrap="square" rtlCol="0">
-            <a:spAutoFit/>
-          </a:bodyPr>
-          <a:lstStyle/>
-          <a:p>
-            <a:r>
-              <a:rPr lang="en-US" sz="1600" b="1">
-                <a:solidFill>
-                  <a:srgbClr val="C00000"/>
-                </a:solidFill>
-              </a:rPr>
-              <a:t>y = ax + b (a scales, b shifts). The z-score is a linear transformation. They preserve the shape of the distribution.</a:t>
-            </a:r>
-          </a:p>
-        </p:txBody>
-      </p:sp>
-      <p:sp>
-        <p:nvSpPr>
-          <p:cNvPr id="9" name="TextBox 8">
-            <a:extLst>
-              <a:ext uri="{FF2B5EF4-FFF2-40B4-BE49-F238E27FC236}">
-                <a16:creationId xmlns:a16="http://schemas.microsoft.com/office/drawing/2014/main" id="{FB002BF4-8037-2F73-E27A-7A453477E389}"/>
-              </a:ext>
-            </a:extLst>
-          </p:cNvPr>
-          <p:cNvSpPr txBox="1"/>
-          <p:nvPr/>
-        </p:nvSpPr>
-        <p:spPr>
-          <a:xfrm>
-            <a:off x="762000" y="3653988"/>
-            <a:ext cx="10668000" cy="345440"/>
-          </a:xfrm>
-          <a:prstGeom prst="rect">
-            <a:avLst/>
-          </a:prstGeom>
-          <a:noFill/>
-        </p:spPr>
-        <p:txBody>
-          <a:bodyPr vert="horz" wrap="square" rtlCol="0">
-            <a:spAutoFit/>
-          </a:bodyPr>
-          <a:lstStyle/>
-          <a:p>
-            <a:pPr marL="304800" indent="-304800"/>
-            <a:r>
-              <a:rPr lang="en-US" sz="1600">
-                <a:solidFill>
-                  <a:srgbClr val="000000"/>
-                </a:solidFill>
-              </a:rPr>
-              <a:t>Nonlinear transformations: squaring, taking roots, logarithms, exponentiation</a:t>
-            </a:r>
-          </a:p>
-        </p:txBody>
-      </p:sp>
-      <p:sp>
-        <p:nvSpPr>
-          <p:cNvPr id="10" name="TextBox 9">
-            <a:extLst>
-              <a:ext uri="{FF2B5EF4-FFF2-40B4-BE49-F238E27FC236}">
-                <a16:creationId xmlns:a16="http://schemas.microsoft.com/office/drawing/2014/main" id="{10F3B3E3-D27C-E008-C93E-ED70BD2A4754}"/>
-              </a:ext>
-            </a:extLst>
-          </p:cNvPr>
-          <p:cNvSpPr txBox="1"/>
-          <p:nvPr/>
-        </p:nvSpPr>
-        <p:spPr>
-          <a:xfrm>
-            <a:off x="1117600" y="3999428"/>
-            <a:ext cx="10312400" cy="338554"/>
-          </a:xfrm>
-          <a:prstGeom prst="rect">
-            <a:avLst/>
-          </a:prstGeom>
-          <a:noFill/>
-        </p:spPr>
-        <p:txBody>
-          <a:bodyPr vert="horz" wrap="square" rtlCol="0">
-            <a:spAutoFit/>
-          </a:bodyPr>
-          <a:lstStyle/>
-          <a:p>
-            <a:r>
-              <a:rPr lang="en-US" sz="1600" b="1">
-                <a:solidFill>
-                  <a:srgbClr val="C00000"/>
-                </a:solidFill>
-              </a:rPr>
-              <a:t>They do NOT preserve the shape of the distribution.</a:t>
-            </a:r>
-          </a:p>
-        </p:txBody>
-      </p:sp>
-      <p:sp>
-        <p:nvSpPr>
-          <p:cNvPr id="3" name="Title rule">
-            <a:extLst>
-              <a:ext uri="{FF2B5EF4-FFF2-40B4-BE49-F238E27FC236}">
-                <a16:creationId xmlns:a16="http://schemas.microsoft.com/office/drawing/2014/main" id="{B469CAAB-2B69-6863-7C28-0C5959E5734B}"/>
-              </a:ext>
-            </a:extLst>
-          </p:cNvPr>
-          <p:cNvSpPr/>
-          <p:nvPr/>
-        </p:nvSpPr>
-        <p:spPr>
-          <a:xfrm>
-            <a:off x="838200" y="1600200"/>
-            <a:ext cx="10515600" cy="38100"/>
-          </a:xfrm>
-          <a:prstGeom prst="rect">
-            <a:avLst/>
-          </a:prstGeom>
-          <a:solidFill>
-            <a:srgbClr val="4472C4"/>
-          </a:solidFill>
-          <a:ln w="12700" cap="flat" cmpd="sng" algn="ctr">
-            <a:noFill/>
-            <a:prstDash val="solid"/>
-            <a:miter lim="800000"/>
-          </a:ln>
-          <a:effectLst/>
-          <a:extLst>
-            <a:ext uri="{91240B29-F687-4F45-9708-019B960494DF}">
-              <a14:hiddenLine xmlns:a14="http://schemas.microsoft.com/office/drawing/2010/main" w="12700" cap="flat" cmpd="sng" algn="ctr">
-                <a:solidFill>
-                  <a:schemeClr val="accent1">
-                    <a:shade val="15000"/>
-                  </a:schemeClr>
-                </a:solidFill>
-                <a:prstDash val="solid"/>
-                <a:miter lim="800000"/>
-              </a14:hiddenLine>
-            </a:ext>
-          </a:extLst>
-        </p:spPr>
-        <p:style>
-          <a:lnRef idx="2">
-            <a:schemeClr val="accent1">
-              <a:shade val="15000"/>
-            </a:schemeClr>
-          </a:lnRef>
-          <a:fillRef idx="1">
-            <a:schemeClr val="accent1"/>
-          </a:fillRef>
-          <a:effectRef idx="0">
-            <a:schemeClr val="accent1"/>
-          </a:effectRef>
-          <a:fontRef idx="minor">
-            <a:schemeClr val="lt1"/>
-          </a:fontRef>
-        </p:style>
-        <p:txBody>
-          <a:bodyPr rtlCol="0" anchor="ctr"/>
-          <a:lstStyle/>
-          <a:p>
-            <a:pPr algn="ctr"/>
-            <a:endParaRPr lang="en-US"/>
-          </a:p>
-        </p:txBody>
-      </p:sp>
-    </p:spTree>
-    <p:extLst>
-      <p:ext uri="{BB962C8B-B14F-4D97-AF65-F5344CB8AC3E}">
-        <p14:creationId xmlns:p14="http://schemas.microsoft.com/office/powerpoint/2010/main" val="3147187670"/>
-      </p:ext>
-    </p:extLst>
-  </p:cSld>
-  <p:clrMapOvr>
-    <a:masterClrMapping/>
-  </p:clrMapOvr>
-  <p:timing>
-    <p:tnLst>
-      <p:par>
-        <p:cTn id="1" dur="indefinite" restart="never" nodeType="tmRoot">
-          <p:childTnLst>
-            <p:seq concurrent="1" nextAc="seek">
-              <p:cTn id="2" dur="indefinite" nodeType="mainSeq">
-                <p:childTnLst>
-                  <p:par>
-                    <p:cTn id="3" fill="hold">
-                      <p:stCondLst>
-                        <p:cond delay="indefinite"/>
-                      </p:stCondLst>
-                      <p:childTnLst>
-                        <p:par>
-                          <p:cTn id="4" fill="hold">
-                            <p:stCondLst>
-                              <p:cond delay="0"/>
-                            </p:stCondLst>
-                            <p:childTnLst>
-                              <p:par>
-                                <p:cTn id="5" presetID="34" presetClass="entr" presetSubtype="0" fill="hold" grpId="0" nodeType="clickEffect">
-                                  <p:stCondLst>
-                                    <p:cond delay="0"/>
-                                  </p:stCondLst>
-                                  <p:childTnLst>
-                                    <p:set>
-                                      <p:cBhvr>
-                                        <p:cTn id="6" dur="1" fill="hold">
-                                          <p:stCondLst>
-                                            <p:cond delay="0"/>
-                                          </p:stCondLst>
-                                        </p:cTn>
-                                        <p:tgtEl>
-                                          <p:spTgt spid="6"/>
-                                        </p:tgtEl>
-                                        <p:attrNameLst>
-                                          <p:attrName>style.visibility</p:attrName>
-                                        </p:attrNameLst>
-                                      </p:cBhvr>
-                                      <p:to>
-                                        <p:strVal val="visible"/>
-                                      </p:to>
-                                    </p:set>
-                                    <p:anim from="(-#ppt_w/2)" to="(#ppt_x)" calcmode="lin" valueType="num">
-                                      <p:cBhvr>
-                                        <p:cTn id="7" dur="600" fill="hold">
-                                          <p:stCondLst>
-                                            <p:cond delay="0"/>
-                                          </p:stCondLst>
-                                        </p:cTn>
-                                        <p:tgtEl>
-                                          <p:spTgt spid="6"/>
-                                        </p:tgtEl>
-                                        <p:attrNameLst>
-                                          <p:attrName>ppt_x</p:attrName>
-                                        </p:attrNameLst>
-                                      </p:cBhvr>
-                                    </p:anim>
-                                    <p:anim from="0" to="-1.0" calcmode="lin" valueType="num">
-                                      <p:cBhvr>
-                                        <p:cTn id="8" dur="200" decel="50000" autoRev="1" fill="hold">
-                                          <p:stCondLst>
-                                            <p:cond delay="600"/>
-                                          </p:stCondLst>
-                                        </p:cTn>
-                                        <p:tgtEl>
-                                          <p:spTgt spid="6"/>
-                                        </p:tgtEl>
-                                        <p:attrNameLst>
-                                          <p:attrName>xshear</p:attrName>
-                                        </p:attrNameLst>
-                                      </p:cBhvr>
-                                    </p:anim>
-                                    <p:animScale>
-                                      <p:cBhvr>
-                                        <p:cTn id="9" dur="200" decel="100000" autoRev="1" fill="hold">
-                                          <p:stCondLst>
-                                            <p:cond delay="600"/>
-                                          </p:stCondLst>
-                                        </p:cTn>
-                                        <p:tgtEl>
-                                          <p:spTgt spid="6"/>
-                                        </p:tgtEl>
-                                      </p:cBhvr>
-                                      <p:from x="100000" y="100000"/>
-                                      <p:to x="80000" y="100000"/>
-                                    </p:animScale>
-                                    <p:anim by="(#ppt_h/3+#ppt_w*0.1)" calcmode="lin" valueType="num">
-                                      <p:cBhvr additive="sum">
-                                        <p:cTn id="10" dur="200" decel="100000" autoRev="1" fill="hold">
-                                          <p:stCondLst>
-                                            <p:cond delay="600"/>
-                                          </p:stCondLst>
-                                        </p:cTn>
-                                        <p:tgtEl>
-                                          <p:spTgt spid="6"/>
-                                        </p:tgtEl>
-                                        <p:attrNameLst>
-                                          <p:attrName>ppt_x</p:attrName>
-                                        </p:attrNameLst>
-                                      </p:cBhvr>
-                                    </p:anim>
-                                  </p:childTnLst>
-                                </p:cTn>
-                              </p:par>
-                            </p:childTnLst>
-                          </p:cTn>
-                        </p:par>
-                      </p:childTnLst>
-                    </p:cTn>
-                  </p:par>
-                  <p:par>
-                    <p:cTn id="11" fill="hold">
-                      <p:stCondLst>
-                        <p:cond delay="indefinite"/>
-                      </p:stCondLst>
-                      <p:childTnLst>
-                        <p:par>
-                          <p:cTn id="12" fill="hold">
-                            <p:stCondLst>
-                              <p:cond delay="0"/>
-                            </p:stCondLst>
-                            <p:childTnLst>
-                              <p:par>
-                                <p:cTn id="13" presetID="34" presetClass="entr" presetSubtype="0" fill="hold" grpId="0" nodeType="clickEffect">
-                                  <p:stCondLst>
-                                    <p:cond delay="0"/>
-                                  </p:stCondLst>
-                                  <p:childTnLst>
-                                    <p:set>
-                                      <p:cBhvr>
-                                        <p:cTn id="14" dur="1" fill="hold">
-                                          <p:stCondLst>
-                                            <p:cond delay="0"/>
-                                          </p:stCondLst>
-                                        </p:cTn>
-                                        <p:tgtEl>
-                                          <p:spTgt spid="8"/>
-                                        </p:tgtEl>
-                                        <p:attrNameLst>
-                                          <p:attrName>style.visibility</p:attrName>
-                                        </p:attrNameLst>
-                                      </p:cBhvr>
-                                      <p:to>
-                                        <p:strVal val="visible"/>
-                                      </p:to>
-                                    </p:set>
-                                    <p:anim from="(-#ppt_w/2)" to="(#ppt_x)" calcmode="lin" valueType="num">
-                                      <p:cBhvr>
-                                        <p:cTn id="15" dur="600" fill="hold">
-                                          <p:stCondLst>
-                                            <p:cond delay="0"/>
-                                          </p:stCondLst>
-                                        </p:cTn>
-                                        <p:tgtEl>
-                                          <p:spTgt spid="8"/>
-                                        </p:tgtEl>
-                                        <p:attrNameLst>
-                                          <p:attrName>ppt_x</p:attrName>
-                                        </p:attrNameLst>
-                                      </p:cBhvr>
-                                    </p:anim>
-                                    <p:anim from="0" to="-1.0" calcmode="lin" valueType="num">
-                                      <p:cBhvr>
-                                        <p:cTn id="16" dur="200" decel="50000" autoRev="1" fill="hold">
-                                          <p:stCondLst>
-                                            <p:cond delay="600"/>
-                                          </p:stCondLst>
-                                        </p:cTn>
-                                        <p:tgtEl>
-                                          <p:spTgt spid="8"/>
-                                        </p:tgtEl>
-                                        <p:attrNameLst>
-                                          <p:attrName>xshear</p:attrName>
-                                        </p:attrNameLst>
-                                      </p:cBhvr>
-                                    </p:anim>
-                                    <p:animScale>
-                                      <p:cBhvr>
-                                        <p:cTn id="17" dur="200" decel="100000" autoRev="1" fill="hold">
-                                          <p:stCondLst>
-                                            <p:cond delay="600"/>
-                                          </p:stCondLst>
-                                        </p:cTn>
-                                        <p:tgtEl>
-                                          <p:spTgt spid="8"/>
-                                        </p:tgtEl>
-                                      </p:cBhvr>
-                                      <p:from x="100000" y="100000"/>
-                                      <p:to x="80000" y="100000"/>
-                                    </p:animScale>
-                                    <p:anim by="(#ppt_h/3+#ppt_w*0.1)" calcmode="lin" valueType="num">
-                                      <p:cBhvr additive="sum">
-                                        <p:cTn id="18" dur="200" decel="100000" autoRev="1" fill="hold">
-                                          <p:stCondLst>
-                                            <p:cond delay="600"/>
-                                          </p:stCondLst>
-                                        </p:cTn>
-                                        <p:tgtEl>
-                                          <p:spTgt spid="8"/>
-                                        </p:tgtEl>
-                                        <p:attrNameLst>
-                                          <p:attrName>ppt_x</p:attrName>
-                                        </p:attrNameLst>
-                                      </p:cBhvr>
-                                    </p:anim>
-                                  </p:childTnLst>
-                                </p:cTn>
-                              </p:par>
-                            </p:childTnLst>
-                          </p:cTn>
-                        </p:par>
-                      </p:childTnLst>
-                    </p:cTn>
-                  </p:par>
-                  <p:par>
-                    <p:cTn id="19" fill="hold">
-                      <p:stCondLst>
-                        <p:cond delay="indefinite"/>
-                      </p:stCondLst>
-                      <p:childTnLst>
-                        <p:par>
-                          <p:cTn id="20" fill="hold">
-                            <p:stCondLst>
-                              <p:cond delay="0"/>
-                            </p:stCondLst>
-                            <p:childTnLst>
-                              <p:par>
-                                <p:cTn id="21" presetID="34" presetClass="entr" presetSubtype="0" fill="hold" grpId="0" nodeType="clickEffect">
-                                  <p:stCondLst>
-                                    <p:cond delay="0"/>
-                                  </p:stCondLst>
-                                  <p:childTnLst>
-                                    <p:set>
-                                      <p:cBhvr>
-                                        <p:cTn id="22" dur="1" fill="hold">
-                                          <p:stCondLst>
-                                            <p:cond delay="0"/>
-                                          </p:stCondLst>
-                                        </p:cTn>
-                                        <p:tgtEl>
-                                          <p:spTgt spid="10"/>
-                                        </p:tgtEl>
-                                        <p:attrNameLst>
-                                          <p:attrName>style.visibility</p:attrName>
-                                        </p:attrNameLst>
-                                      </p:cBhvr>
-                                      <p:to>
-                                        <p:strVal val="visible"/>
-                                      </p:to>
-                                    </p:set>
-                                    <p:anim from="(-#ppt_w/2)" to="(#ppt_x)" calcmode="lin" valueType="num">
-                                      <p:cBhvr>
-                                        <p:cTn id="23" dur="600" fill="hold">
-                                          <p:stCondLst>
-                                            <p:cond delay="0"/>
-                                          </p:stCondLst>
-                                        </p:cTn>
-                                        <p:tgtEl>
-                                          <p:spTgt spid="10"/>
-                                        </p:tgtEl>
-                                        <p:attrNameLst>
-                                          <p:attrName>ppt_x</p:attrName>
-                                        </p:attrNameLst>
-                                      </p:cBhvr>
-                                    </p:anim>
-                                    <p:anim from="0" to="-1.0" calcmode="lin" valueType="num">
-                                      <p:cBhvr>
-                                        <p:cTn id="24" dur="200" decel="50000" autoRev="1" fill="hold">
-                                          <p:stCondLst>
-                                            <p:cond delay="600"/>
-                                          </p:stCondLst>
-                                        </p:cTn>
-                                        <p:tgtEl>
-                                          <p:spTgt spid="10"/>
-                                        </p:tgtEl>
-                                        <p:attrNameLst>
-                                          <p:attrName>xshear</p:attrName>
-                                        </p:attrNameLst>
-                                      </p:cBhvr>
-                                    </p:anim>
-                                    <p:animScale>
-                                      <p:cBhvr>
-                                        <p:cTn id="25" dur="200" decel="100000" autoRev="1" fill="hold">
-                                          <p:stCondLst>
-                                            <p:cond delay="600"/>
-                                          </p:stCondLst>
-                                        </p:cTn>
-                                        <p:tgtEl>
-                                          <p:spTgt spid="10"/>
-                                        </p:tgtEl>
-                                      </p:cBhvr>
-                                      <p:from x="100000" y="100000"/>
-                                      <p:to x="80000" y="100000"/>
-                                    </p:animScale>
-                                    <p:anim by="(#ppt_h/3+#ppt_w*0.1)" calcmode="lin" valueType="num">
-                                      <p:cBhvr additive="sum">
-                                        <p:cTn id="26" dur="200" decel="100000" autoRev="1" fill="hold">
-                                          <p:stCondLst>
-                                            <p:cond delay="600"/>
-                                          </p:stCondLst>
-                                        </p:cTn>
-                                        <p:tgtEl>
-                                          <p:spTgt spid="10"/>
-                                        </p:tgtEl>
-                                        <p:attrNameLst>
-                                          <p:attrName>ppt_x</p:attrName>
-                                        </p:attrNameLst>
-                                      </p:cBhvr>
-                                    </p:anim>
-                                  </p:childTnLst>
-                                </p:cTn>
-                              </p:par>
-                            </p:childTnLst>
-                          </p:cTn>
-                        </p:par>
-                      </p:childTnLst>
-                    </p:cTn>
-                  </p:par>
-                </p:childTnLst>
-              </p:cTn>
-              <p:prevCondLst>
-                <p:cond evt="onPrev" delay="0">
-                  <p:tgtEl>
-                    <p:sldTgt/>
-                  </p:tgtEl>
-                </p:cond>
-              </p:prevCondLst>
-              <p:nextCondLst>
-                <p:cond evt="onNext" delay="0">
-                  <p:tgtEl>
-                    <p:sldTgt/>
-                  </p:tgtEl>
-                </p:cond>
-              </p:nextCondLst>
-            </p:seq>
-          </p:childTnLst>
-        </p:cTn>
-      </p:par>
-    </p:tnLst>
-    <p:bldLst>
-      <p:bldP spid="6" grpId="0"/>
-      <p:bldP spid="8" grpId="0"/>
-      <p:bldP spid="10" grpId="0"/>
-    </p:bldLst>
-  </p:timing>
-</p:sld>
-</file>
-
-<file path=ppt/slides/slide3.xml><?xml version="1.0" encoding="utf-8"?>
-<p:sld xmlns:a="http://schemas.openxmlformats.org/drawingml/2006/main" xmlns:r="http://schemas.openxmlformats.org/officeDocument/2006/relationships" xmlns:p="http://schemas.openxmlformats.org/presentationml/2006/main">
-  <p:cSld>
-    <p:spTree>
-      <p:nvGrpSpPr>
-        <p:cNvPr id="1" name=""/>
-        <p:cNvGrpSpPr/>
-        <p:nvPr/>
-      </p:nvGrpSpPr>
-      <p:grpSpPr>
-        <a:xfrm>
-          <a:off x="0" y="0"/>
-          <a:ext cx="0" cy="0"/>
-          <a:chOff x="0" y="0"/>
-          <a:chExt cx="0" cy="0"/>
-        </a:xfrm>
-      </p:grpSpPr>
-      <p:sp>
-        <p:nvSpPr>
-          <p:cNvPr id="2" name="Title 1">
-            <a:extLst>
-              <a:ext uri="{FF2B5EF4-FFF2-40B4-BE49-F238E27FC236}">
-                <a16:creationId xmlns:a16="http://schemas.microsoft.com/office/drawing/2014/main" id="{D617AB41-6AD1-9EF2-7F95-46A904399681}"/>
-              </a:ext>
-            </a:extLst>
-          </p:cNvPr>
-          <p:cNvSpPr>
-            <a:spLocks noGrp="1"/>
-          </p:cNvSpPr>
-          <p:nvPr>
-            <p:ph type="title"/>
-          </p:nvPr>
-        </p:nvSpPr>
-        <p:spPr/>
-        <p:txBody>
-          <a:bodyPr>
-            <a:noAutofit/>
-          </a:bodyPr>
-          <a:lstStyle/>
-          <a:p>
-            <a:r>
-              <a:rPr lang="en-US">
-                <a:solidFill>
-                  <a:srgbClr val="1F3864"/>
-                </a:solidFill>
-              </a:rPr>
-              <a:t>What you should know: sampling designs</a:t>
-            </a:r>
-          </a:p>
-        </p:txBody>
-      </p:sp>
-      <p:sp>
-        <p:nvSpPr>
-          <p:cNvPr id="4" name="Slide Number Placeholder 3">
-            <a:extLst>
-              <a:ext uri="{FF2B5EF4-FFF2-40B4-BE49-F238E27FC236}">
-                <a16:creationId xmlns:a16="http://schemas.microsoft.com/office/drawing/2014/main" id="{97D44AE5-98B5-B840-6B8A-D345C7C2E2F0}"/>
-              </a:ext>
-            </a:extLst>
-          </p:cNvPr>
-          <p:cNvSpPr>
-            <a:spLocks noGrp="1"/>
-          </p:cNvSpPr>
-          <p:nvPr>
-            <p:ph type="sldNum" sz="quarter" idx="12"/>
-          </p:nvPr>
-        </p:nvSpPr>
-        <p:spPr/>
-        <p:txBody>
-          <a:bodyPr/>
-          <a:lstStyle/>
-          <a:p>
-            <a:fld id="{A80A81DD-F10A-4B1C-963A-0ABBB4865886}" type="slidenum">
-              <a:rPr lang="en-US" sz="1600" smtClean="0"/>
-              <a:t>3</a:t>
-            </a:fld>
-            <a:endParaRPr lang="en-US" sz="1600"/>
-          </a:p>
-        </p:txBody>
-      </p:sp>
-      <p:sp>
-        <p:nvSpPr>
-          <p:cNvPr id="5" name="TextBox 4">
-            <a:extLst>
-              <a:ext uri="{FF2B5EF4-FFF2-40B4-BE49-F238E27FC236}">
-                <a16:creationId xmlns:a16="http://schemas.microsoft.com/office/drawing/2014/main" id="{A34AAE17-27CE-D7A3-C663-11BB48ACBF5B}"/>
-              </a:ext>
-            </a:extLst>
-          </p:cNvPr>
-          <p:cNvSpPr txBox="1"/>
-          <p:nvPr/>
-        </p:nvSpPr>
-        <p:spPr>
-          <a:xfrm>
-            <a:off x="762000" y="1879600"/>
-            <a:ext cx="10668000" cy="345440"/>
-          </a:xfrm>
-          <a:prstGeom prst="rect">
-            <a:avLst/>
-          </a:prstGeom>
-          <a:noFill/>
-        </p:spPr>
-        <p:txBody>
-          <a:bodyPr vert="horz" wrap="square" rtlCol="0">
-            <a:spAutoFit/>
-          </a:bodyPr>
-          <a:lstStyle/>
-          <a:p>
-            <a:pPr marL="304800" indent="-304800"/>
-            <a:r>
-              <a:rPr lang="en-US" sz="1600">
-                <a:solidFill>
-                  <a:srgbClr val="000000"/>
-                </a:solidFill>
-              </a:rPr>
-              <a:t>Simple random sample (SRS), and systematic sample</a:t>
-            </a:r>
-          </a:p>
-        </p:txBody>
-      </p:sp>
-      <p:sp>
-        <p:nvSpPr>
-          <p:cNvPr id="6" name="TextBox 5">
-            <a:extLst>
-              <a:ext uri="{FF2B5EF4-FFF2-40B4-BE49-F238E27FC236}">
-                <a16:creationId xmlns:a16="http://schemas.microsoft.com/office/drawing/2014/main" id="{E410A0F8-5E1E-9A1D-B64C-50827EE6C9B2}"/>
-              </a:ext>
-            </a:extLst>
-          </p:cNvPr>
-          <p:cNvSpPr txBox="1"/>
-          <p:nvPr/>
-        </p:nvSpPr>
-        <p:spPr>
-          <a:xfrm>
-            <a:off x="1117600" y="2225040"/>
-            <a:ext cx="10312400" cy="338554"/>
-          </a:xfrm>
-          <a:prstGeom prst="rect">
-            <a:avLst/>
-          </a:prstGeom>
-          <a:noFill/>
-        </p:spPr>
-        <p:txBody>
-          <a:bodyPr vert="horz" wrap="square" rtlCol="0">
-            <a:spAutoFit/>
-          </a:bodyPr>
-          <a:lstStyle/>
-          <a:p>
-            <a:r>
-              <a:rPr lang="en-US" sz="1600" b="1">
-                <a:solidFill>
-                  <a:srgbClr val="C00000"/>
-                </a:solidFill>
-              </a:rPr>
-              <a:t>SRS: every sample of n is equally likely. Systematic: random start, then every kth unit.</a:t>
-            </a:r>
-          </a:p>
-        </p:txBody>
-      </p:sp>
-      <p:sp>
-        <p:nvSpPr>
-          <p:cNvPr id="7" name="TextBox 6">
-            <a:extLst>
-              <a:ext uri="{FF2B5EF4-FFF2-40B4-BE49-F238E27FC236}">
-                <a16:creationId xmlns:a16="http://schemas.microsoft.com/office/drawing/2014/main" id="{47D3CD95-D52E-5227-B663-7C0A72677B6E}"/>
-              </a:ext>
-            </a:extLst>
-          </p:cNvPr>
-          <p:cNvSpPr txBox="1"/>
-          <p:nvPr/>
-        </p:nvSpPr>
-        <p:spPr>
-          <a:xfrm>
-            <a:off x="762000" y="2766794"/>
-            <a:ext cx="10668000" cy="345440"/>
-          </a:xfrm>
-          <a:prstGeom prst="rect">
-            <a:avLst/>
-          </a:prstGeom>
-          <a:noFill/>
-        </p:spPr>
-        <p:txBody>
-          <a:bodyPr vert="horz" wrap="square" rtlCol="0">
-            <a:spAutoFit/>
-          </a:bodyPr>
-          <a:lstStyle/>
-          <a:p>
-            <a:pPr marL="304800" indent="-304800"/>
-            <a:r>
-              <a:rPr lang="en-US" sz="1600">
-                <a:solidFill>
-                  <a:srgbClr val="000000"/>
-                </a:solidFill>
-              </a:rPr>
-              <a:t>Stratified random sample, and cluster sample</a:t>
-            </a:r>
-          </a:p>
-        </p:txBody>
-      </p:sp>
-      <p:sp>
-        <p:nvSpPr>
-          <p:cNvPr id="8" name="TextBox 7">
-            <a:extLst>
-              <a:ext uri="{FF2B5EF4-FFF2-40B4-BE49-F238E27FC236}">
-                <a16:creationId xmlns:a16="http://schemas.microsoft.com/office/drawing/2014/main" id="{1CE3E601-601D-C6B1-8265-C079CB8C9269}"/>
-              </a:ext>
-            </a:extLst>
-          </p:cNvPr>
-          <p:cNvSpPr txBox="1"/>
-          <p:nvPr/>
-        </p:nvSpPr>
-        <p:spPr>
-          <a:xfrm>
-            <a:off x="1117600" y="3112234"/>
-            <a:ext cx="10312400" cy="338554"/>
-          </a:xfrm>
-          <a:prstGeom prst="rect">
-            <a:avLst/>
-          </a:prstGeom>
-          <a:noFill/>
-        </p:spPr>
-        <p:txBody>
-          <a:bodyPr vert="horz" wrap="square" rtlCol="0">
-            <a:spAutoFit/>
-          </a:bodyPr>
-          <a:lstStyle/>
-          <a:p>
-            <a:r>
-              <a:rPr lang="en-US" sz="1600" b="1">
-                <a:solidFill>
-                  <a:srgbClr val="C00000"/>
-                </a:solidFill>
-              </a:rPr>
-              <a:t>Stratified: an SRS from every stratum. Cluster: randomly chosen whole clusters.</a:t>
-            </a:r>
-          </a:p>
-        </p:txBody>
-      </p:sp>
-      <p:sp>
-        <p:nvSpPr>
-          <p:cNvPr id="9" name="TextBox 8">
-            <a:extLst>
-              <a:ext uri="{FF2B5EF4-FFF2-40B4-BE49-F238E27FC236}">
-                <a16:creationId xmlns:a16="http://schemas.microsoft.com/office/drawing/2014/main" id="{FB002BF4-8037-2F73-E27A-7A453477E389}"/>
-              </a:ext>
-            </a:extLst>
-          </p:cNvPr>
-          <p:cNvSpPr txBox="1"/>
-          <p:nvPr/>
-        </p:nvSpPr>
-        <p:spPr>
-          <a:xfrm>
-            <a:off x="762000" y="3653988"/>
-            <a:ext cx="10668000" cy="345440"/>
-          </a:xfrm>
-          <a:prstGeom prst="rect">
-            <a:avLst/>
-          </a:prstGeom>
-          <a:noFill/>
-        </p:spPr>
-        <p:txBody>
-          <a:bodyPr vert="horz" wrap="square" rtlCol="0">
-            <a:spAutoFit/>
-          </a:bodyPr>
-          <a:lstStyle/>
-          <a:p>
-            <a:pPr marL="304800" indent="-304800"/>
-            <a:r>
-              <a:rPr lang="en-US" sz="1600">
-                <a:solidFill>
-                  <a:srgbClr val="000000"/>
-                </a:solidFill>
-              </a:rPr>
-              <a:t>Convenience sample, and voluntary response sample</a:t>
-            </a:r>
-          </a:p>
-        </p:txBody>
-      </p:sp>
-      <p:sp>
-        <p:nvSpPr>
-          <p:cNvPr id="10" name="TextBox 9">
-            <a:extLst>
-              <a:ext uri="{FF2B5EF4-FFF2-40B4-BE49-F238E27FC236}">
-                <a16:creationId xmlns:a16="http://schemas.microsoft.com/office/drawing/2014/main" id="{10F3B3E3-D27C-E008-C93E-ED70BD2A4754}"/>
-              </a:ext>
-            </a:extLst>
-          </p:cNvPr>
-          <p:cNvSpPr txBox="1"/>
-          <p:nvPr/>
-        </p:nvSpPr>
-        <p:spPr>
-          <a:xfrm>
-            <a:off x="1117600" y="3999428"/>
-            <a:ext cx="10312400" cy="338554"/>
-          </a:xfrm>
-          <a:prstGeom prst="rect">
-            <a:avLst/>
-          </a:prstGeom>
-          <a:noFill/>
-        </p:spPr>
-        <p:txBody>
-          <a:bodyPr vert="horz" wrap="square" rtlCol="0">
-            <a:spAutoFit/>
-          </a:bodyPr>
-          <a:lstStyle/>
-          <a:p>
-            <a:r>
-              <a:rPr lang="en-US" sz="1600" b="1">
-                <a:solidFill>
-                  <a:srgbClr val="C00000"/>
-                </a:solidFill>
-              </a:rPr>
-              <a:t>The easiest to reach, or self-selected. Both are biased at any sample size.</a:t>
-            </a:r>
-          </a:p>
-        </p:txBody>
-      </p:sp>
-      <p:sp>
-        <p:nvSpPr>
-          <p:cNvPr id="3" name="Title rule">
-            <a:extLst>
-              <a:ext uri="{FF2B5EF4-FFF2-40B4-BE49-F238E27FC236}">
-                <a16:creationId xmlns:a16="http://schemas.microsoft.com/office/drawing/2014/main" id="{B469CAAB-2B69-6863-7C28-0C5959E5734B}"/>
-              </a:ext>
-            </a:extLst>
-          </p:cNvPr>
-          <p:cNvSpPr/>
-          <p:nvPr/>
-        </p:nvSpPr>
-        <p:spPr>
-          <a:xfrm>
-            <a:off x="838200" y="1600200"/>
-            <a:ext cx="10515600" cy="38100"/>
-          </a:xfrm>
-          <a:prstGeom prst="rect">
-            <a:avLst/>
-          </a:prstGeom>
-          <a:solidFill>
-            <a:srgbClr val="4472C4"/>
-          </a:solidFill>
-          <a:ln w="12700" cap="flat" cmpd="sng" algn="ctr">
-            <a:noFill/>
-            <a:prstDash val="solid"/>
-            <a:miter lim="800000"/>
-          </a:ln>
-          <a:effectLst/>
-          <a:extLst>
-            <a:ext uri="{91240B29-F687-4F45-9708-019B960494DF}">
-              <a14:hiddenLine xmlns:a14="http://schemas.microsoft.com/office/drawing/2010/main" w="12700" cap="flat" cmpd="sng" algn="ctr">
-                <a:solidFill>
-                  <a:schemeClr val="accent1">
-                    <a:shade val="15000"/>
-                  </a:schemeClr>
-                </a:solidFill>
-                <a:prstDash val="solid"/>
-                <a:miter lim="800000"/>
-              </a14:hiddenLine>
-            </a:ext>
-          </a:extLst>
-        </p:spPr>
-        <p:style>
-          <a:lnRef idx="2">
-            <a:schemeClr val="accent1">
-              <a:shade val="15000"/>
-            </a:schemeClr>
-          </a:lnRef>
-          <a:fillRef idx="1">
-            <a:schemeClr val="accent1"/>
-          </a:fillRef>
-          <a:effectRef idx="0">
-            <a:schemeClr val="accent1"/>
-          </a:effectRef>
-          <a:fontRef idx="minor">
-            <a:schemeClr val="lt1"/>
-          </a:fontRef>
-        </p:style>
-        <p:txBody>
-          <a:bodyPr rtlCol="0" anchor="ctr"/>
-          <a:lstStyle/>
-          <a:p>
-            <a:pPr algn="ctr"/>
-            <a:endParaRPr lang="en-US"/>
-          </a:p>
-        </p:txBody>
-      </p:sp>
     </p:spTree>
     <p:extLst>
       <p:ext uri="{BB962C8B-B14F-4D97-AF65-F5344CB8AC3E}">
         <p14:creationId xmlns:p14="http://schemas.microsoft.com/office/powerpoint/2010/main" val="3537220133"/>
-      </p:ext>
-    </p:extLst>
-  </p:cSld>
-  <p:clrMapOvr>
-    <a:masterClrMapping/>
-  </p:clrMapOvr>
-  <p:timing>
-    <p:tnLst>
-      <p:par>
-        <p:cTn id="1" dur="indefinite" restart="never" nodeType="tmRoot">
-          <p:childTnLst>
-            <p:seq concurrent="1" nextAc="seek">
-              <p:cTn id="2" dur="indefinite" nodeType="mainSeq">
-                <p:childTnLst>
-                  <p:par>
-                    <p:cTn id="3" fill="hold">
-                      <p:stCondLst>
-                        <p:cond delay="indefinite"/>
-                      </p:stCondLst>
-                      <p:childTnLst>
-                        <p:par>
-                          <p:cTn id="4" fill="hold">
-                            <p:stCondLst>
-                              <p:cond delay="0"/>
-                            </p:stCondLst>
-                            <p:childTnLst>
-                              <p:par>
-                                <p:cTn id="5" presetID="34" presetClass="entr" presetSubtype="0" fill="hold" grpId="0" nodeType="clickEffect">
-                                  <p:stCondLst>
-                                    <p:cond delay="0"/>
-                                  </p:stCondLst>
-                                  <p:childTnLst>
-                                    <p:set>
-                                      <p:cBhvr>
-                                        <p:cTn id="6" dur="1" fill="hold">
-                                          <p:stCondLst>
-                                            <p:cond delay="0"/>
-                                          </p:stCondLst>
-                                        </p:cTn>
-                                        <p:tgtEl>
-                                          <p:spTgt spid="6"/>
-                                        </p:tgtEl>
-                                        <p:attrNameLst>
-                                          <p:attrName>style.visibility</p:attrName>
-                                        </p:attrNameLst>
-                                      </p:cBhvr>
-                                      <p:to>
-                                        <p:strVal val="visible"/>
-                                      </p:to>
-                                    </p:set>
-                                    <p:anim from="(-#ppt_w/2)" to="(#ppt_x)" calcmode="lin" valueType="num">
-                                      <p:cBhvr>
-                                        <p:cTn id="7" dur="600" fill="hold">
-                                          <p:stCondLst>
-                                            <p:cond delay="0"/>
-                                          </p:stCondLst>
-                                        </p:cTn>
-                                        <p:tgtEl>
-                                          <p:spTgt spid="6"/>
-                                        </p:tgtEl>
-                                        <p:attrNameLst>
-                                          <p:attrName>ppt_x</p:attrName>
-                                        </p:attrNameLst>
-                                      </p:cBhvr>
-                                    </p:anim>
-                                    <p:anim from="0" to="-1.0" calcmode="lin" valueType="num">
-                                      <p:cBhvr>
-                                        <p:cTn id="8" dur="200" decel="50000" autoRev="1" fill="hold">
-                                          <p:stCondLst>
-                                            <p:cond delay="600"/>
-                                          </p:stCondLst>
-                                        </p:cTn>
-                                        <p:tgtEl>
-                                          <p:spTgt spid="6"/>
-                                        </p:tgtEl>
-                                        <p:attrNameLst>
-                                          <p:attrName>xshear</p:attrName>
-                                        </p:attrNameLst>
-                                      </p:cBhvr>
-                                    </p:anim>
-                                    <p:animScale>
-                                      <p:cBhvr>
-                                        <p:cTn id="9" dur="200" decel="100000" autoRev="1" fill="hold">
-                                          <p:stCondLst>
-                                            <p:cond delay="600"/>
-                                          </p:stCondLst>
-                                        </p:cTn>
-                                        <p:tgtEl>
-                                          <p:spTgt spid="6"/>
-                                        </p:tgtEl>
-                                      </p:cBhvr>
-                                      <p:from x="100000" y="100000"/>
-                                      <p:to x="80000" y="100000"/>
-                                    </p:animScale>
-                                    <p:anim by="(#ppt_h/3+#ppt_w*0.1)" calcmode="lin" valueType="num">
-                                      <p:cBhvr additive="sum">
-                                        <p:cTn id="10" dur="200" decel="100000" autoRev="1" fill="hold">
-                                          <p:stCondLst>
-                                            <p:cond delay="600"/>
-                                          </p:stCondLst>
-                                        </p:cTn>
-                                        <p:tgtEl>
-                                          <p:spTgt spid="6"/>
-                                        </p:tgtEl>
-                                        <p:attrNameLst>
-                                          <p:attrName>ppt_x</p:attrName>
-                                        </p:attrNameLst>
-                                      </p:cBhvr>
-                                    </p:anim>
-                                  </p:childTnLst>
-                                </p:cTn>
-                              </p:par>
-                            </p:childTnLst>
-                          </p:cTn>
-                        </p:par>
-                      </p:childTnLst>
-                    </p:cTn>
-                  </p:par>
-                  <p:par>
-                    <p:cTn id="11" fill="hold">
-                      <p:stCondLst>
-                        <p:cond delay="indefinite"/>
-                      </p:stCondLst>
-                      <p:childTnLst>
-                        <p:par>
-                          <p:cTn id="12" fill="hold">
-                            <p:stCondLst>
-                              <p:cond delay="0"/>
-                            </p:stCondLst>
-                            <p:childTnLst>
-                              <p:par>
-                                <p:cTn id="13" presetID="34" presetClass="entr" presetSubtype="0" fill="hold" grpId="0" nodeType="clickEffect">
-                                  <p:stCondLst>
-                                    <p:cond delay="0"/>
-                                  </p:stCondLst>
-                                  <p:childTnLst>
-                                    <p:set>
-                                      <p:cBhvr>
-                                        <p:cTn id="14" dur="1" fill="hold">
-                                          <p:stCondLst>
-                                            <p:cond delay="0"/>
-                                          </p:stCondLst>
-                                        </p:cTn>
-                                        <p:tgtEl>
-                                          <p:spTgt spid="8"/>
-                                        </p:tgtEl>
-                                        <p:attrNameLst>
-                                          <p:attrName>style.visibility</p:attrName>
-                                        </p:attrNameLst>
-                                      </p:cBhvr>
-                                      <p:to>
-                                        <p:strVal val="visible"/>
-                                      </p:to>
-                                    </p:set>
-                                    <p:anim from="(-#ppt_w/2)" to="(#ppt_x)" calcmode="lin" valueType="num">
-                                      <p:cBhvr>
-                                        <p:cTn id="15" dur="600" fill="hold">
-                                          <p:stCondLst>
-                                            <p:cond delay="0"/>
-                                          </p:stCondLst>
-                                        </p:cTn>
-                                        <p:tgtEl>
-                                          <p:spTgt spid="8"/>
-                                        </p:tgtEl>
-                                        <p:attrNameLst>
-                                          <p:attrName>ppt_x</p:attrName>
-                                        </p:attrNameLst>
-                                      </p:cBhvr>
-                                    </p:anim>
-                                    <p:anim from="0" to="-1.0" calcmode="lin" valueType="num">
-                                      <p:cBhvr>
-                                        <p:cTn id="16" dur="200" decel="50000" autoRev="1" fill="hold">
-                                          <p:stCondLst>
-                                            <p:cond delay="600"/>
-                                          </p:stCondLst>
-                                        </p:cTn>
-                                        <p:tgtEl>
-                                          <p:spTgt spid="8"/>
-                                        </p:tgtEl>
-                                        <p:attrNameLst>
-                                          <p:attrName>xshear</p:attrName>
-                                        </p:attrNameLst>
-                                      </p:cBhvr>
-                                    </p:anim>
-                                    <p:animScale>
-                                      <p:cBhvr>
-                                        <p:cTn id="17" dur="200" decel="100000" autoRev="1" fill="hold">
-                                          <p:stCondLst>
-                                            <p:cond delay="600"/>
-                                          </p:stCondLst>
-                                        </p:cTn>
-                                        <p:tgtEl>
-                                          <p:spTgt spid="8"/>
-                                        </p:tgtEl>
-                                      </p:cBhvr>
-                                      <p:from x="100000" y="100000"/>
-                                      <p:to x="80000" y="100000"/>
-                                    </p:animScale>
-                                    <p:anim by="(#ppt_h/3+#ppt_w*0.1)" calcmode="lin" valueType="num">
-                                      <p:cBhvr additive="sum">
-                                        <p:cTn id="18" dur="200" decel="100000" autoRev="1" fill="hold">
-                                          <p:stCondLst>
-                                            <p:cond delay="600"/>
-                                          </p:stCondLst>
-                                        </p:cTn>
-                                        <p:tgtEl>
-                                          <p:spTgt spid="8"/>
-                                        </p:tgtEl>
-                                        <p:attrNameLst>
-                                          <p:attrName>ppt_x</p:attrName>
-                                        </p:attrNameLst>
-                                      </p:cBhvr>
-                                    </p:anim>
-                                  </p:childTnLst>
-                                </p:cTn>
-                              </p:par>
-                            </p:childTnLst>
-                          </p:cTn>
-                        </p:par>
-                      </p:childTnLst>
-                    </p:cTn>
-                  </p:par>
-                  <p:par>
-                    <p:cTn id="19" fill="hold">
-                      <p:stCondLst>
-                        <p:cond delay="indefinite"/>
-                      </p:stCondLst>
-                      <p:childTnLst>
-                        <p:par>
-                          <p:cTn id="20" fill="hold">
-                            <p:stCondLst>
-                              <p:cond delay="0"/>
-                            </p:stCondLst>
-                            <p:childTnLst>
-                              <p:par>
-                                <p:cTn id="21" presetID="34" presetClass="entr" presetSubtype="0" fill="hold" grpId="0" nodeType="clickEffect">
-                                  <p:stCondLst>
-                                    <p:cond delay="0"/>
-                                  </p:stCondLst>
-                                  <p:childTnLst>
-                                    <p:set>
-                                      <p:cBhvr>
-                                        <p:cTn id="22" dur="1" fill="hold">
-                                          <p:stCondLst>
-                                            <p:cond delay="0"/>
-                                          </p:stCondLst>
-                                        </p:cTn>
-                                        <p:tgtEl>
-                                          <p:spTgt spid="10"/>
-                                        </p:tgtEl>
-                                        <p:attrNameLst>
-                                          <p:attrName>style.visibility</p:attrName>
-                                        </p:attrNameLst>
-                                      </p:cBhvr>
-                                      <p:to>
-                                        <p:strVal val="visible"/>
-                                      </p:to>
-                                    </p:set>
-                                    <p:anim from="(-#ppt_w/2)" to="(#ppt_x)" calcmode="lin" valueType="num">
-                                      <p:cBhvr>
-                                        <p:cTn id="23" dur="600" fill="hold">
-                                          <p:stCondLst>
-                                            <p:cond delay="0"/>
-                                          </p:stCondLst>
-                                        </p:cTn>
-                                        <p:tgtEl>
-                                          <p:spTgt spid="10"/>
-                                        </p:tgtEl>
-                                        <p:attrNameLst>
-                                          <p:attrName>ppt_x</p:attrName>
-                                        </p:attrNameLst>
-                                      </p:cBhvr>
-                                    </p:anim>
-                                    <p:anim from="0" to="-1.0" calcmode="lin" valueType="num">
-                                      <p:cBhvr>
-                                        <p:cTn id="24" dur="200" decel="50000" autoRev="1" fill="hold">
-                                          <p:stCondLst>
-                                            <p:cond delay="600"/>
-                                          </p:stCondLst>
-                                        </p:cTn>
-                                        <p:tgtEl>
-                                          <p:spTgt spid="10"/>
-                                        </p:tgtEl>
-                                        <p:attrNameLst>
-                                          <p:attrName>xshear</p:attrName>
-                                        </p:attrNameLst>
-                                      </p:cBhvr>
-                                    </p:anim>
-                                    <p:animScale>
-                                      <p:cBhvr>
-                                        <p:cTn id="25" dur="200" decel="100000" autoRev="1" fill="hold">
-                                          <p:stCondLst>
-                                            <p:cond delay="600"/>
-                                          </p:stCondLst>
-                                        </p:cTn>
-                                        <p:tgtEl>
-                                          <p:spTgt spid="10"/>
-                                        </p:tgtEl>
-                                      </p:cBhvr>
-                                      <p:from x="100000" y="100000"/>
-                                      <p:to x="80000" y="100000"/>
-                                    </p:animScale>
-                                    <p:anim by="(#ppt_h/3+#ppt_w*0.1)" calcmode="lin" valueType="num">
-                                      <p:cBhvr additive="sum">
-                                        <p:cTn id="26" dur="200" decel="100000" autoRev="1" fill="hold">
-                                          <p:stCondLst>
-                                            <p:cond delay="600"/>
-                                          </p:stCondLst>
-                                        </p:cTn>
-                                        <p:tgtEl>
-                                          <p:spTgt spid="10"/>
-                                        </p:tgtEl>
-                                        <p:attrNameLst>
-                                          <p:attrName>ppt_x</p:attrName>
-                                        </p:attrNameLst>
-                                      </p:cBhvr>
-                                    </p:anim>
-                                  </p:childTnLst>
-                                </p:cTn>
-                              </p:par>
-                            </p:childTnLst>
-                          </p:cTn>
-                        </p:par>
-                      </p:childTnLst>
-                    </p:cTn>
-                  </p:par>
-                </p:childTnLst>
-              </p:cTn>
-              <p:prevCondLst>
-                <p:cond evt="onPrev" delay="0">
-                  <p:tgtEl>
-                    <p:sldTgt/>
-                  </p:tgtEl>
-                </p:cond>
-              </p:prevCondLst>
-              <p:nextCondLst>
-                <p:cond evt="onNext" delay="0">
-                  <p:tgtEl>
-                    <p:sldTgt/>
-                  </p:tgtEl>
-                </p:cond>
-              </p:nextCondLst>
-            </p:seq>
-          </p:childTnLst>
-        </p:cTn>
-      </p:par>
-    </p:tnLst>
-    <p:bldLst>
-      <p:bldP spid="6" grpId="0"/>
-      <p:bldP spid="8" grpId="0"/>
-      <p:bldP spid="10" grpId="0"/>
-    </p:bldLst>
-  </p:timing>
-</p:sld>
-</file>
-
-<file path=ppt/slides/slide30.xml><?xml version="1.0" encoding="utf-8"?>
-<p:sld xmlns:a="http://schemas.openxmlformats.org/drawingml/2006/main" xmlns:r="http://schemas.openxmlformats.org/officeDocument/2006/relationships" xmlns:p="http://schemas.openxmlformats.org/presentationml/2006/main">
-  <p:cSld>
-    <p:spTree>
-      <p:nvGrpSpPr>
-        <p:cNvPr id="1" name=""/>
-        <p:cNvGrpSpPr/>
-        <p:nvPr/>
-      </p:nvGrpSpPr>
-      <p:grpSpPr>
-        <a:xfrm>
-          <a:off x="0" y="0"/>
-          <a:ext cx="0" cy="0"/>
-          <a:chOff x="0" y="0"/>
-          <a:chExt cx="0" cy="0"/>
-        </a:xfrm>
-      </p:grpSpPr>
-      <p:sp>
-        <p:nvSpPr>
-          <p:cNvPr id="2" name="Title 1">
-            <a:extLst>
-              <a:ext uri="{FF2B5EF4-FFF2-40B4-BE49-F238E27FC236}">
-                <a16:creationId xmlns:a16="http://schemas.microsoft.com/office/drawing/2014/main" id="{D617AB41-6AD1-9EF2-7F95-46A904399681}"/>
-              </a:ext>
-            </a:extLst>
-          </p:cNvPr>
-          <p:cNvSpPr>
-            <a:spLocks noGrp="1"/>
-          </p:cNvSpPr>
-          <p:nvPr>
-            <p:ph type="title"/>
-          </p:nvPr>
-        </p:nvSpPr>
-        <p:spPr/>
-        <p:txBody>
-          <a:bodyPr>
-            <a:noAutofit/>
-          </a:bodyPr>
-          <a:lstStyle/>
-          <a:p>
-            <a:r>
-              <a:rPr lang="en-US">
-                <a:solidFill>
-                  <a:srgbClr val="1F3864"/>
-                </a:solidFill>
-              </a:rPr>
-              <a:t>What a linear transformation does to the summaries</a:t>
-            </a:r>
-          </a:p>
-        </p:txBody>
-      </p:sp>
-      <p:sp>
-        <p:nvSpPr>
-          <p:cNvPr id="4" name="Slide Number Placeholder 3">
-            <a:extLst>
-              <a:ext uri="{FF2B5EF4-FFF2-40B4-BE49-F238E27FC236}">
-                <a16:creationId xmlns:a16="http://schemas.microsoft.com/office/drawing/2014/main" id="{97D44AE5-98B5-B840-6B8A-D345C7C2E2F0}"/>
-              </a:ext>
-            </a:extLst>
-          </p:cNvPr>
-          <p:cNvSpPr>
-            <a:spLocks noGrp="1"/>
-          </p:cNvSpPr>
-          <p:nvPr>
-            <p:ph type="sldNum" sz="quarter" idx="12"/>
-          </p:nvPr>
-        </p:nvSpPr>
-        <p:spPr/>
-        <p:txBody>
-          <a:bodyPr/>
-          <a:lstStyle/>
-          <a:p>
-            <a:fld id="{A80A81DD-F10A-4B1C-963A-0ABBB4865886}" type="slidenum">
-              <a:rPr lang="en-US" sz="1600" smtClean="0"/>
-              <a:t>30</a:t>
-            </a:fld>
-            <a:endParaRPr lang="en-US" sz="1600"/>
-          </a:p>
-        </p:txBody>
-      </p:sp>
-      <p:sp>
-        <p:nvSpPr>
-          <p:cNvPr id="5" name="TextBox 4">
-            <a:extLst>
-              <a:ext uri="{FF2B5EF4-FFF2-40B4-BE49-F238E27FC236}">
-                <a16:creationId xmlns:a16="http://schemas.microsoft.com/office/drawing/2014/main" id="{A34AAE17-27CE-D7A3-C663-11BB48ACBF5B}"/>
-              </a:ext>
-            </a:extLst>
-          </p:cNvPr>
-          <p:cNvSpPr txBox="1"/>
-          <p:nvPr/>
-        </p:nvSpPr>
-        <p:spPr>
-          <a:xfrm>
-            <a:off x="762000" y="1879600"/>
-            <a:ext cx="10668000" cy="345440"/>
-          </a:xfrm>
-          <a:prstGeom prst="rect">
-            <a:avLst/>
-          </a:prstGeom>
-          <a:noFill/>
-        </p:spPr>
-        <p:txBody>
-          <a:bodyPr vert="horz" wrap="square" rtlCol="0">
-            <a:spAutoFit/>
-          </a:bodyPr>
-          <a:lstStyle/>
-          <a:p>
-            <a:pPr marL="304800" indent="-304800"/>
-            <a:r>
-              <a:rPr lang="en-US" sz="1600">
-                <a:solidFill>
-                  <a:srgbClr val="000000"/>
-                </a:solidFill>
-              </a:rPr>
-              <a:t>The center moves with the whole transformation</a:t>
-            </a:r>
-          </a:p>
-        </p:txBody>
-      </p:sp>
-      <p:sp>
-        <p:nvSpPr>
-          <p:cNvPr id="6" name="TextBox 5">
-            <a:extLst>
-              <a:ext uri="{FF2B5EF4-FFF2-40B4-BE49-F238E27FC236}">
-                <a16:creationId xmlns:a16="http://schemas.microsoft.com/office/drawing/2014/main" id="{E410A0F8-5E1E-9A1D-B64C-50827EE6C9B2}"/>
-              </a:ext>
-            </a:extLst>
-          </p:cNvPr>
-          <p:cNvSpPr txBox="1"/>
-          <p:nvPr/>
-        </p:nvSpPr>
-        <p:spPr>
-          <a:xfrm>
-            <a:off x="1117600" y="2225040"/>
-            <a:ext cx="10312400" cy="338554"/>
-          </a:xfrm>
-          <a:prstGeom prst="rect">
-            <a:avLst/>
-          </a:prstGeom>
-          <a:noFill/>
-        </p:spPr>
-        <p:txBody>
-          <a:bodyPr vert="horz" wrap="square" rtlCol="0">
-            <a:spAutoFit/>
-          </a:bodyPr>
-          <a:lstStyle/>
-          <a:p>
-            <a:r>
-              <a:rPr lang="en-US" sz="1600" b="1">
-                <a:solidFill>
-                  <a:srgbClr val="C00000"/>
-                </a:solidFill>
-              </a:rPr>
-              <a:t>ȳ = ax̄ + b, and the same for the median.</a:t>
-            </a:r>
-          </a:p>
-        </p:txBody>
-      </p:sp>
-      <p:sp>
-        <p:nvSpPr>
-          <p:cNvPr id="7" name="TextBox 6">
-            <a:extLst>
-              <a:ext uri="{FF2B5EF4-FFF2-40B4-BE49-F238E27FC236}">
-                <a16:creationId xmlns:a16="http://schemas.microsoft.com/office/drawing/2014/main" id="{47D3CD95-D52E-5227-B663-7C0A72677B6E}"/>
-              </a:ext>
-            </a:extLst>
-          </p:cNvPr>
-          <p:cNvSpPr txBox="1"/>
-          <p:nvPr/>
-        </p:nvSpPr>
-        <p:spPr>
-          <a:xfrm>
-            <a:off x="762000" y="2766794"/>
-            <a:ext cx="10668000" cy="345440"/>
-          </a:xfrm>
-          <a:prstGeom prst="rect">
-            <a:avLst/>
-          </a:prstGeom>
-          <a:noFill/>
-        </p:spPr>
-        <p:txBody>
-          <a:bodyPr vert="horz" wrap="square" rtlCol="0">
-            <a:spAutoFit/>
-          </a:bodyPr>
-          <a:lstStyle/>
-          <a:p>
-            <a:pPr marL="304800" indent="-304800"/>
-            <a:r>
-              <a:rPr lang="en-US" sz="1600">
-                <a:solidFill>
-                  <a:srgbClr val="000000"/>
-                </a:solidFill>
-              </a:rPr>
-              <a:t>The spread ignores the shift</a:t>
-            </a:r>
-          </a:p>
-        </p:txBody>
-      </p:sp>
-      <p:sp>
-        <p:nvSpPr>
-          <p:cNvPr id="8" name="TextBox 7">
-            <a:extLst>
-              <a:ext uri="{FF2B5EF4-FFF2-40B4-BE49-F238E27FC236}">
-                <a16:creationId xmlns:a16="http://schemas.microsoft.com/office/drawing/2014/main" id="{1CE3E601-601D-C6B1-8265-C079CB8C9269}"/>
-              </a:ext>
-            </a:extLst>
-          </p:cNvPr>
-          <p:cNvSpPr txBox="1"/>
-          <p:nvPr/>
-        </p:nvSpPr>
-        <p:spPr>
-          <a:xfrm>
-            <a:off x="1117600" y="3112234"/>
-            <a:ext cx="10312400" cy="338554"/>
-          </a:xfrm>
-          <a:prstGeom prst="rect">
-            <a:avLst/>
-          </a:prstGeom>
-          <a:noFill/>
-        </p:spPr>
-        <p:txBody>
-          <a:bodyPr vert="horz" wrap="square" rtlCol="0">
-            <a:spAutoFit/>
-          </a:bodyPr>
-          <a:lstStyle/>
-          <a:p>
-            <a:r>
-              <a:rPr lang="en-US" sz="1600" b="1">
-                <a:solidFill>
-                  <a:srgbClr val="C00000"/>
-                </a:solidFill>
-              </a:rPr>
-              <a:t>s and IQR are multiplied by |a|; b has no effect.</a:t>
-            </a:r>
-          </a:p>
-        </p:txBody>
-      </p:sp>
-      <p:sp>
-        <p:nvSpPr>
-          <p:cNvPr id="9" name="TextBox 8">
-            <a:extLst>
-              <a:ext uri="{FF2B5EF4-FFF2-40B4-BE49-F238E27FC236}">
-                <a16:creationId xmlns:a16="http://schemas.microsoft.com/office/drawing/2014/main" id="{FB002BF4-8037-2F73-E27A-7A453477E389}"/>
-              </a:ext>
-            </a:extLst>
-          </p:cNvPr>
-          <p:cNvSpPr txBox="1"/>
-          <p:nvPr/>
-        </p:nvSpPr>
-        <p:spPr>
-          <a:xfrm>
-            <a:off x="762000" y="3653988"/>
-            <a:ext cx="10668000" cy="345440"/>
-          </a:xfrm>
-          <a:prstGeom prst="rect">
-            <a:avLst/>
-          </a:prstGeom>
-          <a:noFill/>
-        </p:spPr>
-        <p:txBody>
-          <a:bodyPr vert="horz" wrap="square" rtlCol="0">
-            <a:spAutoFit/>
-          </a:bodyPr>
-          <a:lstStyle/>
-          <a:p>
-            <a:pPr marL="304800" indent="-304800"/>
-            <a:r>
-              <a:rPr lang="en-US" sz="1600">
-                <a:solidFill>
-                  <a:srgbClr val="000000"/>
-                </a:solidFill>
-              </a:rPr>
-              <a:t>The shape does not change at all</a:t>
-            </a:r>
-          </a:p>
-        </p:txBody>
-      </p:sp>
-      <p:sp>
-        <p:nvSpPr>
-          <p:cNvPr id="10" name="TextBox 9">
-            <a:extLst>
-              <a:ext uri="{FF2B5EF4-FFF2-40B4-BE49-F238E27FC236}">
-                <a16:creationId xmlns:a16="http://schemas.microsoft.com/office/drawing/2014/main" id="{10F3B3E3-D27C-E008-C93E-ED70BD2A4754}"/>
-              </a:ext>
-            </a:extLst>
-          </p:cNvPr>
-          <p:cNvSpPr txBox="1"/>
-          <p:nvPr/>
-        </p:nvSpPr>
-        <p:spPr>
-          <a:xfrm>
-            <a:off x="1117600" y="3999428"/>
-            <a:ext cx="10312400" cy="338554"/>
-          </a:xfrm>
-          <a:prstGeom prst="rect">
-            <a:avLst/>
-          </a:prstGeom>
-          <a:noFill/>
-        </p:spPr>
-        <p:txBody>
-          <a:bodyPr vert="horz" wrap="square" rtlCol="0">
-            <a:spAutoFit/>
-          </a:bodyPr>
-          <a:lstStyle/>
-          <a:p>
-            <a:r>
-              <a:rPr lang="en-US" sz="1600" b="1">
-                <a:solidFill>
-                  <a:srgbClr val="C00000"/>
-                </a:solidFill>
-              </a:rPr>
-              <a:t>Skewness, gaps and outliers all survive unchanged.</a:t>
-            </a:r>
-          </a:p>
-        </p:txBody>
-      </p:sp>
-      <p:sp>
-        <p:nvSpPr>
-          <p:cNvPr id="3" name="Title rule">
-            <a:extLst>
-              <a:ext uri="{FF2B5EF4-FFF2-40B4-BE49-F238E27FC236}">
-                <a16:creationId xmlns:a16="http://schemas.microsoft.com/office/drawing/2014/main" id="{B469CAAB-2B69-6863-7C28-0C5959E5734B}"/>
-              </a:ext>
-            </a:extLst>
-          </p:cNvPr>
-          <p:cNvSpPr/>
-          <p:nvPr/>
-        </p:nvSpPr>
-        <p:spPr>
-          <a:xfrm>
-            <a:off x="838200" y="1600200"/>
-            <a:ext cx="10515600" cy="38100"/>
-          </a:xfrm>
-          <a:prstGeom prst="rect">
-            <a:avLst/>
-          </a:prstGeom>
-          <a:solidFill>
-            <a:srgbClr val="4472C4"/>
-          </a:solidFill>
-          <a:ln w="12700" cap="flat" cmpd="sng" algn="ctr">
-            <a:noFill/>
-            <a:prstDash val="solid"/>
-            <a:miter lim="800000"/>
-          </a:ln>
-          <a:effectLst/>
-          <a:extLst>
-            <a:ext uri="{91240B29-F687-4F45-9708-019B960494DF}">
-              <a14:hiddenLine xmlns:a14="http://schemas.microsoft.com/office/drawing/2010/main" w="12700" cap="flat" cmpd="sng" algn="ctr">
-                <a:solidFill>
-                  <a:schemeClr val="accent1">
-                    <a:shade val="15000"/>
-                  </a:schemeClr>
-                </a:solidFill>
-                <a:prstDash val="solid"/>
-                <a:miter lim="800000"/>
-              </a14:hiddenLine>
-            </a:ext>
-          </a:extLst>
-        </p:spPr>
-        <p:style>
-          <a:lnRef idx="2">
-            <a:schemeClr val="accent1">
-              <a:shade val="15000"/>
-            </a:schemeClr>
-          </a:lnRef>
-          <a:fillRef idx="1">
-            <a:schemeClr val="accent1"/>
-          </a:fillRef>
-          <a:effectRef idx="0">
-            <a:schemeClr val="accent1"/>
-          </a:effectRef>
-          <a:fontRef idx="minor">
-            <a:schemeClr val="lt1"/>
-          </a:fontRef>
-        </p:style>
-        <p:txBody>
-          <a:bodyPr rtlCol="0" anchor="ctr"/>
-          <a:lstStyle/>
-          <a:p>
-            <a:pPr algn="ctr"/>
-            <a:endParaRPr lang="en-US"/>
-          </a:p>
-        </p:txBody>
-      </p:sp>
-    </p:spTree>
-    <p:extLst>
-      <p:ext uri="{BB962C8B-B14F-4D97-AF65-F5344CB8AC3E}">
-        <p14:creationId xmlns:p14="http://schemas.microsoft.com/office/powerpoint/2010/main" val="508423959"/>
-      </p:ext>
-    </p:extLst>
-  </p:cSld>
-  <p:clrMapOvr>
-    <a:masterClrMapping/>
-  </p:clrMapOvr>
-  <p:timing>
-    <p:tnLst>
-      <p:par>
-        <p:cTn id="1" dur="indefinite" restart="never" nodeType="tmRoot">
-          <p:childTnLst>
-            <p:seq concurrent="1" nextAc="seek">
-              <p:cTn id="2" dur="indefinite" nodeType="mainSeq">
-                <p:childTnLst>
-                  <p:par>
-                    <p:cTn id="3" fill="hold">
-                      <p:stCondLst>
-                        <p:cond delay="indefinite"/>
-                      </p:stCondLst>
-                      <p:childTnLst>
-                        <p:par>
-                          <p:cTn id="4" fill="hold">
-                            <p:stCondLst>
-                              <p:cond delay="0"/>
-                            </p:stCondLst>
-                            <p:childTnLst>
-                              <p:par>
-                                <p:cTn id="5" presetID="34" presetClass="entr" presetSubtype="0" fill="hold" grpId="0" nodeType="clickEffect">
-                                  <p:stCondLst>
-                                    <p:cond delay="0"/>
-                                  </p:stCondLst>
-                                  <p:childTnLst>
-                                    <p:set>
-                                      <p:cBhvr>
-                                        <p:cTn id="6" dur="1" fill="hold">
-                                          <p:stCondLst>
-                                            <p:cond delay="0"/>
-                                          </p:stCondLst>
-                                        </p:cTn>
-                                        <p:tgtEl>
-                                          <p:spTgt spid="6"/>
-                                        </p:tgtEl>
-                                        <p:attrNameLst>
-                                          <p:attrName>style.visibility</p:attrName>
-                                        </p:attrNameLst>
-                                      </p:cBhvr>
-                                      <p:to>
-                                        <p:strVal val="visible"/>
-                                      </p:to>
-                                    </p:set>
-                                    <p:anim from="(-#ppt_w/2)" to="(#ppt_x)" calcmode="lin" valueType="num">
-                                      <p:cBhvr>
-                                        <p:cTn id="7" dur="600" fill="hold">
-                                          <p:stCondLst>
-                                            <p:cond delay="0"/>
-                                          </p:stCondLst>
-                                        </p:cTn>
-                                        <p:tgtEl>
-                                          <p:spTgt spid="6"/>
-                                        </p:tgtEl>
-                                        <p:attrNameLst>
-                                          <p:attrName>ppt_x</p:attrName>
-                                        </p:attrNameLst>
-                                      </p:cBhvr>
-                                    </p:anim>
-                                    <p:anim from="0" to="-1.0" calcmode="lin" valueType="num">
-                                      <p:cBhvr>
-                                        <p:cTn id="8" dur="200" decel="50000" autoRev="1" fill="hold">
-                                          <p:stCondLst>
-                                            <p:cond delay="600"/>
-                                          </p:stCondLst>
-                                        </p:cTn>
-                                        <p:tgtEl>
-                                          <p:spTgt spid="6"/>
-                                        </p:tgtEl>
-                                        <p:attrNameLst>
-                                          <p:attrName>xshear</p:attrName>
-                                        </p:attrNameLst>
-                                      </p:cBhvr>
-                                    </p:anim>
-                                    <p:animScale>
-                                      <p:cBhvr>
-                                        <p:cTn id="9" dur="200" decel="100000" autoRev="1" fill="hold">
-                                          <p:stCondLst>
-                                            <p:cond delay="600"/>
-                                          </p:stCondLst>
-                                        </p:cTn>
-                                        <p:tgtEl>
-                                          <p:spTgt spid="6"/>
-                                        </p:tgtEl>
-                                      </p:cBhvr>
-                                      <p:from x="100000" y="100000"/>
-                                      <p:to x="80000" y="100000"/>
-                                    </p:animScale>
-                                    <p:anim by="(#ppt_h/3+#ppt_w*0.1)" calcmode="lin" valueType="num">
-                                      <p:cBhvr additive="sum">
-                                        <p:cTn id="10" dur="200" decel="100000" autoRev="1" fill="hold">
-                                          <p:stCondLst>
-                                            <p:cond delay="600"/>
-                                          </p:stCondLst>
-                                        </p:cTn>
-                                        <p:tgtEl>
-                                          <p:spTgt spid="6"/>
-                                        </p:tgtEl>
-                                        <p:attrNameLst>
-                                          <p:attrName>ppt_x</p:attrName>
-                                        </p:attrNameLst>
-                                      </p:cBhvr>
-                                    </p:anim>
-                                  </p:childTnLst>
-                                </p:cTn>
-                              </p:par>
-                            </p:childTnLst>
-                          </p:cTn>
-                        </p:par>
-                      </p:childTnLst>
-                    </p:cTn>
-                  </p:par>
-                  <p:par>
-                    <p:cTn id="11" fill="hold">
-                      <p:stCondLst>
-                        <p:cond delay="indefinite"/>
-                      </p:stCondLst>
-                      <p:childTnLst>
-                        <p:par>
-                          <p:cTn id="12" fill="hold">
-                            <p:stCondLst>
-                              <p:cond delay="0"/>
-                            </p:stCondLst>
-                            <p:childTnLst>
-                              <p:par>
-                                <p:cTn id="13" presetID="34" presetClass="entr" presetSubtype="0" fill="hold" grpId="0" nodeType="clickEffect">
-                                  <p:stCondLst>
-                                    <p:cond delay="0"/>
-                                  </p:stCondLst>
-                                  <p:childTnLst>
-                                    <p:set>
-                                      <p:cBhvr>
-                                        <p:cTn id="14" dur="1" fill="hold">
-                                          <p:stCondLst>
-                                            <p:cond delay="0"/>
-                                          </p:stCondLst>
-                                        </p:cTn>
-                                        <p:tgtEl>
-                                          <p:spTgt spid="8"/>
-                                        </p:tgtEl>
-                                        <p:attrNameLst>
-                                          <p:attrName>style.visibility</p:attrName>
-                                        </p:attrNameLst>
-                                      </p:cBhvr>
-                                      <p:to>
-                                        <p:strVal val="visible"/>
-                                      </p:to>
-                                    </p:set>
-                                    <p:anim from="(-#ppt_w/2)" to="(#ppt_x)" calcmode="lin" valueType="num">
-                                      <p:cBhvr>
-                                        <p:cTn id="15" dur="600" fill="hold">
-                                          <p:stCondLst>
-                                            <p:cond delay="0"/>
-                                          </p:stCondLst>
-                                        </p:cTn>
-                                        <p:tgtEl>
-                                          <p:spTgt spid="8"/>
-                                        </p:tgtEl>
-                                        <p:attrNameLst>
-                                          <p:attrName>ppt_x</p:attrName>
-                                        </p:attrNameLst>
-                                      </p:cBhvr>
-                                    </p:anim>
-                                    <p:anim from="0" to="-1.0" calcmode="lin" valueType="num">
-                                      <p:cBhvr>
-                                        <p:cTn id="16" dur="200" decel="50000" autoRev="1" fill="hold">
-                                          <p:stCondLst>
-                                            <p:cond delay="600"/>
-                                          </p:stCondLst>
-                                        </p:cTn>
-                                        <p:tgtEl>
-                                          <p:spTgt spid="8"/>
-                                        </p:tgtEl>
-                                        <p:attrNameLst>
-                                          <p:attrName>xshear</p:attrName>
-                                        </p:attrNameLst>
-                                      </p:cBhvr>
-                                    </p:anim>
-                                    <p:animScale>
-                                      <p:cBhvr>
-                                        <p:cTn id="17" dur="200" decel="100000" autoRev="1" fill="hold">
-                                          <p:stCondLst>
-                                            <p:cond delay="600"/>
-                                          </p:stCondLst>
-                                        </p:cTn>
-                                        <p:tgtEl>
-                                          <p:spTgt spid="8"/>
-                                        </p:tgtEl>
-                                      </p:cBhvr>
-                                      <p:from x="100000" y="100000"/>
-                                      <p:to x="80000" y="100000"/>
-                                    </p:animScale>
-                                    <p:anim by="(#ppt_h/3+#ppt_w*0.1)" calcmode="lin" valueType="num">
-                                      <p:cBhvr additive="sum">
-                                        <p:cTn id="18" dur="200" decel="100000" autoRev="1" fill="hold">
-                                          <p:stCondLst>
-                                            <p:cond delay="600"/>
-                                          </p:stCondLst>
-                                        </p:cTn>
-                                        <p:tgtEl>
-                                          <p:spTgt spid="8"/>
-                                        </p:tgtEl>
-                                        <p:attrNameLst>
-                                          <p:attrName>ppt_x</p:attrName>
-                                        </p:attrNameLst>
-                                      </p:cBhvr>
-                                    </p:anim>
-                                  </p:childTnLst>
-                                </p:cTn>
-                              </p:par>
-                            </p:childTnLst>
-                          </p:cTn>
-                        </p:par>
-                      </p:childTnLst>
-                    </p:cTn>
-                  </p:par>
-                  <p:par>
-                    <p:cTn id="19" fill="hold">
-                      <p:stCondLst>
-                        <p:cond delay="indefinite"/>
-                      </p:stCondLst>
-                      <p:childTnLst>
-                        <p:par>
-                          <p:cTn id="20" fill="hold">
-                            <p:stCondLst>
-                              <p:cond delay="0"/>
-                            </p:stCondLst>
-                            <p:childTnLst>
-                              <p:par>
-                                <p:cTn id="21" presetID="34" presetClass="entr" presetSubtype="0" fill="hold" grpId="0" nodeType="clickEffect">
-                                  <p:stCondLst>
-                                    <p:cond delay="0"/>
-                                  </p:stCondLst>
-                                  <p:childTnLst>
-                                    <p:set>
-                                      <p:cBhvr>
-                                        <p:cTn id="22" dur="1" fill="hold">
-                                          <p:stCondLst>
-                                            <p:cond delay="0"/>
-                                          </p:stCondLst>
-                                        </p:cTn>
-                                        <p:tgtEl>
-                                          <p:spTgt spid="10"/>
-                                        </p:tgtEl>
-                                        <p:attrNameLst>
-                                          <p:attrName>style.visibility</p:attrName>
-                                        </p:attrNameLst>
-                                      </p:cBhvr>
-                                      <p:to>
-                                        <p:strVal val="visible"/>
-                                      </p:to>
-                                    </p:set>
-                                    <p:anim from="(-#ppt_w/2)" to="(#ppt_x)" calcmode="lin" valueType="num">
-                                      <p:cBhvr>
-                                        <p:cTn id="23" dur="600" fill="hold">
-                                          <p:stCondLst>
-                                            <p:cond delay="0"/>
-                                          </p:stCondLst>
-                                        </p:cTn>
-                                        <p:tgtEl>
-                                          <p:spTgt spid="10"/>
-                                        </p:tgtEl>
-                                        <p:attrNameLst>
-                                          <p:attrName>ppt_x</p:attrName>
-                                        </p:attrNameLst>
-                                      </p:cBhvr>
-                                    </p:anim>
-                                    <p:anim from="0" to="-1.0" calcmode="lin" valueType="num">
-                                      <p:cBhvr>
-                                        <p:cTn id="24" dur="200" decel="50000" autoRev="1" fill="hold">
-                                          <p:stCondLst>
-                                            <p:cond delay="600"/>
-                                          </p:stCondLst>
-                                        </p:cTn>
-                                        <p:tgtEl>
-                                          <p:spTgt spid="10"/>
-                                        </p:tgtEl>
-                                        <p:attrNameLst>
-                                          <p:attrName>xshear</p:attrName>
-                                        </p:attrNameLst>
-                                      </p:cBhvr>
-                                    </p:anim>
-                                    <p:animScale>
-                                      <p:cBhvr>
-                                        <p:cTn id="25" dur="200" decel="100000" autoRev="1" fill="hold">
-                                          <p:stCondLst>
-                                            <p:cond delay="600"/>
-                                          </p:stCondLst>
-                                        </p:cTn>
-                                        <p:tgtEl>
-                                          <p:spTgt spid="10"/>
-                                        </p:tgtEl>
-                                      </p:cBhvr>
-                                      <p:from x="100000" y="100000"/>
-                                      <p:to x="80000" y="100000"/>
-                                    </p:animScale>
-                                    <p:anim by="(#ppt_h/3+#ppt_w*0.1)" calcmode="lin" valueType="num">
-                                      <p:cBhvr additive="sum">
-                                        <p:cTn id="26" dur="200" decel="100000" autoRev="1" fill="hold">
-                                          <p:stCondLst>
-                                            <p:cond delay="600"/>
-                                          </p:stCondLst>
-                                        </p:cTn>
-                                        <p:tgtEl>
-                                          <p:spTgt spid="10"/>
-                                        </p:tgtEl>
-                                        <p:attrNameLst>
-                                          <p:attrName>ppt_x</p:attrName>
-                                        </p:attrNameLst>
-                                      </p:cBhvr>
-                                    </p:anim>
-                                  </p:childTnLst>
-                                </p:cTn>
-                              </p:par>
-                            </p:childTnLst>
-                          </p:cTn>
-                        </p:par>
-                      </p:childTnLst>
-                    </p:cTn>
-                  </p:par>
-                </p:childTnLst>
-              </p:cTn>
-              <p:prevCondLst>
-                <p:cond evt="onPrev" delay="0">
-                  <p:tgtEl>
-                    <p:sldTgt/>
-                  </p:tgtEl>
-                </p:cond>
-              </p:prevCondLst>
-              <p:nextCondLst>
-                <p:cond evt="onNext" delay="0">
-                  <p:tgtEl>
-                    <p:sldTgt/>
-                  </p:tgtEl>
-                </p:cond>
-              </p:nextCondLst>
-            </p:seq>
-          </p:childTnLst>
-        </p:cTn>
-      </p:par>
-    </p:tnLst>
-    <p:bldLst>
-      <p:bldP spid="6" grpId="0"/>
-      <p:bldP spid="8" grpId="0"/>
-      <p:bldP spid="10" grpId="0"/>
-    </p:bldLst>
-  </p:timing>
-</p:sld>
-</file>
-
-<file path=ppt/slides/slide31.xml><?xml version="1.0" encoding="utf-8"?>
-<p:sld xmlns:a="http://schemas.openxmlformats.org/drawingml/2006/main" xmlns:r="http://schemas.openxmlformats.org/officeDocument/2006/relationships" xmlns:p="http://schemas.openxmlformats.org/presentationml/2006/main">
-  <p:cSld>
-    <p:spTree>
-      <p:nvGrpSpPr>
-        <p:cNvPr id="1" name=""/>
-        <p:cNvGrpSpPr/>
-        <p:nvPr/>
-      </p:nvGrpSpPr>
-      <p:grpSpPr>
-        <a:xfrm>
-          <a:off x="0" y="0"/>
-          <a:ext cx="0" cy="0"/>
-          <a:chOff x="0" y="0"/>
-          <a:chExt cx="0" cy="0"/>
-        </a:xfrm>
-      </p:grpSpPr>
-      <p:sp>
-        <p:nvSpPr>
-          <p:cNvPr id="2" name="Title 1">
-            <a:extLst>
-              <a:ext uri="{FF2B5EF4-FFF2-40B4-BE49-F238E27FC236}">
-                <a16:creationId xmlns:a16="http://schemas.microsoft.com/office/drawing/2014/main" id="{C08D30B1-1864-30EF-7EAB-9BEE656C0012}"/>
-              </a:ext>
-            </a:extLst>
-          </p:cNvPr>
-          <p:cNvSpPr>
-            <a:spLocks noGrp="1"/>
-          </p:cNvSpPr>
-          <p:nvPr>
-            <p:ph type="title"/>
-          </p:nvPr>
-        </p:nvSpPr>
-        <p:spPr/>
-        <p:txBody>
-          <a:bodyPr>
-            <a:noAutofit/>
-          </a:bodyPr>
-          <a:lstStyle/>
-          <a:p>
-            <a:r>
-              <a:rPr lang="en-US">
-                <a:solidFill>
-                  <a:srgbClr val="1F3864"/>
-                </a:solidFill>
-              </a:rPr>
-              <a:t>Example: inches to centimeters</a:t>
-            </a:r>
-          </a:p>
-        </p:txBody>
-      </p:sp>
-      <p:sp>
-        <p:nvSpPr>
-          <p:cNvPr id="4" name="Slide Number Placeholder 3">
-            <a:extLst>
-              <a:ext uri="{FF2B5EF4-FFF2-40B4-BE49-F238E27FC236}">
-                <a16:creationId xmlns:a16="http://schemas.microsoft.com/office/drawing/2014/main" id="{3F875068-D051-44AE-498E-1BEBEDE3A7C8}"/>
-              </a:ext>
-            </a:extLst>
-          </p:cNvPr>
-          <p:cNvSpPr>
-            <a:spLocks noGrp="1"/>
-          </p:cNvSpPr>
-          <p:nvPr>
-            <p:ph type="sldNum" sz="quarter" idx="12"/>
-          </p:nvPr>
-        </p:nvSpPr>
-        <p:spPr/>
-        <p:txBody>
-          <a:bodyPr/>
-          <a:lstStyle/>
-          <a:p>
-            <a:fld id="{A80A81DD-F10A-4B1C-963A-0ABBB4865886}" type="slidenum">
-              <a:rPr lang="en-US" sz="1600" smtClean="0"/>
-              <a:t>31</a:t>
-            </a:fld>
-            <a:endParaRPr lang="en-US" sz="1600"/>
-          </a:p>
-        </p:txBody>
-      </p:sp>
-      <p:sp>
-        <p:nvSpPr>
-          <p:cNvPr id="3" name="Title rule">
-            <a:extLst>
-              <a:ext uri="{FF2B5EF4-FFF2-40B4-BE49-F238E27FC236}">
-                <a16:creationId xmlns:a16="http://schemas.microsoft.com/office/drawing/2014/main" id="{30656AA8-9645-F028-C769-A313710853CC}"/>
-              </a:ext>
-            </a:extLst>
-          </p:cNvPr>
-          <p:cNvSpPr/>
-          <p:nvPr/>
-        </p:nvSpPr>
-        <p:spPr>
-          <a:xfrm>
-            <a:off x="838200" y="1600200"/>
-            <a:ext cx="10515600" cy="38100"/>
-          </a:xfrm>
-          <a:prstGeom prst="rect">
-            <a:avLst/>
-          </a:prstGeom>
-          <a:solidFill>
-            <a:srgbClr val="4472C4"/>
-          </a:solidFill>
-          <a:ln w="12700" cap="flat" cmpd="sng" algn="ctr">
-            <a:noFill/>
-            <a:prstDash val="solid"/>
-            <a:miter lim="800000"/>
-          </a:ln>
-          <a:effectLst/>
-          <a:extLst>
-            <a:ext uri="{91240B29-F687-4F45-9708-019B960494DF}">
-              <a14:hiddenLine xmlns:a14="http://schemas.microsoft.com/office/drawing/2010/main" w="12700" cap="flat" cmpd="sng" algn="ctr">
-                <a:solidFill>
-                  <a:schemeClr val="accent1">
-                    <a:shade val="15000"/>
-                  </a:schemeClr>
-                </a:solidFill>
-                <a:prstDash val="solid"/>
-                <a:miter lim="800000"/>
-              </a14:hiddenLine>
-            </a:ext>
-          </a:extLst>
-        </p:spPr>
-        <p:style>
-          <a:lnRef idx="2">
-            <a:schemeClr val="accent1">
-              <a:shade val="15000"/>
-            </a:schemeClr>
-          </a:lnRef>
-          <a:fillRef idx="1">
-            <a:schemeClr val="accent1"/>
-          </a:fillRef>
-          <a:effectRef idx="0">
-            <a:schemeClr val="accent1"/>
-          </a:effectRef>
-          <a:fontRef idx="minor">
-            <a:schemeClr val="lt1"/>
-          </a:fontRef>
-        </p:style>
-        <p:txBody>
-          <a:bodyPr rtlCol="0" anchor="ctr"/>
-          <a:lstStyle/>
-          <a:p>
-            <a:pPr algn="ctr"/>
-            <a:endParaRPr lang="en-US"/>
-          </a:p>
-        </p:txBody>
-      </p:sp>
-      <p:sp>
-        <p:nvSpPr>
-          <p:cNvPr id="8" name="Context">
-            <a:extLst>
-              <a:ext uri="{FF2B5EF4-FFF2-40B4-BE49-F238E27FC236}">
-                <a16:creationId xmlns:a16="http://schemas.microsoft.com/office/drawing/2014/main" id="{34B70664-1EA5-3F9A-29BA-5B26464F7AB5}"/>
-              </a:ext>
-            </a:extLst>
-          </p:cNvPr>
-          <p:cNvSpPr txBox="1"/>
-          <p:nvPr/>
-        </p:nvSpPr>
-        <p:spPr>
-          <a:xfrm>
-            <a:off x="762000" y="1879600"/>
-            <a:ext cx="10668000" cy="381000"/>
-          </a:xfrm>
-          <a:prstGeom prst="rect">
-            <a:avLst/>
-          </a:prstGeom>
-          <a:noFill/>
-        </p:spPr>
-        <p:txBody>
-          <a:bodyPr vert="horz" wrap="square" rtlCol="0">
-            <a:spAutoFit/>
-          </a:bodyPr>
-          <a:lstStyle/>
-          <a:p>
-            <a:pPr>
-              <a:spcAft>
-                <a:spcPts val="200"/>
-              </a:spcAft>
-            </a:pPr>
-            <a:r>
-              <a:rPr lang="en-US">
-                <a:solidFill>
-                  <a:srgbClr val="000000"/>
-                </a:solidFill>
-                <a:latin typeface="Calibri" panose="020F0502020204030204" pitchFamily="34" charset="0"/>
-              </a:rPr>
-              <a:t>The 262 heights are converted from inches to centimeters: y = 2.54x.</a:t>
-            </a:r>
-          </a:p>
-        </p:txBody>
-      </p:sp>
-      <p:sp>
-        <p:nvSpPr>
-          <p:cNvPr id="9" name="Numbers">
-            <a:extLst>
-              <a:ext uri="{FF2B5EF4-FFF2-40B4-BE49-F238E27FC236}">
-                <a16:creationId xmlns:a16="http://schemas.microsoft.com/office/drawing/2014/main" id="{082E476E-5F90-DBB0-4134-D1B09907720F}"/>
-              </a:ext>
-            </a:extLst>
-          </p:cNvPr>
-          <p:cNvSpPr txBox="1"/>
-          <p:nvPr/>
-        </p:nvSpPr>
-        <p:spPr>
-          <a:xfrm>
-            <a:off x="762000" y="2286000"/>
-            <a:ext cx="10668000" cy="400110"/>
-          </a:xfrm>
-          <a:prstGeom prst="rect">
-            <a:avLst/>
-          </a:prstGeom>
-          <a:noFill/>
-        </p:spPr>
-        <p:txBody>
-          <a:bodyPr vert="horz" wrap="square" rtlCol="0">
-            <a:spAutoFit/>
-          </a:bodyPr>
-          <a:lstStyle/>
-          <a:p>
-            <a:pPr>
-              <a:spcAft>
-                <a:spcPts val="200"/>
-              </a:spcAft>
-            </a:pPr>
-            <a:r>
-              <a:rPr lang="en-US" sz="2000" b="1">
-                <a:solidFill>
-                  <a:srgbClr val="000000"/>
-                </a:solidFill>
-                <a:latin typeface="Calibri" panose="020F0502020204030204" pitchFamily="34" charset="0"/>
-              </a:rPr>
-              <a:t>x̄ = 65.4 in        s = 3.38 in        the 70-inch student = 177.8 cm</a:t>
-            </a:r>
-          </a:p>
-        </p:txBody>
-      </p:sp>
-      <p:sp>
-        <p:nvSpPr>
-          <p:cNvPr id="10" name="Question">
-            <a:extLst>
-              <a:ext uri="{FF2B5EF4-FFF2-40B4-BE49-F238E27FC236}">
-                <a16:creationId xmlns:a16="http://schemas.microsoft.com/office/drawing/2014/main" id="{CE21DFBB-B40F-2B69-C915-28DAB7884E8B}"/>
-              </a:ext>
-            </a:extLst>
-          </p:cNvPr>
-          <p:cNvSpPr txBox="1"/>
-          <p:nvPr/>
-        </p:nvSpPr>
-        <p:spPr>
-          <a:xfrm>
-            <a:off x="762000" y="2711510"/>
-            <a:ext cx="10668000" cy="671979"/>
-          </a:xfrm>
-          <a:prstGeom prst="rect">
-            <a:avLst/>
-          </a:prstGeom>
-          <a:noFill/>
-        </p:spPr>
-        <p:txBody>
-          <a:bodyPr vert="horz" wrap="square" rtlCol="0">
-            <a:spAutoFit/>
-          </a:bodyPr>
-          <a:lstStyle/>
-          <a:p>
-            <a:pPr>
-              <a:spcAft>
-                <a:spcPts val="200"/>
-              </a:spcAft>
-            </a:pPr>
-            <a:r>
-              <a:rPr lang="en-US" b="1">
-                <a:solidFill>
-                  <a:srgbClr val="C00000"/>
-                </a:solidFill>
-                <a:latin typeface="Calibri" panose="020F0502020204030204" pitchFamily="34" charset="0"/>
-              </a:rPr>
-              <a:t>(a)  What are the mean and standard deviation in centimeters?</a:t>
-            </a:r>
-          </a:p>
-          <a:p>
-            <a:pPr>
-              <a:spcAft>
-                <a:spcPts val="200"/>
-              </a:spcAft>
-            </a:pPr>
-            <a:r>
-              <a:rPr lang="en-US" b="1">
-                <a:solidFill>
-                  <a:srgbClr val="C00000"/>
-                </a:solidFill>
-                <a:latin typeface="Calibri" panose="020F0502020204030204" pitchFamily="34" charset="0"/>
-              </a:rPr>
-              <a:t>(b)  What is her z-score in centimeters?</a:t>
-            </a:r>
-          </a:p>
-        </p:txBody>
-      </p:sp>
-      <p:sp>
-        <p:nvSpPr>
-          <p:cNvPr id="11" name="Result">
-            <a:extLst>
-              <a:ext uri="{FF2B5EF4-FFF2-40B4-BE49-F238E27FC236}">
-                <a16:creationId xmlns:a16="http://schemas.microsoft.com/office/drawing/2014/main" id="{D6083D3B-239A-FB58-510B-6BADB10F2B9C}"/>
-              </a:ext>
-            </a:extLst>
-          </p:cNvPr>
-          <p:cNvSpPr/>
-          <p:nvPr/>
-        </p:nvSpPr>
-        <p:spPr>
-          <a:xfrm>
-            <a:off x="762000" y="3535889"/>
-            <a:ext cx="10668000" cy="784324"/>
-          </a:xfrm>
-          <a:prstGeom prst="roundRect">
-            <a:avLst>
-              <a:gd name="adj" fmla="val 4000"/>
-            </a:avLst>
-          </a:prstGeom>
-          <a:solidFill>
-            <a:srgbClr val="F2F6FC"/>
-          </a:solidFill>
-          <a:ln w="15875">
-            <a:solidFill>
-              <a:srgbClr val="4472C4"/>
-            </a:solidFill>
-          </a:ln>
-        </p:spPr>
-        <p:style>
-          <a:lnRef idx="2">
-            <a:schemeClr val="accent1">
-              <a:shade val="15000"/>
-            </a:schemeClr>
-          </a:lnRef>
-          <a:fillRef idx="1">
-            <a:schemeClr val="accent1"/>
-          </a:fillRef>
-          <a:effectRef idx="0">
-            <a:schemeClr val="accent1"/>
-          </a:effectRef>
-          <a:fontRef idx="minor">
-            <a:schemeClr val="lt1"/>
-          </a:fontRef>
-        </p:style>
-        <p:txBody>
-          <a:bodyPr wrap="square" lIns="152400" tIns="76200" rIns="152400" bIns="76200" rtlCol="0" anchor="ctr">
-            <a:spAutoFit/>
-          </a:bodyPr>
-          <a:lstStyle/>
-          <a:p>
-            <a:r>
-              <a:rPr lang="en-US" sz="2000" b="1">
-                <a:solidFill>
-                  <a:srgbClr val="C00000"/>
-                </a:solidFill>
-                <a:latin typeface="Calibri" panose="020F0502020204030204" pitchFamily="34" charset="0"/>
-              </a:rPr>
-              <a:t>(a)  ȳ = 166.1 cm,   s = 8.59 cm</a:t>
-            </a:r>
-          </a:p>
-          <a:p>
-            <a:r>
-              <a:rPr lang="en-US" sz="2000" b="1">
-                <a:solidFill>
-                  <a:srgbClr val="C00000"/>
-                </a:solidFill>
-                <a:latin typeface="Calibri" panose="020F0502020204030204" pitchFamily="34" charset="0"/>
-              </a:rPr>
-              <a:t>(b)  z = 1.36, unchanged</a:t>
-            </a:r>
-          </a:p>
-        </p:txBody>
-      </p:sp>
-    </p:spTree>
-    <p:extLst>
-      <p:ext uri="{BB962C8B-B14F-4D97-AF65-F5344CB8AC3E}">
-        <p14:creationId xmlns:p14="http://schemas.microsoft.com/office/powerpoint/2010/main" val="3758873292"/>
-      </p:ext>
-    </p:extLst>
-  </p:cSld>
-  <p:clrMapOvr>
-    <a:masterClrMapping/>
-  </p:clrMapOvr>
-  <p:timing>
-    <p:tnLst>
-      <p:par>
-        <p:cTn id="1" dur="indefinite" restart="never" nodeType="tmRoot">
-          <p:childTnLst>
-            <p:seq concurrent="1" nextAc="seek">
-              <p:cTn id="2" dur="indefinite" nodeType="mainSeq">
-                <p:childTnLst>
-                  <p:par>
-                    <p:cTn id="3" fill="hold">
-                      <p:stCondLst>
-                        <p:cond delay="indefinite"/>
-                      </p:stCondLst>
-                      <p:childTnLst>
-                        <p:par>
-                          <p:cTn id="4" fill="hold">
-                            <p:stCondLst>
-                              <p:cond delay="0"/>
-                            </p:stCondLst>
-                            <p:childTnLst>
-                              <p:par>
-                                <p:cTn id="5" presetID="1" presetClass="entr" presetSubtype="0" fill="hold" grpId="0" nodeType="clickEffect">
-                                  <p:stCondLst>
-                                    <p:cond delay="0"/>
-                                  </p:stCondLst>
-                                  <p:childTnLst>
-                                    <p:set>
-                                      <p:cBhvr>
-                                        <p:cTn id="6" dur="1" fill="hold">
-                                          <p:stCondLst>
-                                            <p:cond delay="0"/>
-                                          </p:stCondLst>
-                                        </p:cTn>
-                                        <p:tgtEl>
-                                          <p:spTgt spid="11"/>
-                                        </p:tgtEl>
-                                        <p:attrNameLst>
-                                          <p:attrName>style.visibility</p:attrName>
-                                        </p:attrNameLst>
-                                      </p:cBhvr>
-                                      <p:to>
-                                        <p:strVal val="visible"/>
-                                      </p:to>
-                                    </p:set>
-                                  </p:childTnLst>
-                                </p:cTn>
-                              </p:par>
-                            </p:childTnLst>
-                          </p:cTn>
-                        </p:par>
-                      </p:childTnLst>
-                    </p:cTn>
-                  </p:par>
-                </p:childTnLst>
-              </p:cTn>
-              <p:prevCondLst>
-                <p:cond evt="onPrev" delay="0">
-                  <p:tgtEl>
-                    <p:sldTgt/>
-                  </p:tgtEl>
-                </p:cond>
-              </p:prevCondLst>
-              <p:nextCondLst>
-                <p:cond evt="onNext" delay="0">
-                  <p:tgtEl>
-                    <p:sldTgt/>
-                  </p:tgtEl>
-                </p:cond>
-              </p:nextCondLst>
-            </p:seq>
-          </p:childTnLst>
-        </p:cTn>
-      </p:par>
-    </p:tnLst>
-    <p:bldLst>
-      <p:bldP spid="11" grpId="0" animBg="1"/>
-    </p:bldLst>
-  </p:timing>
-</p:sld>
-</file>
-
-<file path=ppt/slides/slide32.xml><?xml version="1.0" encoding="utf-8"?>
-<p:sld xmlns:a="http://schemas.openxmlformats.org/drawingml/2006/main" xmlns:r="http://schemas.openxmlformats.org/officeDocument/2006/relationships" xmlns:p="http://schemas.openxmlformats.org/presentationml/2006/main">
-  <p:cSld>
-    <p:spTree>
-      <p:nvGrpSpPr>
-        <p:cNvPr id="1" name=""/>
-        <p:cNvGrpSpPr/>
-        <p:nvPr/>
-      </p:nvGrpSpPr>
-      <p:grpSpPr>
-        <a:xfrm>
-          <a:off x="0" y="0"/>
-          <a:ext cx="0" cy="0"/>
-          <a:chOff x="0" y="0"/>
-          <a:chExt cx="0" cy="0"/>
-        </a:xfrm>
-      </p:grpSpPr>
-      <p:sp>
-        <p:nvSpPr>
-          <p:cNvPr id="2" name="Title 1">
-            <a:extLst>
-              <a:ext uri="{FF2B5EF4-FFF2-40B4-BE49-F238E27FC236}">
-                <a16:creationId xmlns:a16="http://schemas.microsoft.com/office/drawing/2014/main" id="{D1E825F3-CA5C-D321-A12F-235D7E6C102E}"/>
-              </a:ext>
-            </a:extLst>
-          </p:cNvPr>
-          <p:cNvSpPr>
-            <a:spLocks noGrp="1"/>
-          </p:cNvSpPr>
-          <p:nvPr>
-            <p:ph type="title"/>
-          </p:nvPr>
-        </p:nvSpPr>
-        <p:spPr/>
-        <p:txBody>
-          <a:bodyPr>
-            <a:noAutofit/>
-          </a:bodyPr>
-          <a:lstStyle/>
-          <a:p>
-            <a:r>
-              <a:rPr lang="en-US">
-                <a:solidFill>
-                  <a:srgbClr val="1F3864"/>
-                </a:solidFill>
-              </a:rPr>
-              <a:t>Does a z-score make data normal?</a:t>
-            </a:r>
-          </a:p>
-        </p:txBody>
-      </p:sp>
-      <p:sp>
-        <p:nvSpPr>
-          <p:cNvPr id="4" name="Slide Number Placeholder 3">
-            <a:extLst>
-              <a:ext uri="{FF2B5EF4-FFF2-40B4-BE49-F238E27FC236}">
-                <a16:creationId xmlns:a16="http://schemas.microsoft.com/office/drawing/2014/main" id="{632F5803-1B77-5AE0-EEB8-17B8E3F9722A}"/>
-              </a:ext>
-            </a:extLst>
-          </p:cNvPr>
-          <p:cNvSpPr>
-            <a:spLocks noGrp="1"/>
-          </p:cNvSpPr>
-          <p:nvPr>
-            <p:ph type="sldNum" sz="quarter" idx="12"/>
-          </p:nvPr>
-        </p:nvSpPr>
-        <p:spPr/>
-        <p:txBody>
-          <a:bodyPr/>
-          <a:lstStyle/>
-          <a:p>
-            <a:fld id="{A80A81DD-F10A-4B1C-963A-0ABBB4865886}" type="slidenum">
-              <a:rPr lang="en-US" sz="1600" smtClean="0"/>
-              <a:t>32</a:t>
-            </a:fld>
-            <a:endParaRPr lang="en-US" sz="1600"/>
-          </a:p>
-        </p:txBody>
-      </p:sp>
-      <p:sp>
-        <p:nvSpPr>
-          <p:cNvPr id="3" name="Title rule">
-            <a:extLst>
-              <a:ext uri="{FF2B5EF4-FFF2-40B4-BE49-F238E27FC236}">
-                <a16:creationId xmlns:a16="http://schemas.microsoft.com/office/drawing/2014/main" id="{784C6B91-DD86-0BA1-4A71-C454C38471E5}"/>
-              </a:ext>
-            </a:extLst>
-          </p:cNvPr>
-          <p:cNvSpPr/>
-          <p:nvPr/>
-        </p:nvSpPr>
-        <p:spPr>
-          <a:xfrm>
-            <a:off x="838200" y="1600200"/>
-            <a:ext cx="10515600" cy="38100"/>
-          </a:xfrm>
-          <a:prstGeom prst="rect">
-            <a:avLst/>
-          </a:prstGeom>
-          <a:solidFill>
-            <a:srgbClr val="4472C4"/>
-          </a:solidFill>
-          <a:ln w="12700" cap="flat" cmpd="sng" algn="ctr">
-            <a:noFill/>
-            <a:prstDash val="solid"/>
-            <a:miter lim="800000"/>
-          </a:ln>
-          <a:effectLst/>
-          <a:extLst>
-            <a:ext uri="{91240B29-F687-4F45-9708-019B960494DF}">
-              <a14:hiddenLine xmlns:a14="http://schemas.microsoft.com/office/drawing/2010/main" w="12700" cap="flat" cmpd="sng" algn="ctr">
-                <a:solidFill>
-                  <a:schemeClr val="accent1">
-                    <a:shade val="15000"/>
-                  </a:schemeClr>
-                </a:solidFill>
-                <a:prstDash val="solid"/>
-                <a:miter lim="800000"/>
-              </a14:hiddenLine>
-            </a:ext>
-          </a:extLst>
-        </p:spPr>
-        <p:style>
-          <a:lnRef idx="2">
-            <a:schemeClr val="accent1">
-              <a:shade val="15000"/>
-            </a:schemeClr>
-          </a:lnRef>
-          <a:fillRef idx="1">
-            <a:schemeClr val="accent1"/>
-          </a:fillRef>
-          <a:effectRef idx="0">
-            <a:schemeClr val="accent1"/>
-          </a:effectRef>
-          <a:fontRef idx="minor">
-            <a:schemeClr val="lt1"/>
-          </a:fontRef>
-        </p:style>
-        <p:txBody>
-          <a:bodyPr rtlCol="0" anchor="ctr"/>
-          <a:lstStyle/>
-          <a:p>
-            <a:pPr algn="ctr"/>
-            <a:endParaRPr lang="en-US"/>
-          </a:p>
-        </p:txBody>
-      </p:sp>
-      <p:pic>
-        <p:nvPicPr>
-          <p:cNvPr id="8" name="l12_skew_z.png">
-            <a:extLst>
-              <a:ext uri="{FF2B5EF4-FFF2-40B4-BE49-F238E27FC236}">
-                <a16:creationId xmlns:a16="http://schemas.microsoft.com/office/drawing/2014/main" id="{46DFDE40-9DAA-D640-9CCE-B68BB70A429D}"/>
-              </a:ext>
-            </a:extLst>
-          </p:cNvPr>
-          <p:cNvPicPr>
-            <a:picLocks/>
-          </p:cNvPicPr>
-          <p:nvPr/>
-        </p:nvPicPr>
-        <p:blipFill>
-          <a:blip r:embed="rId2">
-            <a:extLst>
-              <a:ext uri="{28A0092B-C50C-407E-A947-70E740481C1C}">
-                <a14:useLocalDpi xmlns:a14="http://schemas.microsoft.com/office/drawing/2010/main" val="0"/>
-              </a:ext>
-            </a:extLst>
-          </a:blip>
-          <a:stretch>
-            <a:fillRect/>
-          </a:stretch>
-        </p:blipFill>
-        <p:spPr>
-          <a:xfrm>
-            <a:off x="1270000" y="2336800"/>
-            <a:ext cx="9652000" cy="2730500"/>
-          </a:xfrm>
-          <a:prstGeom prst="rect">
-            <a:avLst/>
-          </a:prstGeom>
-        </p:spPr>
-      </p:pic>
-      <p:sp>
-        <p:nvSpPr>
-          <p:cNvPr id="7" name="Question">
-            <a:extLst>
-              <a:ext uri="{FF2B5EF4-FFF2-40B4-BE49-F238E27FC236}">
-                <a16:creationId xmlns:a16="http://schemas.microsoft.com/office/drawing/2014/main" id="{CC49A86E-0DAD-EFE5-DBBD-C3686D8453C4}"/>
-              </a:ext>
-            </a:extLst>
-          </p:cNvPr>
-          <p:cNvSpPr txBox="1"/>
-          <p:nvPr/>
-        </p:nvSpPr>
-        <p:spPr>
-          <a:xfrm>
-            <a:off x="762000" y="1879600"/>
-            <a:ext cx="10668000" cy="381000"/>
-          </a:xfrm>
-          <a:prstGeom prst="rect">
-            <a:avLst/>
-          </a:prstGeom>
-          <a:noFill/>
-        </p:spPr>
-        <p:txBody>
-          <a:bodyPr vert="horz" wrap="square" rtlCol="0">
-            <a:spAutoFit/>
-          </a:bodyPr>
-          <a:lstStyle/>
-          <a:p>
-            <a:pPr>
-              <a:spcAft>
-                <a:spcPts val="200"/>
-              </a:spcAft>
-            </a:pPr>
-            <a:r>
-              <a:rPr lang="en-US" b="1">
-                <a:solidFill>
-                  <a:srgbClr val="C00000"/>
-                </a:solidFill>
-                <a:latin typeface="Calibri" panose="020F0502020204030204" pitchFamily="34" charset="0"/>
-              </a:rPr>
-              <a:t>Does converting skewed data to z-scores make it normal?</a:t>
-            </a:r>
-          </a:p>
-        </p:txBody>
-      </p:sp>
-      <p:sp>
-        <p:nvSpPr>
-          <p:cNvPr id="10" name="Result">
-            <a:extLst>
-              <a:ext uri="{FF2B5EF4-FFF2-40B4-BE49-F238E27FC236}">
-                <a16:creationId xmlns:a16="http://schemas.microsoft.com/office/drawing/2014/main" id="{6E2D1D7E-DF7D-0DD8-546E-BEDAF6C19896}"/>
-              </a:ext>
-            </a:extLst>
-          </p:cNvPr>
-          <p:cNvSpPr/>
-          <p:nvPr/>
-        </p:nvSpPr>
-        <p:spPr>
-          <a:xfrm>
-            <a:off x="762000" y="5168900"/>
-            <a:ext cx="10668000" cy="470595"/>
-          </a:xfrm>
-          <a:prstGeom prst="roundRect">
-            <a:avLst>
-              <a:gd name="adj" fmla="val 4000"/>
-            </a:avLst>
-          </a:prstGeom>
-          <a:solidFill>
-            <a:srgbClr val="F2F6FC"/>
-          </a:solidFill>
-          <a:ln w="15875">
-            <a:solidFill>
-              <a:srgbClr val="4472C4"/>
-            </a:solidFill>
-          </a:ln>
-        </p:spPr>
-        <p:style>
-          <a:lnRef idx="2">
-            <a:schemeClr val="accent1">
-              <a:shade val="15000"/>
-            </a:schemeClr>
-          </a:lnRef>
-          <a:fillRef idx="1">
-            <a:schemeClr val="accent1"/>
-          </a:fillRef>
-          <a:effectRef idx="0">
-            <a:schemeClr val="accent1"/>
-          </a:effectRef>
-          <a:fontRef idx="minor">
-            <a:schemeClr val="lt1"/>
-          </a:fontRef>
-        </p:style>
-        <p:txBody>
-          <a:bodyPr wrap="square" lIns="152400" tIns="76200" rIns="152400" bIns="76200" rtlCol="0" anchor="ctr">
-            <a:spAutoFit/>
-          </a:bodyPr>
-          <a:lstStyle/>
-          <a:p>
-            <a:r>
-              <a:rPr lang="en-US" sz="2000" b="1">
-                <a:solidFill>
-                  <a:srgbClr val="C00000"/>
-                </a:solidFill>
-                <a:latin typeface="Calibri" panose="020F0502020204030204" pitchFamily="34" charset="0"/>
-              </a:rPr>
-              <a:t>No:  standardizing changes the axis, not the shape</a:t>
-            </a:r>
-          </a:p>
-        </p:txBody>
-      </p:sp>
-    </p:spTree>
-    <p:extLst>
-      <p:ext uri="{BB962C8B-B14F-4D97-AF65-F5344CB8AC3E}">
-        <p14:creationId xmlns:p14="http://schemas.microsoft.com/office/powerpoint/2010/main" val="2850716759"/>
-      </p:ext>
-    </p:extLst>
-  </p:cSld>
-  <p:clrMapOvr>
-    <a:masterClrMapping/>
-  </p:clrMapOvr>
-  <p:timing>
-    <p:tnLst>
-      <p:par>
-        <p:cTn id="1" dur="indefinite" restart="never" nodeType="tmRoot">
-          <p:childTnLst>
-            <p:seq concurrent="1" nextAc="seek">
-              <p:cTn id="2" dur="indefinite" nodeType="mainSeq">
-                <p:childTnLst>
-                  <p:par>
-                    <p:cTn id="3" fill="hold">
-                      <p:stCondLst>
-                        <p:cond delay="indefinite"/>
-                      </p:stCondLst>
-                      <p:childTnLst>
-                        <p:par>
-                          <p:cTn id="4" fill="hold">
-                            <p:stCondLst>
-                              <p:cond delay="0"/>
-                            </p:stCondLst>
-                            <p:childTnLst>
-                              <p:par>
-                                <p:cTn id="5" presetID="1" presetClass="entr" presetSubtype="0" fill="hold" grpId="0" nodeType="clickEffect">
-                                  <p:stCondLst>
-                                    <p:cond delay="0"/>
-                                  </p:stCondLst>
-                                  <p:childTnLst>
-                                    <p:set>
-                                      <p:cBhvr>
-                                        <p:cTn id="6" dur="1" fill="hold">
-                                          <p:stCondLst>
-                                            <p:cond delay="0"/>
-                                          </p:stCondLst>
-                                        </p:cTn>
-                                        <p:tgtEl>
-                                          <p:spTgt spid="10"/>
-                                        </p:tgtEl>
-                                        <p:attrNameLst>
-                                          <p:attrName>style.visibility</p:attrName>
-                                        </p:attrNameLst>
-                                      </p:cBhvr>
-                                      <p:to>
-                                        <p:strVal val="visible"/>
-                                      </p:to>
-                                    </p:set>
-                                  </p:childTnLst>
-                                </p:cTn>
-                              </p:par>
-                            </p:childTnLst>
-                          </p:cTn>
-                        </p:par>
-                      </p:childTnLst>
-                    </p:cTn>
-                  </p:par>
-                </p:childTnLst>
-              </p:cTn>
-              <p:prevCondLst>
-                <p:cond evt="onPrev" delay="0">
-                  <p:tgtEl>
-                    <p:sldTgt/>
-                  </p:tgtEl>
-                </p:cond>
-              </p:prevCondLst>
-              <p:nextCondLst>
-                <p:cond evt="onNext" delay="0">
-                  <p:tgtEl>
-                    <p:sldTgt/>
-                  </p:tgtEl>
-                </p:cond>
-              </p:nextCondLst>
-            </p:seq>
-          </p:childTnLst>
-        </p:cTn>
-      </p:par>
-    </p:tnLst>
-    <p:bldLst>
-      <p:bldP spid="10" grpId="0" animBg="1"/>
-    </p:bldLst>
-  </p:timing>
-</p:sld>
-</file>
-
-<file path=ppt/slides/slide33.xml><?xml version="1.0" encoding="utf-8"?>
-<p:sld xmlns:a="http://schemas.openxmlformats.org/drawingml/2006/main" xmlns:r="http://schemas.openxmlformats.org/officeDocument/2006/relationships" xmlns:p="http://schemas.openxmlformats.org/presentationml/2006/main">
-  <p:cSld>
-    <p:spTree>
-      <p:nvGrpSpPr>
-        <p:cNvPr id="1" name=""/>
-        <p:cNvGrpSpPr/>
-        <p:nvPr/>
-      </p:nvGrpSpPr>
-      <p:grpSpPr>
-        <a:xfrm>
-          <a:off x="0" y="0"/>
-          <a:ext cx="0" cy="0"/>
-          <a:chOff x="0" y="0"/>
-          <a:chExt cx="0" cy="0"/>
-        </a:xfrm>
-      </p:grpSpPr>
-      <p:sp>
-        <p:nvSpPr>
-          <p:cNvPr id="2" name="Title 1">
-            <a:extLst>
-              <a:ext uri="{FF2B5EF4-FFF2-40B4-BE49-F238E27FC236}">
-                <a16:creationId xmlns:a16="http://schemas.microsoft.com/office/drawing/2014/main" id="{D1E825F3-CA5C-D321-A12F-235D7E6C102E}"/>
-              </a:ext>
-            </a:extLst>
-          </p:cNvPr>
-          <p:cNvSpPr>
-            <a:spLocks noGrp="1"/>
-          </p:cNvSpPr>
-          <p:nvPr>
-            <p:ph type="title"/>
-          </p:nvPr>
-        </p:nvSpPr>
-        <p:spPr/>
-        <p:txBody>
-          <a:bodyPr>
-            <a:noAutofit/>
-          </a:bodyPr>
-          <a:lstStyle/>
-          <a:p>
-            <a:r>
-              <a:rPr lang="en-US">
-                <a:solidFill>
-                  <a:srgbClr val="1F3864"/>
-                </a:solidFill>
-              </a:rPr>
-              <a:t>Estimating a mean from a sample</a:t>
-            </a:r>
-          </a:p>
-        </p:txBody>
-      </p:sp>
-      <p:sp>
-        <p:nvSpPr>
-          <p:cNvPr id="4" name="Slide Number Placeholder 3">
-            <a:extLst>
-              <a:ext uri="{FF2B5EF4-FFF2-40B4-BE49-F238E27FC236}">
-                <a16:creationId xmlns:a16="http://schemas.microsoft.com/office/drawing/2014/main" id="{632F5803-1B77-5AE0-EEB8-17B8E3F9722A}"/>
-              </a:ext>
-            </a:extLst>
-          </p:cNvPr>
-          <p:cNvSpPr>
-            <a:spLocks noGrp="1"/>
-          </p:cNvSpPr>
-          <p:nvPr>
-            <p:ph type="sldNum" sz="quarter" idx="12"/>
-          </p:nvPr>
-        </p:nvSpPr>
-        <p:spPr/>
-        <p:txBody>
-          <a:bodyPr/>
-          <a:lstStyle/>
-          <a:p>
-            <a:fld id="{A80A81DD-F10A-4B1C-963A-0ABBB4865886}" type="slidenum">
-              <a:rPr lang="en-US" sz="1600" smtClean="0"/>
-              <a:t>33</a:t>
-            </a:fld>
-            <a:endParaRPr lang="en-US" sz="1600"/>
-          </a:p>
-        </p:txBody>
-      </p:sp>
-      <p:sp>
-        <p:nvSpPr>
-          <p:cNvPr id="3" name="Title rule">
-            <a:extLst>
-              <a:ext uri="{FF2B5EF4-FFF2-40B4-BE49-F238E27FC236}">
-                <a16:creationId xmlns:a16="http://schemas.microsoft.com/office/drawing/2014/main" id="{784C6B91-DD86-0BA1-4A71-C454C38471E5}"/>
-              </a:ext>
-            </a:extLst>
-          </p:cNvPr>
-          <p:cNvSpPr/>
-          <p:nvPr/>
-        </p:nvSpPr>
-        <p:spPr>
-          <a:xfrm>
-            <a:off x="838200" y="1600200"/>
-            <a:ext cx="10515600" cy="38100"/>
-          </a:xfrm>
-          <a:prstGeom prst="rect">
-            <a:avLst/>
-          </a:prstGeom>
-          <a:solidFill>
-            <a:srgbClr val="4472C4"/>
-          </a:solidFill>
-          <a:ln w="12700" cap="flat" cmpd="sng" algn="ctr">
-            <a:noFill/>
-            <a:prstDash val="solid"/>
-            <a:miter lim="800000"/>
-          </a:ln>
-          <a:effectLst/>
-          <a:extLst>
-            <a:ext uri="{91240B29-F687-4F45-9708-019B960494DF}">
-              <a14:hiddenLine xmlns:a14="http://schemas.microsoft.com/office/drawing/2010/main" w="12700" cap="flat" cmpd="sng" algn="ctr">
-                <a:solidFill>
-                  <a:schemeClr val="accent1">
-                    <a:shade val="15000"/>
-                  </a:schemeClr>
-                </a:solidFill>
-                <a:prstDash val="solid"/>
-                <a:miter lim="800000"/>
-              </a14:hiddenLine>
-            </a:ext>
-          </a:extLst>
-        </p:spPr>
-        <p:style>
-          <a:lnRef idx="2">
-            <a:schemeClr val="accent1">
-              <a:shade val="15000"/>
-            </a:schemeClr>
-          </a:lnRef>
-          <a:fillRef idx="1">
-            <a:schemeClr val="accent1"/>
-          </a:fillRef>
-          <a:effectRef idx="0">
-            <a:schemeClr val="accent1"/>
-          </a:effectRef>
-          <a:fontRef idx="minor">
-            <a:schemeClr val="lt1"/>
-          </a:fontRef>
-        </p:style>
-        <p:txBody>
-          <a:bodyPr rtlCol="0" anchor="ctr"/>
-          <a:lstStyle/>
-          <a:p>
-            <a:pPr algn="ctr"/>
-            <a:endParaRPr lang="en-US"/>
-          </a:p>
-        </p:txBody>
-      </p:sp>
-      <p:sp>
-        <p:nvSpPr>
-          <p:cNvPr id="7" name="Context">
-            <a:extLst>
-              <a:ext uri="{FF2B5EF4-FFF2-40B4-BE49-F238E27FC236}">
-                <a16:creationId xmlns:a16="http://schemas.microsoft.com/office/drawing/2014/main" id="{CF55BC9C-FE59-7CE1-3E3C-35668F20C89D}"/>
-              </a:ext>
-            </a:extLst>
-          </p:cNvPr>
-          <p:cNvSpPr txBox="1"/>
-          <p:nvPr/>
-        </p:nvSpPr>
-        <p:spPr>
-          <a:xfrm>
-            <a:off x="762000" y="1879600"/>
-            <a:ext cx="10668000" cy="381000"/>
-          </a:xfrm>
-          <a:prstGeom prst="rect">
-            <a:avLst/>
-          </a:prstGeom>
-          <a:noFill/>
-        </p:spPr>
-        <p:txBody>
-          <a:bodyPr vert="horz" wrap="square" rtlCol="0">
-            <a:spAutoFit/>
-          </a:bodyPr>
-          <a:lstStyle/>
-          <a:p>
-            <a:pPr>
-              <a:spcAft>
-                <a:spcPts val="200"/>
-              </a:spcAft>
-            </a:pPr>
-            <a:r>
-              <a:rPr lang="en-US">
-                <a:solidFill>
-                  <a:srgbClr val="000000"/>
-                </a:solidFill>
-                <a:latin typeface="Calibri" panose="020F0502020204030204" pitchFamily="34" charset="0"/>
-              </a:rPr>
-              <a:t>Treat the 262 women as the population, and estimate μ from a random sample of n = 20.</a:t>
-            </a:r>
-          </a:p>
-        </p:txBody>
-      </p:sp>
-      <p:sp>
-        <p:nvSpPr>
-          <p:cNvPr id="11" name="Question">
-            <a:extLst>
-              <a:ext uri="{FF2B5EF4-FFF2-40B4-BE49-F238E27FC236}">
-                <a16:creationId xmlns:a16="http://schemas.microsoft.com/office/drawing/2014/main" id="{5F652965-0C94-ADB1-E9E6-6ADE8E4A4B33}"/>
-              </a:ext>
-            </a:extLst>
-          </p:cNvPr>
-          <p:cNvSpPr txBox="1"/>
-          <p:nvPr/>
-        </p:nvSpPr>
-        <p:spPr>
-          <a:xfrm>
-            <a:off x="762000" y="2286000"/>
-            <a:ext cx="10668000" cy="381000"/>
-          </a:xfrm>
-          <a:prstGeom prst="rect">
-            <a:avLst/>
-          </a:prstGeom>
-          <a:noFill/>
-        </p:spPr>
-        <p:txBody>
-          <a:bodyPr vert="horz" wrap="square" rtlCol="0">
-            <a:spAutoFit/>
-          </a:bodyPr>
-          <a:lstStyle/>
-          <a:p>
-            <a:pPr>
-              <a:spcAft>
-                <a:spcPts val="200"/>
-              </a:spcAft>
-            </a:pPr>
-            <a:r>
-              <a:rPr lang="en-US" b="1">
-                <a:solidFill>
-                  <a:srgbClr val="C00000"/>
-                </a:solidFill>
-                <a:latin typeface="Calibri" panose="020F0502020204030204" pitchFamily="34" charset="0"/>
-              </a:rPr>
-              <a:t>Why do the two samples miss μ, and by different amounts?</a:t>
-            </a:r>
-          </a:p>
-        </p:txBody>
-      </p:sp>
-      <p:sp>
-        <p:nvSpPr>
-          <p:cNvPr id="12" name="Result">
-            <a:extLst>
-              <a:ext uri="{FF2B5EF4-FFF2-40B4-BE49-F238E27FC236}">
-                <a16:creationId xmlns:a16="http://schemas.microsoft.com/office/drawing/2014/main" id="{F1DD6977-8EFC-53AF-2BA8-8C567861A9CE}"/>
-              </a:ext>
-            </a:extLst>
-          </p:cNvPr>
-          <p:cNvSpPr/>
-          <p:nvPr/>
-        </p:nvSpPr>
-        <p:spPr>
-          <a:xfrm>
-            <a:off x="762000" y="5575300"/>
-            <a:ext cx="10668000" cy="470595"/>
-          </a:xfrm>
-          <a:prstGeom prst="roundRect">
-            <a:avLst>
-              <a:gd name="adj" fmla="val 4000"/>
-            </a:avLst>
-          </a:prstGeom>
-          <a:solidFill>
-            <a:srgbClr val="F2F6FC"/>
-          </a:solidFill>
-          <a:ln w="15875">
-            <a:solidFill>
-              <a:srgbClr val="4472C4"/>
-            </a:solidFill>
-          </a:ln>
-        </p:spPr>
-        <p:style>
-          <a:lnRef idx="2">
-            <a:schemeClr val="accent1">
-              <a:shade val="15000"/>
-            </a:schemeClr>
-          </a:lnRef>
-          <a:fillRef idx="1">
-            <a:schemeClr val="accent1"/>
-          </a:fillRef>
-          <a:effectRef idx="0">
-            <a:schemeClr val="accent1"/>
-          </a:effectRef>
-          <a:fontRef idx="minor">
-            <a:schemeClr val="lt1"/>
-          </a:fontRef>
-        </p:style>
-        <p:txBody>
-          <a:bodyPr wrap="square" lIns="152400" tIns="76200" rIns="152400" bIns="76200" rtlCol="0" anchor="ctr">
-            <a:spAutoFit/>
-          </a:bodyPr>
-          <a:lstStyle/>
-          <a:p>
-            <a:r>
-              <a:rPr lang="en-US" sz="2000" b="1">
-                <a:solidFill>
-                  <a:srgbClr val="C00000"/>
-                </a:solidFill>
-                <a:latin typeface="Calibri" panose="020F0502020204030204" pitchFamily="34" charset="0"/>
-              </a:rPr>
-              <a:t>Each sample holds different students, so each x̄ misses by a different amount: sampling error</a:t>
-            </a:r>
-          </a:p>
-        </p:txBody>
-      </p:sp>
-      <p:pic>
-        <p:nvPicPr>
-          <p:cNvPr id="6" name="l12_two_samples.png">
-            <a:extLst>
-              <a:ext uri="{FF2B5EF4-FFF2-40B4-BE49-F238E27FC236}">
-                <a16:creationId xmlns:a16="http://schemas.microsoft.com/office/drawing/2014/main" id="{4EB50207-2695-FD20-23AE-6EF422985340}"/>
-              </a:ext>
-            </a:extLst>
-          </p:cNvPr>
-          <p:cNvPicPr>
-            <a:picLocks/>
-          </p:cNvPicPr>
-          <p:nvPr/>
-        </p:nvPicPr>
-        <p:blipFill>
-          <a:blip r:embed="rId2">
-            <a:extLst>
-              <a:ext uri="{28A0092B-C50C-407E-A947-70E740481C1C}">
-                <a14:useLocalDpi xmlns:a14="http://schemas.microsoft.com/office/drawing/2010/main" val="0"/>
-              </a:ext>
-            </a:extLst>
-          </a:blip>
-          <a:stretch>
-            <a:fillRect/>
-          </a:stretch>
-        </p:blipFill>
-        <p:spPr>
-          <a:xfrm>
-            <a:off x="762000" y="2743200"/>
-            <a:ext cx="10668000" cy="2730500"/>
-          </a:xfrm>
-          <a:prstGeom prst="rect">
-            <a:avLst/>
-          </a:prstGeom>
-        </p:spPr>
-      </p:pic>
-    </p:spTree>
-    <p:extLst>
-      <p:ext uri="{BB962C8B-B14F-4D97-AF65-F5344CB8AC3E}">
-        <p14:creationId xmlns:p14="http://schemas.microsoft.com/office/powerpoint/2010/main" val="1769222168"/>
-      </p:ext>
-    </p:extLst>
-  </p:cSld>
-  <p:clrMapOvr>
-    <a:masterClrMapping/>
-  </p:clrMapOvr>
-  <p:timing>
-    <p:tnLst>
-      <p:par>
-        <p:cTn id="1" dur="indefinite" restart="never" nodeType="tmRoot">
-          <p:childTnLst>
-            <p:seq concurrent="1" nextAc="seek">
-              <p:cTn id="2" dur="indefinite" nodeType="mainSeq">
-                <p:childTnLst>
-                  <p:par>
-                    <p:cTn id="3" fill="hold">
-                      <p:stCondLst>
-                        <p:cond delay="indefinite"/>
-                      </p:stCondLst>
-                      <p:childTnLst>
-                        <p:par>
-                          <p:cTn id="4" fill="hold">
-                            <p:stCondLst>
-                              <p:cond delay="0"/>
-                            </p:stCondLst>
-                            <p:childTnLst>
-                              <p:par>
-                                <p:cTn id="5" presetID="1" presetClass="entr" presetSubtype="0" fill="hold" grpId="0" nodeType="clickEffect">
-                                  <p:stCondLst>
-                                    <p:cond delay="0"/>
-                                  </p:stCondLst>
-                                  <p:childTnLst>
-                                    <p:set>
-                                      <p:cBhvr>
-                                        <p:cTn id="6" dur="1" fill="hold">
-                                          <p:stCondLst>
-                                            <p:cond delay="0"/>
-                                          </p:stCondLst>
-                                        </p:cTn>
-                                        <p:tgtEl>
-                                          <p:spTgt spid="12"/>
-                                        </p:tgtEl>
-                                        <p:attrNameLst>
-                                          <p:attrName>style.visibility</p:attrName>
-                                        </p:attrNameLst>
-                                      </p:cBhvr>
-                                      <p:to>
-                                        <p:strVal val="visible"/>
-                                      </p:to>
-                                    </p:set>
-                                  </p:childTnLst>
-                                </p:cTn>
-                              </p:par>
-                            </p:childTnLst>
-                          </p:cTn>
-                        </p:par>
-                      </p:childTnLst>
-                    </p:cTn>
-                  </p:par>
-                </p:childTnLst>
-              </p:cTn>
-              <p:prevCondLst>
-                <p:cond evt="onPrev" delay="0">
-                  <p:tgtEl>
-                    <p:sldTgt/>
-                  </p:tgtEl>
-                </p:cond>
-              </p:prevCondLst>
-              <p:nextCondLst>
-                <p:cond evt="onNext" delay="0">
-                  <p:tgtEl>
-                    <p:sldTgt/>
-                  </p:tgtEl>
-                </p:cond>
-              </p:nextCondLst>
-            </p:seq>
-          </p:childTnLst>
-        </p:cTn>
-      </p:par>
-    </p:tnLst>
-    <p:bldLst>
-      <p:bldP spid="12" grpId="0" animBg="1"/>
-    </p:bldLst>
-  </p:timing>
-</p:sld>
-</file>
-
-<file path=ppt/slides/slide34.xml><?xml version="1.0" encoding="utf-8"?>
-<p:sld xmlns:a="http://schemas.openxmlformats.org/drawingml/2006/main" xmlns:r="http://schemas.openxmlformats.org/officeDocument/2006/relationships" xmlns:p="http://schemas.openxmlformats.org/presentationml/2006/main">
-  <p:cSld>
-    <p:spTree>
-      <p:nvGrpSpPr>
-        <p:cNvPr id="1" name=""/>
-        <p:cNvGrpSpPr/>
-        <p:nvPr/>
-      </p:nvGrpSpPr>
-      <p:grpSpPr>
-        <a:xfrm>
-          <a:off x="0" y="0"/>
-          <a:ext cx="0" cy="0"/>
-          <a:chOff x="0" y="0"/>
-          <a:chExt cx="0" cy="0"/>
-        </a:xfrm>
-      </p:grpSpPr>
-      <p:sp>
-        <p:nvSpPr>
-          <p:cNvPr id="2" name="Title 1">
-            <a:extLst>
-              <a:ext uri="{FF2B5EF4-FFF2-40B4-BE49-F238E27FC236}">
-                <a16:creationId xmlns:a16="http://schemas.microsoft.com/office/drawing/2014/main" id="{D1E825F3-CA5C-D321-A12F-235D7E6C102E}"/>
-              </a:ext>
-            </a:extLst>
-          </p:cNvPr>
-          <p:cNvSpPr>
-            <a:spLocks noGrp="1"/>
-          </p:cNvSpPr>
-          <p:nvPr>
-            <p:ph type="title"/>
-          </p:nvPr>
-        </p:nvSpPr>
-        <p:spPr/>
-        <p:txBody>
-          <a:bodyPr>
-            <a:noAutofit/>
-          </a:bodyPr>
-          <a:lstStyle/>
-          <a:p>
-            <a:r>
-              <a:rPr lang="en-US">
-                <a:solidFill>
-                  <a:srgbClr val="1F3864"/>
-                </a:solidFill>
-              </a:rPr>
-              <a:t>Sampling distributions</a:t>
-            </a:r>
-          </a:p>
-        </p:txBody>
-      </p:sp>
-      <p:sp>
-        <p:nvSpPr>
-          <p:cNvPr id="4" name="Slide Number Placeholder 3">
-            <a:extLst>
-              <a:ext uri="{FF2B5EF4-FFF2-40B4-BE49-F238E27FC236}">
-                <a16:creationId xmlns:a16="http://schemas.microsoft.com/office/drawing/2014/main" id="{632F5803-1B77-5AE0-EEB8-17B8E3F9722A}"/>
-              </a:ext>
-            </a:extLst>
-          </p:cNvPr>
-          <p:cNvSpPr>
-            <a:spLocks noGrp="1"/>
-          </p:cNvSpPr>
-          <p:nvPr>
-            <p:ph type="sldNum" sz="quarter" idx="12"/>
-          </p:nvPr>
-        </p:nvSpPr>
-        <p:spPr/>
-        <p:txBody>
-          <a:bodyPr/>
-          <a:lstStyle/>
-          <a:p>
-            <a:fld id="{A80A81DD-F10A-4B1C-963A-0ABBB4865886}" type="slidenum">
-              <a:rPr lang="en-US" sz="1600" smtClean="0"/>
-              <a:t>34</a:t>
-            </a:fld>
-            <a:endParaRPr lang="en-US" sz="1600"/>
-          </a:p>
-        </p:txBody>
-      </p:sp>
-      <p:sp>
-        <p:nvSpPr>
-          <p:cNvPr id="5" name="TextBox 4">
-            <a:extLst>
-              <a:ext uri="{FF2B5EF4-FFF2-40B4-BE49-F238E27FC236}">
-                <a16:creationId xmlns:a16="http://schemas.microsoft.com/office/drawing/2014/main" id="{F2C3E119-33DB-B84A-C9CB-1DA41099D1A1}"/>
-              </a:ext>
-            </a:extLst>
-          </p:cNvPr>
-          <p:cNvSpPr txBox="1"/>
-          <p:nvPr/>
-        </p:nvSpPr>
-        <p:spPr>
-          <a:xfrm>
-            <a:off x="762000" y="1841500"/>
-            <a:ext cx="3175000" cy="345440"/>
-          </a:xfrm>
-          <a:prstGeom prst="rect">
-            <a:avLst/>
-          </a:prstGeom>
-          <a:noFill/>
-        </p:spPr>
-        <p:txBody>
-          <a:bodyPr vert="horz" wrap="square" rtlCol="0">
-            <a:spAutoFit/>
-          </a:bodyPr>
-          <a:lstStyle/>
-          <a:p>
-            <a:r>
-              <a:rPr lang="en-US" sz="1600" b="1">
-                <a:solidFill>
-                  <a:srgbClr val="C00000"/>
-                </a:solidFill>
-              </a:rPr>
-              <a:t>sampling distribution</a:t>
-            </a:r>
-          </a:p>
-        </p:txBody>
-      </p:sp>
-      <p:sp>
-        <p:nvSpPr>
-          <p:cNvPr id="6" name="TextBox 5">
-            <a:extLst>
-              <a:ext uri="{FF2B5EF4-FFF2-40B4-BE49-F238E27FC236}">
-                <a16:creationId xmlns:a16="http://schemas.microsoft.com/office/drawing/2014/main" id="{377D380C-8635-8A53-300D-33D0068157E3}"/>
-              </a:ext>
-            </a:extLst>
-          </p:cNvPr>
-          <p:cNvSpPr txBox="1"/>
-          <p:nvPr/>
-        </p:nvSpPr>
-        <p:spPr>
-          <a:xfrm>
-            <a:off x="4038600" y="1841499"/>
-            <a:ext cx="7391400" cy="338554"/>
-          </a:xfrm>
-          <a:prstGeom prst="rect">
-            <a:avLst/>
-          </a:prstGeom>
-          <a:noFill/>
-        </p:spPr>
-        <p:txBody>
-          <a:bodyPr vert="horz" wrap="square" rtlCol="0">
-            <a:spAutoFit/>
-          </a:bodyPr>
-          <a:lstStyle/>
-          <a:p>
-            <a:r>
-              <a:rPr lang="en-US" sz="1600">
-                <a:solidFill>
-                  <a:srgbClr val="000000"/>
-                </a:solidFill>
-              </a:rPr>
-              <a:t>the distribution of a statistic, such as x̄, over all possible samples of the same size n</a:t>
-            </a:r>
-            <a:endParaRPr lang="en-US" sz="1600" i="1">
-              <a:solidFill>
-                <a:srgbClr val="595959"/>
-              </a:solidFill>
-            </a:endParaRPr>
-          </a:p>
-        </p:txBody>
-      </p:sp>
-      <p:sp>
-        <p:nvSpPr>
-          <p:cNvPr id="3" name="Title rule">
-            <a:extLst>
-              <a:ext uri="{FF2B5EF4-FFF2-40B4-BE49-F238E27FC236}">
-                <a16:creationId xmlns:a16="http://schemas.microsoft.com/office/drawing/2014/main" id="{784C6B91-DD86-0BA1-4A71-C454C38471E5}"/>
-              </a:ext>
-            </a:extLst>
-          </p:cNvPr>
-          <p:cNvSpPr/>
-          <p:nvPr/>
-        </p:nvSpPr>
-        <p:spPr>
-          <a:xfrm>
-            <a:off x="838200" y="1600200"/>
-            <a:ext cx="10515600" cy="38100"/>
-          </a:xfrm>
-          <a:prstGeom prst="rect">
-            <a:avLst/>
-          </a:prstGeom>
-          <a:solidFill>
-            <a:srgbClr val="4472C4"/>
-          </a:solidFill>
-          <a:ln w="12700" cap="flat" cmpd="sng" algn="ctr">
-            <a:noFill/>
-            <a:prstDash val="solid"/>
-            <a:miter lim="800000"/>
-          </a:ln>
-          <a:effectLst/>
-          <a:extLst>
-            <a:ext uri="{91240B29-F687-4F45-9708-019B960494DF}">
-              <a14:hiddenLine xmlns:a14="http://schemas.microsoft.com/office/drawing/2010/main" w="12700" cap="flat" cmpd="sng" algn="ctr">
-                <a:solidFill>
-                  <a:schemeClr val="accent1">
-                    <a:shade val="15000"/>
-                  </a:schemeClr>
-                </a:solidFill>
-                <a:prstDash val="solid"/>
-                <a:miter lim="800000"/>
-              </a14:hiddenLine>
-            </a:ext>
-          </a:extLst>
-        </p:spPr>
-        <p:style>
-          <a:lnRef idx="2">
-            <a:schemeClr val="accent1">
-              <a:shade val="15000"/>
-            </a:schemeClr>
-          </a:lnRef>
-          <a:fillRef idx="1">
-            <a:schemeClr val="accent1"/>
-          </a:fillRef>
-          <a:effectRef idx="0">
-            <a:schemeClr val="accent1"/>
-          </a:effectRef>
-          <a:fontRef idx="minor">
-            <a:schemeClr val="lt1"/>
-          </a:fontRef>
-        </p:style>
-        <p:txBody>
-          <a:bodyPr rtlCol="0" anchor="ctr"/>
-          <a:lstStyle/>
-          <a:p>
-            <a:pPr algn="ctr"/>
-            <a:endParaRPr lang="en-US"/>
-          </a:p>
-        </p:txBody>
-      </p:sp>
-      <p:pic>
-        <p:nvPicPr>
-          <p:cNvPr id="9" name="l12_sampling_dist.png">
-            <a:extLst>
-              <a:ext uri="{FF2B5EF4-FFF2-40B4-BE49-F238E27FC236}">
-                <a16:creationId xmlns:a16="http://schemas.microsoft.com/office/drawing/2014/main" id="{D6AC0ECA-6115-5757-25C7-BF69B372A39D}"/>
-              </a:ext>
-            </a:extLst>
-          </p:cNvPr>
-          <p:cNvPicPr>
-            <a:picLocks/>
-          </p:cNvPicPr>
-          <p:nvPr/>
-        </p:nvPicPr>
-        <p:blipFill>
-          <a:blip r:embed="rId2">
-            <a:extLst>
-              <a:ext uri="{28A0092B-C50C-407E-A947-70E740481C1C}">
-                <a14:useLocalDpi xmlns:a14="http://schemas.microsoft.com/office/drawing/2010/main" val="0"/>
-              </a:ext>
-            </a:extLst>
-          </a:blip>
-          <a:stretch>
-            <a:fillRect/>
-          </a:stretch>
-        </p:blipFill>
-        <p:spPr>
-          <a:xfrm>
-            <a:off x="762000" y="2489200"/>
-            <a:ext cx="10668000" cy="2603500"/>
-          </a:xfrm>
-          <a:prstGeom prst="rect">
-            <a:avLst/>
-          </a:prstGeom>
-        </p:spPr>
-      </p:pic>
-      <p:sp>
-        <p:nvSpPr>
-          <p:cNvPr id="7" name="Result">
-            <a:extLst>
-              <a:ext uri="{FF2B5EF4-FFF2-40B4-BE49-F238E27FC236}">
-                <a16:creationId xmlns:a16="http://schemas.microsoft.com/office/drawing/2014/main" id="{572E4A4A-3BD5-CF24-E6F1-9A1E4EB1A29A}"/>
-              </a:ext>
-            </a:extLst>
-          </p:cNvPr>
-          <p:cNvSpPr/>
-          <p:nvPr/>
-        </p:nvSpPr>
-        <p:spPr>
-          <a:xfrm>
-            <a:off x="762000" y="5335478"/>
-            <a:ext cx="10668000" cy="752951"/>
-          </a:xfrm>
-          <a:prstGeom prst="roundRect">
-            <a:avLst>
-              <a:gd name="adj" fmla="val 4000"/>
-            </a:avLst>
-          </a:prstGeom>
-          <a:solidFill>
-            <a:srgbClr val="F2F6FC"/>
-          </a:solidFill>
-          <a:ln w="15875">
-            <a:solidFill>
-              <a:srgbClr val="4472C4"/>
-            </a:solidFill>
-          </a:ln>
-        </p:spPr>
-        <p:style>
-          <a:lnRef idx="2">
-            <a:schemeClr val="accent1">
-              <a:shade val="15000"/>
-            </a:schemeClr>
-          </a:lnRef>
-          <a:fillRef idx="1">
-            <a:schemeClr val="accent1"/>
-          </a:fillRef>
-          <a:effectRef idx="0">
-            <a:schemeClr val="accent1"/>
-          </a:effectRef>
-          <a:fontRef idx="minor">
-            <a:schemeClr val="lt1"/>
-          </a:fontRef>
-        </p:style>
-        <p:txBody>
-          <a:bodyPr wrap="square" lIns="152400" tIns="76200" rIns="152400" bIns="76200" rtlCol="0" anchor="ctr">
-            <a:spAutoFit/>
-          </a:bodyPr>
-          <a:lstStyle/>
-          <a:p>
-            <a:r>
-              <a:rPr lang="en-US" sz="2000" b="1">
-                <a:solidFill>
-                  <a:srgbClr val="C00000"/>
-                </a:solidFill>
-                <a:latin typeface="Calibri" panose="020F0502020204030204" pitchFamily="34" charset="0"/>
-              </a:rPr>
-              <a:t>You've seen these before:</a:t>
-            </a:r>
-          </a:p>
-          <a:p>
-            <a:r>
-              <a:rPr lang="en-US" b="1">
-                <a:solidFill>
-                  <a:srgbClr val="C00000"/>
-                </a:solidFill>
-                <a:latin typeface="Calibri" panose="020F0502020204030204" pitchFamily="34" charset="0"/>
-              </a:rPr>
-              <a:t>SE = s / √n (Week 3) is its spread; the Rec Center histograms (Week 4) were sampling distributions</a:t>
-            </a:r>
-          </a:p>
-        </p:txBody>
-      </p:sp>
-    </p:spTree>
-    <p:extLst>
-      <p:ext uri="{BB962C8B-B14F-4D97-AF65-F5344CB8AC3E}">
-        <p14:creationId xmlns:p14="http://schemas.microsoft.com/office/powerpoint/2010/main" val="2813056894"/>
-      </p:ext>
-    </p:extLst>
-  </p:cSld>
-  <p:clrMapOvr>
-    <a:masterClrMapping/>
-  </p:clrMapOvr>
-  <p:timing>
-    <p:tnLst>
-      <p:par>
-        <p:cTn id="1" dur="indefinite" restart="never" nodeType="tmRoot">
-          <p:childTnLst>
-            <p:seq concurrent="1" nextAc="seek">
-              <p:cTn id="2" dur="indefinite" nodeType="mainSeq">
-                <p:childTnLst>
-                  <p:par>
-                    <p:cTn id="3" fill="hold">
-                      <p:stCondLst>
-                        <p:cond delay="indefinite"/>
-                      </p:stCondLst>
-                      <p:childTnLst>
-                        <p:par>
-                          <p:cTn id="4" fill="hold">
-                            <p:stCondLst>
-                              <p:cond delay="0"/>
-                            </p:stCondLst>
-                            <p:childTnLst>
-                              <p:par>
-                                <p:cTn id="5" presetID="34" presetClass="entr" presetSubtype="0" fill="hold" grpId="0" nodeType="clickEffect">
-                                  <p:stCondLst>
-                                    <p:cond delay="0"/>
-                                  </p:stCondLst>
-                                  <p:childTnLst>
-                                    <p:set>
-                                      <p:cBhvr>
-                                        <p:cTn id="6" dur="1" fill="hold">
-                                          <p:stCondLst>
-                                            <p:cond delay="0"/>
-                                          </p:stCondLst>
-                                        </p:cTn>
-                                        <p:tgtEl>
-                                          <p:spTgt spid="6"/>
-                                        </p:tgtEl>
-                                        <p:attrNameLst>
-                                          <p:attrName>style.visibility</p:attrName>
-                                        </p:attrNameLst>
-                                      </p:cBhvr>
-                                      <p:to>
-                                        <p:strVal val="visible"/>
-                                      </p:to>
-                                    </p:set>
-                                    <p:anim from="(-#ppt_w/2)" to="(#ppt_x)" calcmode="lin" valueType="num">
-                                      <p:cBhvr>
-                                        <p:cTn id="7" dur="600" fill="hold">
-                                          <p:stCondLst>
-                                            <p:cond delay="0"/>
-                                          </p:stCondLst>
-                                        </p:cTn>
-                                        <p:tgtEl>
-                                          <p:spTgt spid="6"/>
-                                        </p:tgtEl>
-                                        <p:attrNameLst>
-                                          <p:attrName>ppt_x</p:attrName>
-                                        </p:attrNameLst>
-                                      </p:cBhvr>
-                                    </p:anim>
-                                    <p:anim from="0" to="-1.0" calcmode="lin" valueType="num">
-                                      <p:cBhvr>
-                                        <p:cTn id="8" dur="200" decel="50000" autoRev="1" fill="hold">
-                                          <p:stCondLst>
-                                            <p:cond delay="600"/>
-                                          </p:stCondLst>
-                                        </p:cTn>
-                                        <p:tgtEl>
-                                          <p:spTgt spid="6"/>
-                                        </p:tgtEl>
-                                        <p:attrNameLst>
-                                          <p:attrName>xshear</p:attrName>
-                                        </p:attrNameLst>
-                                      </p:cBhvr>
-                                    </p:anim>
-                                    <p:animScale>
-                                      <p:cBhvr>
-                                        <p:cTn id="9" dur="200" decel="100000" autoRev="1" fill="hold">
-                                          <p:stCondLst>
-                                            <p:cond delay="600"/>
-                                          </p:stCondLst>
-                                        </p:cTn>
-                                        <p:tgtEl>
-                                          <p:spTgt spid="6"/>
-                                        </p:tgtEl>
-                                      </p:cBhvr>
-                                      <p:from x="100000" y="100000"/>
-                                      <p:to x="80000" y="100000"/>
-                                    </p:animScale>
-                                    <p:anim by="(#ppt_h/3+#ppt_w*0.1)" calcmode="lin" valueType="num">
-                                      <p:cBhvr additive="sum">
-                                        <p:cTn id="10" dur="200" decel="100000" autoRev="1" fill="hold">
-                                          <p:stCondLst>
-                                            <p:cond delay="600"/>
-                                          </p:stCondLst>
-                                        </p:cTn>
-                                        <p:tgtEl>
-                                          <p:spTgt spid="6"/>
-                                        </p:tgtEl>
-                                        <p:attrNameLst>
-                                          <p:attrName>ppt_x</p:attrName>
-                                        </p:attrNameLst>
-                                      </p:cBhvr>
-                                    </p:anim>
-                                  </p:childTnLst>
-                                </p:cTn>
-                              </p:par>
-                            </p:childTnLst>
-                          </p:cTn>
-                        </p:par>
-                      </p:childTnLst>
-                    </p:cTn>
-                  </p:par>
-                  <p:par>
-                    <p:cTn id="11" fill="hold">
-                      <p:stCondLst>
-                        <p:cond delay="indefinite"/>
-                      </p:stCondLst>
-                      <p:childTnLst>
-                        <p:par>
-                          <p:cTn id="12" fill="hold">
-                            <p:stCondLst>
-                              <p:cond delay="0"/>
-                            </p:stCondLst>
-                            <p:childTnLst>
-                              <p:par>
-                                <p:cTn id="13" presetID="1" presetClass="entr" presetSubtype="0" fill="hold" grpId="0" nodeType="clickEffect">
-                                  <p:stCondLst>
-                                    <p:cond delay="0"/>
-                                  </p:stCondLst>
-                                  <p:childTnLst>
-                                    <p:set>
-                                      <p:cBhvr>
-                                        <p:cTn id="14" dur="1" fill="hold">
-                                          <p:stCondLst>
-                                            <p:cond delay="0"/>
-                                          </p:stCondLst>
-                                        </p:cTn>
-                                        <p:tgtEl>
-                                          <p:spTgt spid="7"/>
-                                        </p:tgtEl>
-                                        <p:attrNameLst>
-                                          <p:attrName>style.visibility</p:attrName>
-                                        </p:attrNameLst>
-                                      </p:cBhvr>
-                                      <p:to>
-                                        <p:strVal val="visible"/>
-                                      </p:to>
-                                    </p:set>
-                                  </p:childTnLst>
-                                </p:cTn>
-                              </p:par>
-                            </p:childTnLst>
-                          </p:cTn>
-                        </p:par>
-                      </p:childTnLst>
-                    </p:cTn>
-                  </p:par>
-                </p:childTnLst>
-              </p:cTn>
-              <p:prevCondLst>
-                <p:cond evt="onPrev" delay="0">
-                  <p:tgtEl>
-                    <p:sldTgt/>
-                  </p:tgtEl>
-                </p:cond>
-              </p:prevCondLst>
-              <p:nextCondLst>
-                <p:cond evt="onNext" delay="0">
-                  <p:tgtEl>
-                    <p:sldTgt/>
-                  </p:tgtEl>
-                </p:cond>
-              </p:nextCondLst>
-            </p:seq>
-          </p:childTnLst>
-        </p:cTn>
-      </p:par>
-    </p:tnLst>
-    <p:bldLst>
-      <p:bldP spid="6" grpId="0"/>
-      <p:bldP spid="7" grpId="0" animBg="1"/>
-    </p:bldLst>
-  </p:timing>
-</p:sld>
-</file>
-
-<file path=ppt/slides/slide35.xml><?xml version="1.0" encoding="utf-8"?>
-<p:sld xmlns:a="http://schemas.openxmlformats.org/drawingml/2006/main" xmlns:r="http://schemas.openxmlformats.org/officeDocument/2006/relationships" xmlns:p="http://schemas.openxmlformats.org/presentationml/2006/main">
-  <p:cSld>
-    <p:spTree>
-      <p:nvGrpSpPr>
-        <p:cNvPr id="1" name=""/>
-        <p:cNvGrpSpPr/>
-        <p:nvPr/>
-      </p:nvGrpSpPr>
-      <p:grpSpPr>
-        <a:xfrm>
-          <a:off x="0" y="0"/>
-          <a:ext cx="0" cy="0"/>
-          <a:chOff x="0" y="0"/>
-          <a:chExt cx="0" cy="0"/>
-        </a:xfrm>
-      </p:grpSpPr>
-      <p:sp>
-        <p:nvSpPr>
-          <p:cNvPr id="2" name="Title 1">
-            <a:extLst>
-              <a:ext uri="{FF2B5EF4-FFF2-40B4-BE49-F238E27FC236}">
-                <a16:creationId xmlns:a16="http://schemas.microsoft.com/office/drawing/2014/main" id="{D1E825F3-CA5C-D321-A12F-235D7E6C102E}"/>
-              </a:ext>
-            </a:extLst>
-          </p:cNvPr>
-          <p:cNvSpPr>
-            <a:spLocks noGrp="1"/>
-          </p:cNvSpPr>
-          <p:nvPr>
-            <p:ph type="title"/>
-          </p:nvPr>
-        </p:nvSpPr>
-        <p:spPr/>
-        <p:txBody>
-          <a:bodyPr>
-            <a:noAutofit/>
-          </a:bodyPr>
-          <a:lstStyle/>
-          <a:p>
-            <a:r>
-              <a:rPr lang="en-US">
-                <a:solidFill>
-                  <a:srgbClr val="1F3864"/>
-                </a:solidFill>
-              </a:rPr>
-              <a:t>Margin of error</a:t>
-            </a:r>
-          </a:p>
-        </p:txBody>
-      </p:sp>
-      <p:sp>
-        <p:nvSpPr>
-          <p:cNvPr id="4" name="Slide Number Placeholder 3">
-            <a:extLst>
-              <a:ext uri="{FF2B5EF4-FFF2-40B4-BE49-F238E27FC236}">
-                <a16:creationId xmlns:a16="http://schemas.microsoft.com/office/drawing/2014/main" id="{632F5803-1B77-5AE0-EEB8-17B8E3F9722A}"/>
-              </a:ext>
-            </a:extLst>
-          </p:cNvPr>
-          <p:cNvSpPr>
-            <a:spLocks noGrp="1"/>
-          </p:cNvSpPr>
-          <p:nvPr>
-            <p:ph type="sldNum" sz="quarter" idx="12"/>
-          </p:nvPr>
-        </p:nvSpPr>
-        <p:spPr/>
-        <p:txBody>
-          <a:bodyPr/>
-          <a:lstStyle/>
-          <a:p>
-            <a:fld id="{A80A81DD-F10A-4B1C-963A-0ABBB4865886}" type="slidenum">
-              <a:rPr lang="en-US" sz="1600" smtClean="0"/>
-              <a:t>35</a:t>
-            </a:fld>
-            <a:endParaRPr lang="en-US" sz="1600"/>
-          </a:p>
-        </p:txBody>
-      </p:sp>
-      <p:sp>
-        <p:nvSpPr>
-          <p:cNvPr id="5" name="TextBox 4">
-            <a:extLst>
-              <a:ext uri="{FF2B5EF4-FFF2-40B4-BE49-F238E27FC236}">
-                <a16:creationId xmlns:a16="http://schemas.microsoft.com/office/drawing/2014/main" id="{F2C3E119-33DB-B84A-C9CB-1DA41099D1A1}"/>
-              </a:ext>
-            </a:extLst>
-          </p:cNvPr>
-          <p:cNvSpPr txBox="1"/>
-          <p:nvPr/>
-        </p:nvSpPr>
-        <p:spPr>
-          <a:xfrm>
-            <a:off x="762000" y="1841500"/>
-            <a:ext cx="3175000" cy="345440"/>
-          </a:xfrm>
-          <a:prstGeom prst="rect">
-            <a:avLst/>
-          </a:prstGeom>
-          <a:noFill/>
-        </p:spPr>
-        <p:txBody>
-          <a:bodyPr vert="horz" wrap="square" rtlCol="0">
-            <a:spAutoFit/>
-          </a:bodyPr>
-          <a:lstStyle/>
-          <a:p>
-            <a:r>
-              <a:rPr lang="en-US" sz="1600" b="1">
-                <a:solidFill>
-                  <a:srgbClr val="C00000"/>
-                </a:solidFill>
-              </a:rPr>
-              <a:t>margin of error</a:t>
-            </a:r>
-          </a:p>
-        </p:txBody>
-      </p:sp>
-      <p:sp>
-        <p:nvSpPr>
-          <p:cNvPr id="6" name="TextBox 5">
-            <a:extLst>
-              <a:ext uri="{FF2B5EF4-FFF2-40B4-BE49-F238E27FC236}">
-                <a16:creationId xmlns:a16="http://schemas.microsoft.com/office/drawing/2014/main" id="{377D380C-8635-8A53-300D-33D0068157E3}"/>
-              </a:ext>
-            </a:extLst>
-          </p:cNvPr>
-          <p:cNvSpPr txBox="1"/>
-          <p:nvPr/>
-        </p:nvSpPr>
-        <p:spPr>
-          <a:xfrm>
-            <a:off x="4038600" y="1841499"/>
-            <a:ext cx="7391400" cy="584775"/>
-          </a:xfrm>
-          <a:prstGeom prst="rect">
-            <a:avLst/>
-          </a:prstGeom>
-          <a:noFill/>
-        </p:spPr>
-        <p:txBody>
-          <a:bodyPr vert="horz" wrap="square" rtlCol="0">
-            <a:spAutoFit/>
-          </a:bodyPr>
-          <a:lstStyle/>
-          <a:p>
-            <a:r>
-              <a:rPr lang="en-US" sz="1600">
-                <a:solidFill>
-                  <a:srgbClr val="000000"/>
-                </a:solidFill>
-              </a:rPr>
-              <a:t>how far we expect an estimate to fall from the parameter: the largest distance to an estimate that is not an outlier, 2 × SE</a:t>
-            </a:r>
-            <a:endParaRPr lang="en-US" sz="1600" i="1">
-              <a:solidFill>
-                <a:srgbClr val="595959"/>
-              </a:solidFill>
-            </a:endParaRPr>
-          </a:p>
-        </p:txBody>
-      </p:sp>
-      <p:sp>
-        <p:nvSpPr>
-          <p:cNvPr id="3" name="Title rule">
-            <a:extLst>
-              <a:ext uri="{FF2B5EF4-FFF2-40B4-BE49-F238E27FC236}">
-                <a16:creationId xmlns:a16="http://schemas.microsoft.com/office/drawing/2014/main" id="{784C6B91-DD86-0BA1-4A71-C454C38471E5}"/>
-              </a:ext>
-            </a:extLst>
-          </p:cNvPr>
-          <p:cNvSpPr/>
-          <p:nvPr/>
-        </p:nvSpPr>
-        <p:spPr>
-          <a:xfrm>
-            <a:off x="838200" y="1600200"/>
-            <a:ext cx="10515600" cy="38100"/>
-          </a:xfrm>
-          <a:prstGeom prst="rect">
-            <a:avLst/>
-          </a:prstGeom>
-          <a:solidFill>
-            <a:srgbClr val="4472C4"/>
-          </a:solidFill>
-          <a:ln w="12700" cap="flat" cmpd="sng" algn="ctr">
-            <a:noFill/>
-            <a:prstDash val="solid"/>
-            <a:miter lim="800000"/>
-          </a:ln>
-          <a:effectLst/>
-          <a:extLst>
-            <a:ext uri="{91240B29-F687-4F45-9708-019B960494DF}">
-              <a14:hiddenLine xmlns:a14="http://schemas.microsoft.com/office/drawing/2010/main" w="12700" cap="flat" cmpd="sng" algn="ctr">
-                <a:solidFill>
-                  <a:schemeClr val="accent1">
-                    <a:shade val="15000"/>
-                  </a:schemeClr>
-                </a:solidFill>
-                <a:prstDash val="solid"/>
-                <a:miter lim="800000"/>
-              </a14:hiddenLine>
-            </a:ext>
-          </a:extLst>
-        </p:spPr>
-        <p:style>
-          <a:lnRef idx="2">
-            <a:schemeClr val="accent1">
-              <a:shade val="15000"/>
-            </a:schemeClr>
-          </a:lnRef>
-          <a:fillRef idx="1">
-            <a:schemeClr val="accent1"/>
-          </a:fillRef>
-          <a:effectRef idx="0">
-            <a:schemeClr val="accent1"/>
-          </a:effectRef>
-          <a:fontRef idx="minor">
-            <a:schemeClr val="lt1"/>
-          </a:fontRef>
-        </p:style>
-        <p:txBody>
-          <a:bodyPr rtlCol="0" anchor="ctr"/>
-          <a:lstStyle/>
-          <a:p>
-            <a:pPr algn="ctr"/>
-            <a:endParaRPr lang="en-US"/>
-          </a:p>
-        </p:txBody>
-      </p:sp>
-      <p:pic>
-        <p:nvPicPr>
-          <p:cNvPr id="9" name="l12_moe.png">
-            <a:extLst>
-              <a:ext uri="{FF2B5EF4-FFF2-40B4-BE49-F238E27FC236}">
-                <a16:creationId xmlns:a16="http://schemas.microsoft.com/office/drawing/2014/main" id="{7FFAC06D-4D2C-1C02-595E-0BBEA7473510}"/>
-              </a:ext>
-            </a:extLst>
-          </p:cNvPr>
-          <p:cNvPicPr>
-            <a:picLocks/>
-          </p:cNvPicPr>
-          <p:nvPr/>
-        </p:nvPicPr>
-        <p:blipFill>
-          <a:blip r:embed="rId2">
-            <a:extLst>
-              <a:ext uri="{28A0092B-C50C-407E-A947-70E740481C1C}">
-                <a14:useLocalDpi xmlns:a14="http://schemas.microsoft.com/office/drawing/2010/main" val="0"/>
-              </a:ext>
-            </a:extLst>
-          </a:blip>
-          <a:stretch>
-            <a:fillRect/>
-          </a:stretch>
-        </p:blipFill>
-        <p:spPr>
-          <a:xfrm>
-            <a:off x="762000" y="2717800"/>
-            <a:ext cx="10668000" cy="2730500"/>
-          </a:xfrm>
-          <a:prstGeom prst="rect">
-            <a:avLst/>
-          </a:prstGeom>
-        </p:spPr>
-      </p:pic>
-    </p:spTree>
-    <p:extLst>
-      <p:ext uri="{BB962C8B-B14F-4D97-AF65-F5344CB8AC3E}">
-        <p14:creationId xmlns:p14="http://schemas.microsoft.com/office/powerpoint/2010/main" val="3541998944"/>
-      </p:ext>
-    </p:extLst>
-  </p:cSld>
-  <p:clrMapOvr>
-    <a:masterClrMapping/>
-  </p:clrMapOvr>
-  <p:timing>
-    <p:tnLst>
-      <p:par>
-        <p:cTn id="1" dur="indefinite" restart="never" nodeType="tmRoot">
-          <p:childTnLst>
-            <p:seq concurrent="1" nextAc="seek">
-              <p:cTn id="2" dur="indefinite" nodeType="mainSeq">
-                <p:childTnLst>
-                  <p:par>
-                    <p:cTn id="3" fill="hold">
-                      <p:stCondLst>
-                        <p:cond delay="indefinite"/>
-                      </p:stCondLst>
-                      <p:childTnLst>
-                        <p:par>
-                          <p:cTn id="4" fill="hold">
-                            <p:stCondLst>
-                              <p:cond delay="0"/>
-                            </p:stCondLst>
-                            <p:childTnLst>
-                              <p:par>
-                                <p:cTn id="5" presetID="34" presetClass="entr" presetSubtype="0" fill="hold" grpId="0" nodeType="clickEffect">
-                                  <p:stCondLst>
-                                    <p:cond delay="0"/>
-                                  </p:stCondLst>
-                                  <p:childTnLst>
-                                    <p:set>
-                                      <p:cBhvr>
-                                        <p:cTn id="6" dur="1" fill="hold">
-                                          <p:stCondLst>
-                                            <p:cond delay="0"/>
-                                          </p:stCondLst>
-                                        </p:cTn>
-                                        <p:tgtEl>
-                                          <p:spTgt spid="6"/>
-                                        </p:tgtEl>
-                                        <p:attrNameLst>
-                                          <p:attrName>style.visibility</p:attrName>
-                                        </p:attrNameLst>
-                                      </p:cBhvr>
-                                      <p:to>
-                                        <p:strVal val="visible"/>
-                                      </p:to>
-                                    </p:set>
-                                    <p:anim from="(-#ppt_w/2)" to="(#ppt_x)" calcmode="lin" valueType="num">
-                                      <p:cBhvr>
-                                        <p:cTn id="7" dur="600" fill="hold">
-                                          <p:stCondLst>
-                                            <p:cond delay="0"/>
-                                          </p:stCondLst>
-                                        </p:cTn>
-                                        <p:tgtEl>
-                                          <p:spTgt spid="6"/>
-                                        </p:tgtEl>
-                                        <p:attrNameLst>
-                                          <p:attrName>ppt_x</p:attrName>
-                                        </p:attrNameLst>
-                                      </p:cBhvr>
-                                    </p:anim>
-                                    <p:anim from="0" to="-1.0" calcmode="lin" valueType="num">
-                                      <p:cBhvr>
-                                        <p:cTn id="8" dur="200" decel="50000" autoRev="1" fill="hold">
-                                          <p:stCondLst>
-                                            <p:cond delay="600"/>
-                                          </p:stCondLst>
-                                        </p:cTn>
-                                        <p:tgtEl>
-                                          <p:spTgt spid="6"/>
-                                        </p:tgtEl>
-                                        <p:attrNameLst>
-                                          <p:attrName>xshear</p:attrName>
-                                        </p:attrNameLst>
-                                      </p:cBhvr>
-                                    </p:anim>
-                                    <p:animScale>
-                                      <p:cBhvr>
-                                        <p:cTn id="9" dur="200" decel="100000" autoRev="1" fill="hold">
-                                          <p:stCondLst>
-                                            <p:cond delay="600"/>
-                                          </p:stCondLst>
-                                        </p:cTn>
-                                        <p:tgtEl>
-                                          <p:spTgt spid="6"/>
-                                        </p:tgtEl>
-                                      </p:cBhvr>
-                                      <p:from x="100000" y="100000"/>
-                                      <p:to x="80000" y="100000"/>
-                                    </p:animScale>
-                                    <p:anim by="(#ppt_h/3+#ppt_w*0.1)" calcmode="lin" valueType="num">
-                                      <p:cBhvr additive="sum">
-                                        <p:cTn id="10" dur="200" decel="100000" autoRev="1" fill="hold">
-                                          <p:stCondLst>
-                                            <p:cond delay="600"/>
-                                          </p:stCondLst>
-                                        </p:cTn>
-                                        <p:tgtEl>
-                                          <p:spTgt spid="6"/>
-                                        </p:tgtEl>
-                                        <p:attrNameLst>
-                                          <p:attrName>ppt_x</p:attrName>
-                                        </p:attrNameLst>
-                                      </p:cBhvr>
-                                    </p:anim>
-                                  </p:childTnLst>
-                                </p:cTn>
-                              </p:par>
-                            </p:childTnLst>
-                          </p:cTn>
-                        </p:par>
-                      </p:childTnLst>
-                    </p:cTn>
-                  </p:par>
-                </p:childTnLst>
-              </p:cTn>
-              <p:prevCondLst>
-                <p:cond evt="onPrev" delay="0">
-                  <p:tgtEl>
-                    <p:sldTgt/>
-                  </p:tgtEl>
-                </p:cond>
-              </p:prevCondLst>
-              <p:nextCondLst>
-                <p:cond evt="onNext" delay="0">
-                  <p:tgtEl>
-                    <p:sldTgt/>
-                  </p:tgtEl>
-                </p:cond>
-              </p:nextCondLst>
-            </p:seq>
-          </p:childTnLst>
-        </p:cTn>
-      </p:par>
-    </p:tnLst>
-    <p:bldLst>
-      <p:bldP spid="6" grpId="0"/>
-    </p:bldLst>
-  </p:timing>
-</p:sld>
-</file>
-
-<file path=ppt/slides/slide36.xml><?xml version="1.0" encoding="utf-8"?>
-<p:sld xmlns:a="http://schemas.openxmlformats.org/drawingml/2006/main" xmlns:r="http://schemas.openxmlformats.org/officeDocument/2006/relationships" xmlns:p="http://schemas.openxmlformats.org/presentationml/2006/main">
-  <p:cSld>
-    <p:spTree>
-      <p:nvGrpSpPr>
-        <p:cNvPr id="1" name=""/>
-        <p:cNvGrpSpPr/>
-        <p:nvPr/>
-      </p:nvGrpSpPr>
-      <p:grpSpPr>
-        <a:xfrm>
-          <a:off x="0" y="0"/>
-          <a:ext cx="0" cy="0"/>
-          <a:chOff x="0" y="0"/>
-          <a:chExt cx="0" cy="0"/>
-        </a:xfrm>
-      </p:grpSpPr>
-      <p:sp>
-        <p:nvSpPr>
-          <p:cNvPr id="2" name="Title 1">
-            <a:extLst>
-              <a:ext uri="{FF2B5EF4-FFF2-40B4-BE49-F238E27FC236}">
-                <a16:creationId xmlns:a16="http://schemas.microsoft.com/office/drawing/2014/main" id="{C08D30B1-1864-30EF-7EAB-9BEE656C0012}"/>
-              </a:ext>
-            </a:extLst>
-          </p:cNvPr>
-          <p:cNvSpPr>
-            <a:spLocks noGrp="1"/>
-          </p:cNvSpPr>
-          <p:nvPr>
-            <p:ph type="title"/>
-          </p:nvPr>
-        </p:nvSpPr>
-        <p:spPr/>
-        <p:txBody>
-          <a:bodyPr>
-            <a:noAutofit/>
-          </a:bodyPr>
-          <a:lstStyle/>
-          <a:p>
-            <a:r>
-              <a:rPr lang="en-US">
-                <a:solidFill>
-                  <a:srgbClr val="1F3864"/>
-                </a:solidFill>
-              </a:rPr>
-              <a:t>Example: the margin of error for x̄</a:t>
-            </a:r>
-          </a:p>
-        </p:txBody>
-      </p:sp>
-      <p:sp>
-        <p:nvSpPr>
-          <p:cNvPr id="4" name="Slide Number Placeholder 3">
-            <a:extLst>
-              <a:ext uri="{FF2B5EF4-FFF2-40B4-BE49-F238E27FC236}">
-                <a16:creationId xmlns:a16="http://schemas.microsoft.com/office/drawing/2014/main" id="{3F875068-D051-44AE-498E-1BEBEDE3A7C8}"/>
-              </a:ext>
-            </a:extLst>
-          </p:cNvPr>
-          <p:cNvSpPr>
-            <a:spLocks noGrp="1"/>
-          </p:cNvSpPr>
-          <p:nvPr>
-            <p:ph type="sldNum" sz="quarter" idx="12"/>
-          </p:nvPr>
-        </p:nvSpPr>
-        <p:spPr/>
-        <p:txBody>
-          <a:bodyPr/>
-          <a:lstStyle/>
-          <a:p>
-            <a:fld id="{A80A81DD-F10A-4B1C-963A-0ABBB4865886}" type="slidenum">
-              <a:rPr lang="en-US" sz="1600" smtClean="0"/>
-              <a:t>36</a:t>
-            </a:fld>
-            <a:endParaRPr lang="en-US" sz="1600"/>
-          </a:p>
-        </p:txBody>
-      </p:sp>
-      <p:sp>
-        <p:nvSpPr>
-          <p:cNvPr id="3" name="Title rule">
-            <a:extLst>
-              <a:ext uri="{FF2B5EF4-FFF2-40B4-BE49-F238E27FC236}">
-                <a16:creationId xmlns:a16="http://schemas.microsoft.com/office/drawing/2014/main" id="{30656AA8-9645-F028-C769-A313710853CC}"/>
-              </a:ext>
-            </a:extLst>
-          </p:cNvPr>
-          <p:cNvSpPr/>
-          <p:nvPr/>
-        </p:nvSpPr>
-        <p:spPr>
-          <a:xfrm>
-            <a:off x="838200" y="1600200"/>
-            <a:ext cx="10515600" cy="38100"/>
-          </a:xfrm>
-          <a:prstGeom prst="rect">
-            <a:avLst/>
-          </a:prstGeom>
-          <a:solidFill>
-            <a:srgbClr val="4472C4"/>
-          </a:solidFill>
-          <a:ln w="12700" cap="flat" cmpd="sng" algn="ctr">
-            <a:noFill/>
-            <a:prstDash val="solid"/>
-            <a:miter lim="800000"/>
-          </a:ln>
-          <a:effectLst/>
-          <a:extLst>
-            <a:ext uri="{91240B29-F687-4F45-9708-019B960494DF}">
-              <a14:hiddenLine xmlns:a14="http://schemas.microsoft.com/office/drawing/2010/main" w="12700" cap="flat" cmpd="sng" algn="ctr">
-                <a:solidFill>
-                  <a:schemeClr val="accent1">
-                    <a:shade val="15000"/>
-                  </a:schemeClr>
-                </a:solidFill>
-                <a:prstDash val="solid"/>
-                <a:miter lim="800000"/>
-              </a14:hiddenLine>
-            </a:ext>
-          </a:extLst>
-        </p:spPr>
-        <p:style>
-          <a:lnRef idx="2">
-            <a:schemeClr val="accent1">
-              <a:shade val="15000"/>
-            </a:schemeClr>
-          </a:lnRef>
-          <a:fillRef idx="1">
-            <a:schemeClr val="accent1"/>
-          </a:fillRef>
-          <a:effectRef idx="0">
-            <a:schemeClr val="accent1"/>
-          </a:effectRef>
-          <a:fontRef idx="minor">
-            <a:schemeClr val="lt1"/>
-          </a:fontRef>
-        </p:style>
-        <p:txBody>
-          <a:bodyPr rtlCol="0" anchor="ctr"/>
-          <a:lstStyle/>
-          <a:p>
-            <a:pPr algn="ctr"/>
-            <a:endParaRPr lang="en-US"/>
-          </a:p>
-        </p:txBody>
-      </p:sp>
-      <p:sp>
-        <p:nvSpPr>
-          <p:cNvPr id="8" name="Context">
-            <a:extLst>
-              <a:ext uri="{FF2B5EF4-FFF2-40B4-BE49-F238E27FC236}">
-                <a16:creationId xmlns:a16="http://schemas.microsoft.com/office/drawing/2014/main" id="{71E3EA8C-31B4-DAD4-BC4A-65D72E59AD46}"/>
-              </a:ext>
-            </a:extLst>
-          </p:cNvPr>
-          <p:cNvSpPr txBox="1"/>
-          <p:nvPr/>
-        </p:nvSpPr>
-        <p:spPr>
-          <a:xfrm>
-            <a:off x="762000" y="1879600"/>
-            <a:ext cx="10668000" cy="381000"/>
-          </a:xfrm>
-          <a:prstGeom prst="rect">
-            <a:avLst/>
-          </a:prstGeom>
-          <a:noFill/>
-        </p:spPr>
-        <p:txBody>
-          <a:bodyPr vert="horz" wrap="square" rtlCol="0">
-            <a:spAutoFit/>
-          </a:bodyPr>
-          <a:lstStyle/>
-          <a:p>
-            <a:pPr>
-              <a:spcAft>
-                <a:spcPts val="200"/>
-              </a:spcAft>
-            </a:pPr>
-            <a:r>
-              <a:rPr lang="en-US">
-                <a:solidFill>
-                  <a:srgbClr val="000000"/>
-                </a:solidFill>
-                <a:latin typeface="Calibri" panose="020F0502020204030204" pitchFamily="34" charset="0"/>
-              </a:rPr>
-              <a:t>Random samples of n = 20 from the 262 women.</a:t>
-            </a:r>
-          </a:p>
-        </p:txBody>
-      </p:sp>
-      <p:sp>
-        <p:nvSpPr>
-          <p:cNvPr id="9" name="Numbers">
-            <a:extLst>
-              <a:ext uri="{FF2B5EF4-FFF2-40B4-BE49-F238E27FC236}">
-                <a16:creationId xmlns:a16="http://schemas.microsoft.com/office/drawing/2014/main" id="{C419F151-05B2-3E4B-BAE8-BB1F06D9D1FD}"/>
-              </a:ext>
-            </a:extLst>
-          </p:cNvPr>
-          <p:cNvSpPr txBox="1"/>
-          <p:nvPr/>
-        </p:nvSpPr>
-        <p:spPr>
-          <a:xfrm>
-            <a:off x="762000" y="2286000"/>
-            <a:ext cx="10668000" cy="400110"/>
-          </a:xfrm>
-          <a:prstGeom prst="rect">
-            <a:avLst/>
-          </a:prstGeom>
-          <a:noFill/>
-        </p:spPr>
-        <p:txBody>
-          <a:bodyPr vert="horz" wrap="square" rtlCol="0">
-            <a:spAutoFit/>
-          </a:bodyPr>
-          <a:lstStyle/>
-          <a:p>
-            <a:pPr>
-              <a:spcAft>
-                <a:spcPts val="200"/>
-              </a:spcAft>
-            </a:pPr>
-            <a:r>
-              <a:rPr lang="el-GR" sz="2000" b="1">
-                <a:solidFill>
-                  <a:srgbClr val="000000"/>
-                </a:solidFill>
-                <a:latin typeface="Calibri" panose="020F0502020204030204" pitchFamily="34" charset="0"/>
-              </a:rPr>
-              <a:t>σ = 3.38 </a:t>
-            </a:r>
-            <a:r>
-              <a:rPr lang="en-US" sz="2000" b="1">
-                <a:solidFill>
-                  <a:srgbClr val="000000"/>
-                </a:solidFill>
-                <a:latin typeface="Calibri" panose="020F0502020204030204" pitchFamily="34" charset="0"/>
-              </a:rPr>
-              <a:t>in        n = 20</a:t>
-            </a:r>
-          </a:p>
-        </p:txBody>
-      </p:sp>
-      <p:sp>
-        <p:nvSpPr>
-          <p:cNvPr id="10" name="Question">
-            <a:extLst>
-              <a:ext uri="{FF2B5EF4-FFF2-40B4-BE49-F238E27FC236}">
-                <a16:creationId xmlns:a16="http://schemas.microsoft.com/office/drawing/2014/main" id="{B31E395F-B84E-D1E9-D22A-222467FC4105}"/>
-              </a:ext>
-            </a:extLst>
-          </p:cNvPr>
-          <p:cNvSpPr txBox="1"/>
-          <p:nvPr/>
-        </p:nvSpPr>
-        <p:spPr>
-          <a:xfrm>
-            <a:off x="762000" y="2711510"/>
-            <a:ext cx="10668000" cy="369332"/>
-          </a:xfrm>
-          <a:prstGeom prst="rect">
-            <a:avLst/>
-          </a:prstGeom>
-          <a:noFill/>
-        </p:spPr>
-        <p:txBody>
-          <a:bodyPr vert="horz" wrap="square" rtlCol="0">
-            <a:spAutoFit/>
-          </a:bodyPr>
-          <a:lstStyle/>
-          <a:p>
-            <a:pPr>
-              <a:spcAft>
-                <a:spcPts val="200"/>
-              </a:spcAft>
-            </a:pPr>
-            <a:r>
-              <a:rPr lang="en-US" b="1">
-                <a:solidFill>
-                  <a:srgbClr val="C00000"/>
-                </a:solidFill>
-                <a:latin typeface="Calibri" panose="020F0502020204030204" pitchFamily="34" charset="0"/>
-              </a:rPr>
-              <a:t>What are the standard error and the margin of error of x̄?</a:t>
-            </a:r>
-          </a:p>
-        </p:txBody>
-      </p:sp>
-      <p:sp>
-        <p:nvSpPr>
-          <p:cNvPr id="11" name="Result">
-            <a:extLst>
-              <a:ext uri="{FF2B5EF4-FFF2-40B4-BE49-F238E27FC236}">
-                <a16:creationId xmlns:a16="http://schemas.microsoft.com/office/drawing/2014/main" id="{5A70F68E-0D93-07B8-82B2-4D8F2F681D0D}"/>
-              </a:ext>
-            </a:extLst>
-          </p:cNvPr>
-          <p:cNvSpPr/>
-          <p:nvPr/>
-        </p:nvSpPr>
-        <p:spPr>
-          <a:xfrm>
-            <a:off x="762000" y="3233242"/>
-            <a:ext cx="10668000" cy="784324"/>
-          </a:xfrm>
-          <a:prstGeom prst="roundRect">
-            <a:avLst>
-              <a:gd name="adj" fmla="val 4000"/>
-            </a:avLst>
-          </a:prstGeom>
-          <a:solidFill>
-            <a:srgbClr val="F2F6FC"/>
-          </a:solidFill>
-          <a:ln w="15875">
-            <a:solidFill>
-              <a:srgbClr val="4472C4"/>
-            </a:solidFill>
-          </a:ln>
-        </p:spPr>
-        <p:style>
-          <a:lnRef idx="2">
-            <a:schemeClr val="accent1">
-              <a:shade val="15000"/>
-            </a:schemeClr>
-          </a:lnRef>
-          <a:fillRef idx="1">
-            <a:schemeClr val="accent1"/>
-          </a:fillRef>
-          <a:effectRef idx="0">
-            <a:schemeClr val="accent1"/>
-          </a:effectRef>
-          <a:fontRef idx="minor">
-            <a:schemeClr val="lt1"/>
-          </a:fontRef>
-        </p:style>
-        <p:txBody>
-          <a:bodyPr wrap="square" lIns="152400" tIns="76200" rIns="152400" bIns="76200" rtlCol="0" anchor="ctr">
-            <a:spAutoFit/>
-          </a:bodyPr>
-          <a:lstStyle/>
-          <a:p>
-            <a:r>
-              <a:rPr lang="en-US" sz="2000" b="1">
-                <a:solidFill>
-                  <a:srgbClr val="C00000"/>
-                </a:solidFill>
-                <a:latin typeface="Calibri" panose="020F0502020204030204" pitchFamily="34" charset="0"/>
-              </a:rPr>
-              <a:t>SE = σ / √n = 3.38 / √20 ≈ 0.76 in</a:t>
-            </a:r>
-          </a:p>
-          <a:p>
-            <a:r>
-              <a:rPr lang="en-US" b="1">
-                <a:solidFill>
-                  <a:srgbClr val="C00000"/>
-                </a:solidFill>
-                <a:latin typeface="Calibri" panose="020F0502020204030204" pitchFamily="34" charset="0"/>
-              </a:rPr>
-              <a:t>Margin of error = 2 × 0.76 ≈ 1.5 in:  about 95% of samples land within 65.4 ± 1.5 in</a:t>
-            </a:r>
-          </a:p>
-        </p:txBody>
-      </p:sp>
-    </p:spTree>
-    <p:extLst>
-      <p:ext uri="{BB962C8B-B14F-4D97-AF65-F5344CB8AC3E}">
-        <p14:creationId xmlns:p14="http://schemas.microsoft.com/office/powerpoint/2010/main" val="582668286"/>
-      </p:ext>
-    </p:extLst>
-  </p:cSld>
-  <p:clrMapOvr>
-    <a:masterClrMapping/>
-  </p:clrMapOvr>
-  <p:timing>
-    <p:tnLst>
-      <p:par>
-        <p:cTn id="1" dur="indefinite" restart="never" nodeType="tmRoot">
-          <p:childTnLst>
-            <p:seq concurrent="1" nextAc="seek">
-              <p:cTn id="2" dur="indefinite" nodeType="mainSeq">
-                <p:childTnLst>
-                  <p:par>
-                    <p:cTn id="3" fill="hold">
-                      <p:stCondLst>
-                        <p:cond delay="indefinite"/>
-                      </p:stCondLst>
-                      <p:childTnLst>
-                        <p:par>
-                          <p:cTn id="4" fill="hold">
-                            <p:stCondLst>
-                              <p:cond delay="0"/>
-                            </p:stCondLst>
-                            <p:childTnLst>
-                              <p:par>
-                                <p:cTn id="5" presetID="1" presetClass="entr" presetSubtype="0" fill="hold" grpId="0" nodeType="clickEffect">
-                                  <p:stCondLst>
-                                    <p:cond delay="0"/>
-                                  </p:stCondLst>
-                                  <p:childTnLst>
-                                    <p:set>
-                                      <p:cBhvr>
-                                        <p:cTn id="6" dur="1" fill="hold">
-                                          <p:stCondLst>
-                                            <p:cond delay="0"/>
-                                          </p:stCondLst>
-                                        </p:cTn>
-                                        <p:tgtEl>
-                                          <p:spTgt spid="11"/>
-                                        </p:tgtEl>
-                                        <p:attrNameLst>
-                                          <p:attrName>style.visibility</p:attrName>
-                                        </p:attrNameLst>
-                                      </p:cBhvr>
-                                      <p:to>
-                                        <p:strVal val="visible"/>
-                                      </p:to>
-                                    </p:set>
-                                  </p:childTnLst>
-                                </p:cTn>
-                              </p:par>
-                            </p:childTnLst>
-                          </p:cTn>
-                        </p:par>
-                      </p:childTnLst>
-                    </p:cTn>
-                  </p:par>
-                </p:childTnLst>
-              </p:cTn>
-              <p:prevCondLst>
-                <p:cond evt="onPrev" delay="0">
-                  <p:tgtEl>
-                    <p:sldTgt/>
-                  </p:tgtEl>
-                </p:cond>
-              </p:prevCondLst>
-              <p:nextCondLst>
-                <p:cond evt="onNext" delay="0">
-                  <p:tgtEl>
-                    <p:sldTgt/>
-                  </p:tgtEl>
-                </p:cond>
-              </p:nextCondLst>
-            </p:seq>
-          </p:childTnLst>
-        </p:cTn>
-      </p:par>
-    </p:tnLst>
-    <p:bldLst>
-      <p:bldP spid="11" grpId="0" animBg="1"/>
-    </p:bldLst>
-  </p:timing>
-</p:sld>
-</file>
-
-<file path=ppt/slides/slide37.xml><?xml version="1.0" encoding="utf-8"?>
-<p:sld xmlns:a="http://schemas.openxmlformats.org/drawingml/2006/main" xmlns:r="http://schemas.openxmlformats.org/officeDocument/2006/relationships" xmlns:p="http://schemas.openxmlformats.org/presentationml/2006/main">
-  <p:cSld>
-    <p:spTree>
-      <p:nvGrpSpPr>
-        <p:cNvPr id="1" name=""/>
-        <p:cNvGrpSpPr/>
-        <p:nvPr/>
-      </p:nvGrpSpPr>
-      <p:grpSpPr>
-        <a:xfrm>
-          <a:off x="0" y="0"/>
-          <a:ext cx="0" cy="0"/>
-          <a:chOff x="0" y="0"/>
-          <a:chExt cx="0" cy="0"/>
-        </a:xfrm>
-      </p:grpSpPr>
-      <p:sp>
-        <p:nvSpPr>
-          <p:cNvPr id="2" name="Title 1">
-            <a:extLst>
-              <a:ext uri="{FF2B5EF4-FFF2-40B4-BE49-F238E27FC236}">
-                <a16:creationId xmlns:a16="http://schemas.microsoft.com/office/drawing/2014/main" id="{C08D30B1-1864-30EF-7EAB-9BEE656C0012}"/>
-              </a:ext>
-            </a:extLst>
-          </p:cNvPr>
-          <p:cNvSpPr>
-            <a:spLocks noGrp="1"/>
-          </p:cNvSpPr>
-          <p:nvPr>
-            <p:ph type="title"/>
-          </p:nvPr>
-        </p:nvSpPr>
-        <p:spPr/>
-        <p:txBody>
-          <a:bodyPr>
-            <a:noAutofit/>
-          </a:bodyPr>
-          <a:lstStyle/>
-          <a:p>
-            <a:r>
-              <a:rPr lang="en-US">
-                <a:solidFill>
-                  <a:srgbClr val="1F3864"/>
-                </a:solidFill>
-              </a:rPr>
-              <a:t>Statistical significance</a:t>
-            </a:r>
-          </a:p>
-        </p:txBody>
-      </p:sp>
-      <p:sp>
-        <p:nvSpPr>
-          <p:cNvPr id="4" name="Slide Number Placeholder 3">
-            <a:extLst>
-              <a:ext uri="{FF2B5EF4-FFF2-40B4-BE49-F238E27FC236}">
-                <a16:creationId xmlns:a16="http://schemas.microsoft.com/office/drawing/2014/main" id="{3F875068-D051-44AE-498E-1BEBEDE3A7C8}"/>
-              </a:ext>
-            </a:extLst>
-          </p:cNvPr>
-          <p:cNvSpPr>
-            <a:spLocks noGrp="1"/>
-          </p:cNvSpPr>
-          <p:nvPr>
-            <p:ph type="sldNum" sz="quarter" idx="12"/>
-          </p:nvPr>
-        </p:nvSpPr>
-        <p:spPr/>
-        <p:txBody>
-          <a:bodyPr/>
-          <a:lstStyle/>
-          <a:p>
-            <a:fld id="{A80A81DD-F10A-4B1C-963A-0ABBB4865886}" type="slidenum">
-              <a:rPr lang="en-US" sz="1600" smtClean="0"/>
-              <a:t>37</a:t>
-            </a:fld>
-            <a:endParaRPr lang="en-US" sz="1600"/>
-          </a:p>
-        </p:txBody>
-      </p:sp>
-      <p:sp>
-        <p:nvSpPr>
-          <p:cNvPr id="3" name="Title rule">
-            <a:extLst>
-              <a:ext uri="{FF2B5EF4-FFF2-40B4-BE49-F238E27FC236}">
-                <a16:creationId xmlns:a16="http://schemas.microsoft.com/office/drawing/2014/main" id="{30656AA8-9645-F028-C769-A313710853CC}"/>
-              </a:ext>
-            </a:extLst>
-          </p:cNvPr>
-          <p:cNvSpPr/>
-          <p:nvPr/>
-        </p:nvSpPr>
-        <p:spPr>
-          <a:xfrm>
-            <a:off x="838200" y="1600200"/>
-            <a:ext cx="10515600" cy="38100"/>
-          </a:xfrm>
-          <a:prstGeom prst="rect">
-            <a:avLst/>
-          </a:prstGeom>
-          <a:solidFill>
-            <a:srgbClr val="4472C4"/>
-          </a:solidFill>
-          <a:ln w="12700" cap="flat" cmpd="sng" algn="ctr">
-            <a:noFill/>
-            <a:prstDash val="solid"/>
-            <a:miter lim="800000"/>
-          </a:ln>
-          <a:effectLst/>
-          <a:extLst>
-            <a:ext uri="{91240B29-F687-4F45-9708-019B960494DF}">
-              <a14:hiddenLine xmlns:a14="http://schemas.microsoft.com/office/drawing/2010/main" w="12700" cap="flat" cmpd="sng" algn="ctr">
-                <a:solidFill>
-                  <a:schemeClr val="accent1">
-                    <a:shade val="15000"/>
-                  </a:schemeClr>
-                </a:solidFill>
-                <a:prstDash val="solid"/>
-                <a:miter lim="800000"/>
-              </a14:hiddenLine>
-            </a:ext>
-          </a:extLst>
-        </p:spPr>
-        <p:style>
-          <a:lnRef idx="2">
-            <a:schemeClr val="accent1">
-              <a:shade val="15000"/>
-            </a:schemeClr>
-          </a:lnRef>
-          <a:fillRef idx="1">
-            <a:schemeClr val="accent1"/>
-          </a:fillRef>
-          <a:effectRef idx="0">
-            <a:schemeClr val="accent1"/>
-          </a:effectRef>
-          <a:fontRef idx="minor">
-            <a:schemeClr val="lt1"/>
-          </a:fontRef>
-        </p:style>
-        <p:txBody>
-          <a:bodyPr rtlCol="0" anchor="ctr"/>
-          <a:lstStyle/>
-          <a:p>
-            <a:pPr algn="ctr"/>
-            <a:endParaRPr lang="en-US"/>
-          </a:p>
-        </p:txBody>
-      </p:sp>
-      <p:sp>
-        <p:nvSpPr>
-          <p:cNvPr id="8" name="Context">
-            <a:extLst>
-              <a:ext uri="{FF2B5EF4-FFF2-40B4-BE49-F238E27FC236}">
-                <a16:creationId xmlns:a16="http://schemas.microsoft.com/office/drawing/2014/main" id="{71E3EA8C-31B4-DAD4-BC4A-65D72E59AD46}"/>
-              </a:ext>
-            </a:extLst>
-          </p:cNvPr>
-          <p:cNvSpPr txBox="1"/>
-          <p:nvPr/>
-        </p:nvSpPr>
-        <p:spPr>
-          <a:xfrm>
-            <a:off x="762000" y="1879600"/>
-            <a:ext cx="10668000" cy="381000"/>
-          </a:xfrm>
-          <a:prstGeom prst="rect">
-            <a:avLst/>
-          </a:prstGeom>
-          <a:noFill/>
-        </p:spPr>
-        <p:txBody>
-          <a:bodyPr vert="horz" wrap="square" rtlCol="0">
-            <a:spAutoFit/>
-          </a:bodyPr>
-          <a:lstStyle/>
-          <a:p>
-            <a:pPr>
-              <a:spcAft>
-                <a:spcPts val="200"/>
-              </a:spcAft>
-            </a:pPr>
-            <a:r>
-              <a:rPr lang="en-US">
-                <a:solidFill>
-                  <a:srgbClr val="000000"/>
-                </a:solidFill>
-                <a:latin typeface="Calibri" panose="020F0502020204030204" pitchFamily="34" charset="0"/>
-              </a:rPr>
-              <a:t>Someone hands you a random sample of 20 students and says they are from our 262 women.</a:t>
-            </a:r>
-          </a:p>
-        </p:txBody>
-      </p:sp>
-      <p:sp>
-        <p:nvSpPr>
-          <p:cNvPr id="9" name="Numbers">
-            <a:extLst>
-              <a:ext uri="{FF2B5EF4-FFF2-40B4-BE49-F238E27FC236}">
-                <a16:creationId xmlns:a16="http://schemas.microsoft.com/office/drawing/2014/main" id="{C419F151-05B2-3E4B-BAE8-BB1F06D9D1FD}"/>
-              </a:ext>
-            </a:extLst>
-          </p:cNvPr>
-          <p:cNvSpPr txBox="1"/>
-          <p:nvPr/>
-        </p:nvSpPr>
-        <p:spPr>
-          <a:xfrm>
-            <a:off x="762000" y="2286000"/>
-            <a:ext cx="10668000" cy="400110"/>
-          </a:xfrm>
-          <a:prstGeom prst="rect">
-            <a:avLst/>
-          </a:prstGeom>
-          <a:noFill/>
-        </p:spPr>
-        <p:txBody>
-          <a:bodyPr vert="horz" wrap="square" rtlCol="0">
-            <a:spAutoFit/>
-          </a:bodyPr>
-          <a:lstStyle/>
-          <a:p>
-            <a:pPr>
-              <a:spcAft>
-                <a:spcPts val="200"/>
-              </a:spcAft>
-            </a:pPr>
-            <a:r>
-              <a:rPr lang="it-IT" sz="2000" b="1">
-                <a:solidFill>
-                  <a:srgbClr val="000000"/>
-                </a:solidFill>
-                <a:latin typeface="Calibri" panose="020F0502020204030204" pitchFamily="34" charset="0"/>
-              </a:rPr>
-              <a:t>x̄ = 70.33 in        μ = 65.4 in        SE = 0.76 in</a:t>
-            </a:r>
-            <a:endParaRPr lang="en-US" sz="2000" b="1">
-              <a:solidFill>
-                <a:srgbClr val="000000"/>
-              </a:solidFill>
-              <a:latin typeface="Calibri" panose="020F0502020204030204" pitchFamily="34" charset="0"/>
-            </a:endParaRPr>
-          </a:p>
-        </p:txBody>
-      </p:sp>
-      <p:sp>
-        <p:nvSpPr>
-          <p:cNvPr id="10" name="Question">
-            <a:extLst>
-              <a:ext uri="{FF2B5EF4-FFF2-40B4-BE49-F238E27FC236}">
-                <a16:creationId xmlns:a16="http://schemas.microsoft.com/office/drawing/2014/main" id="{B31E395F-B84E-D1E9-D22A-222467FC4105}"/>
-              </a:ext>
-            </a:extLst>
-          </p:cNvPr>
-          <p:cNvSpPr txBox="1"/>
-          <p:nvPr/>
-        </p:nvSpPr>
-        <p:spPr>
-          <a:xfrm>
-            <a:off x="762000" y="2711510"/>
-            <a:ext cx="10668000" cy="369332"/>
-          </a:xfrm>
-          <a:prstGeom prst="rect">
-            <a:avLst/>
-          </a:prstGeom>
-          <a:noFill/>
-        </p:spPr>
-        <p:txBody>
-          <a:bodyPr vert="horz" wrap="square" rtlCol="0">
-            <a:spAutoFit/>
-          </a:bodyPr>
-          <a:lstStyle/>
-          <a:p>
-            <a:pPr>
-              <a:spcAft>
-                <a:spcPts val="200"/>
-              </a:spcAft>
-            </a:pPr>
-            <a:r>
-              <a:rPr lang="en-US" b="1">
-                <a:solidFill>
-                  <a:srgbClr val="C00000"/>
-                </a:solidFill>
-                <a:latin typeface="Calibri" panose="020F0502020204030204" pitchFamily="34" charset="0"/>
-              </a:rPr>
-              <a:t>Is this result statistically significant?</a:t>
-            </a:r>
-          </a:p>
-        </p:txBody>
-      </p:sp>
-      <p:sp>
-        <p:nvSpPr>
-          <p:cNvPr id="11" name="Result">
-            <a:extLst>
-              <a:ext uri="{FF2B5EF4-FFF2-40B4-BE49-F238E27FC236}">
-                <a16:creationId xmlns:a16="http://schemas.microsoft.com/office/drawing/2014/main" id="{5A70F68E-0D93-07B8-82B2-4D8F2F681D0D}"/>
-              </a:ext>
-            </a:extLst>
-          </p:cNvPr>
-          <p:cNvSpPr/>
-          <p:nvPr/>
-        </p:nvSpPr>
-        <p:spPr>
-          <a:xfrm>
-            <a:off x="762000" y="3233242"/>
-            <a:ext cx="10668000" cy="784324"/>
-          </a:xfrm>
-          <a:prstGeom prst="roundRect">
-            <a:avLst>
-              <a:gd name="adj" fmla="val 4000"/>
-            </a:avLst>
-          </a:prstGeom>
-          <a:solidFill>
-            <a:srgbClr val="F2F6FC"/>
-          </a:solidFill>
-          <a:ln w="15875">
-            <a:solidFill>
-              <a:srgbClr val="4472C4"/>
-            </a:solidFill>
-          </a:ln>
-        </p:spPr>
-        <p:style>
-          <a:lnRef idx="2">
-            <a:schemeClr val="accent1">
-              <a:shade val="15000"/>
-            </a:schemeClr>
-          </a:lnRef>
-          <a:fillRef idx="1">
-            <a:schemeClr val="accent1"/>
-          </a:fillRef>
-          <a:effectRef idx="0">
-            <a:schemeClr val="accent1"/>
-          </a:effectRef>
-          <a:fontRef idx="minor">
-            <a:schemeClr val="lt1"/>
-          </a:fontRef>
-        </p:style>
-        <p:txBody>
-          <a:bodyPr wrap="square" lIns="152400" tIns="76200" rIns="152400" bIns="76200" rtlCol="0" anchor="ctr">
-            <a:spAutoFit/>
-          </a:bodyPr>
-          <a:lstStyle/>
-          <a:p>
-            <a:r>
-              <a:rPr lang="en-US" sz="2000" b="1">
-                <a:solidFill>
-                  <a:srgbClr val="C00000"/>
-                </a:solidFill>
-                <a:latin typeface="Calibri" panose="020F0502020204030204" pitchFamily="34" charset="0"/>
-              </a:rPr>
-              <a:t>z = (70.33 − 65.4) / 0.76 ≈ 6.5:  far outside the margin of error, so yes</a:t>
-            </a:r>
-          </a:p>
-          <a:p>
-            <a:r>
-              <a:rPr lang="en-US" b="1">
-                <a:solidFill>
-                  <a:srgbClr val="C00000"/>
-                </a:solidFill>
-                <a:latin typeface="Calibri" panose="020F0502020204030204" pitchFamily="34" charset="0"/>
-              </a:rPr>
-              <a:t>Statistically significant: too large to be ordinary sampling variation (they were men)</a:t>
-            </a:r>
-          </a:p>
-        </p:txBody>
-      </p:sp>
-    </p:spTree>
-    <p:extLst>
-      <p:ext uri="{BB962C8B-B14F-4D97-AF65-F5344CB8AC3E}">
-        <p14:creationId xmlns:p14="http://schemas.microsoft.com/office/powerpoint/2010/main" val="901969607"/>
-      </p:ext>
-    </p:extLst>
-  </p:cSld>
-  <p:clrMapOvr>
-    <a:masterClrMapping/>
-  </p:clrMapOvr>
-  <p:timing>
-    <p:tnLst>
-      <p:par>
-        <p:cTn id="1" dur="indefinite" restart="never" nodeType="tmRoot">
-          <p:childTnLst>
-            <p:seq concurrent="1" nextAc="seek">
-              <p:cTn id="2" dur="indefinite" nodeType="mainSeq">
-                <p:childTnLst>
-                  <p:par>
-                    <p:cTn id="3" fill="hold">
-                      <p:stCondLst>
-                        <p:cond delay="indefinite"/>
-                      </p:stCondLst>
-                      <p:childTnLst>
-                        <p:par>
-                          <p:cTn id="4" fill="hold">
-                            <p:stCondLst>
-                              <p:cond delay="0"/>
-                            </p:stCondLst>
-                            <p:childTnLst>
-                              <p:par>
-                                <p:cTn id="5" presetID="1" presetClass="entr" presetSubtype="0" fill="hold" grpId="0" nodeType="clickEffect">
-                                  <p:stCondLst>
-                                    <p:cond delay="0"/>
-                                  </p:stCondLst>
-                                  <p:childTnLst>
-                                    <p:set>
-                                      <p:cBhvr>
-                                        <p:cTn id="6" dur="1" fill="hold">
-                                          <p:stCondLst>
-                                            <p:cond delay="0"/>
-                                          </p:stCondLst>
-                                        </p:cTn>
-                                        <p:tgtEl>
-                                          <p:spTgt spid="11"/>
-                                        </p:tgtEl>
-                                        <p:attrNameLst>
-                                          <p:attrName>style.visibility</p:attrName>
-                                        </p:attrNameLst>
-                                      </p:cBhvr>
-                                      <p:to>
-                                        <p:strVal val="visible"/>
-                                      </p:to>
-                                    </p:set>
-                                  </p:childTnLst>
-                                </p:cTn>
-                              </p:par>
-                            </p:childTnLst>
-                          </p:cTn>
-                        </p:par>
-                      </p:childTnLst>
-                    </p:cTn>
-                  </p:par>
-                </p:childTnLst>
-              </p:cTn>
-              <p:prevCondLst>
-                <p:cond evt="onPrev" delay="0">
-                  <p:tgtEl>
-                    <p:sldTgt/>
-                  </p:tgtEl>
-                </p:cond>
-              </p:prevCondLst>
-              <p:nextCondLst>
-                <p:cond evt="onNext" delay="0">
-                  <p:tgtEl>
-                    <p:sldTgt/>
-                  </p:tgtEl>
-                </p:cond>
-              </p:nextCondLst>
-            </p:seq>
-          </p:childTnLst>
-        </p:cTn>
-      </p:par>
-    </p:tnLst>
-    <p:bldLst>
-      <p:bldP spid="11" grpId="0" animBg="1"/>
-    </p:bldLst>
-  </p:timing>
-</p:sld>
-</file>
-
-<file path=ppt/slides/slide38.xml><?xml version="1.0" encoding="utf-8"?>
-<p:sld xmlns:a="http://schemas.openxmlformats.org/drawingml/2006/main" xmlns:r="http://schemas.openxmlformats.org/officeDocument/2006/relationships" xmlns:p="http://schemas.openxmlformats.org/presentationml/2006/main">
-  <p:cSld>
-    <p:spTree>
-      <p:nvGrpSpPr>
-        <p:cNvPr id="1" name=""/>
-        <p:cNvGrpSpPr/>
-        <p:nvPr/>
-      </p:nvGrpSpPr>
-      <p:grpSpPr>
-        <a:xfrm>
-          <a:off x="0" y="0"/>
-          <a:ext cx="0" cy="0"/>
-          <a:chOff x="0" y="0"/>
-          <a:chExt cx="0" cy="0"/>
-        </a:xfrm>
-      </p:grpSpPr>
-      <p:sp>
-        <p:nvSpPr>
-          <p:cNvPr id="2" name="Title 1">
-            <a:extLst>
-              <a:ext uri="{FF2B5EF4-FFF2-40B4-BE49-F238E27FC236}">
-                <a16:creationId xmlns:a16="http://schemas.microsoft.com/office/drawing/2014/main" id="{D617AB41-6AD1-9EF2-7F95-46A904399681}"/>
-              </a:ext>
-            </a:extLst>
-          </p:cNvPr>
-          <p:cNvSpPr>
-            <a:spLocks noGrp="1"/>
-          </p:cNvSpPr>
-          <p:nvPr>
-            <p:ph type="title"/>
-          </p:nvPr>
-        </p:nvSpPr>
-        <p:spPr/>
-        <p:txBody>
-          <a:bodyPr>
-            <a:noAutofit/>
-          </a:bodyPr>
-          <a:lstStyle/>
-          <a:p>
-            <a:r>
-              <a:rPr lang="en-US">
-                <a:solidFill>
-                  <a:srgbClr val="1F3864"/>
-                </a:solidFill>
-              </a:rPr>
-              <a:t>What you should know: the normal distribution</a:t>
-            </a:r>
-          </a:p>
-        </p:txBody>
-      </p:sp>
-      <p:sp>
-        <p:nvSpPr>
-          <p:cNvPr id="4" name="Slide Number Placeholder 3">
-            <a:extLst>
-              <a:ext uri="{FF2B5EF4-FFF2-40B4-BE49-F238E27FC236}">
-                <a16:creationId xmlns:a16="http://schemas.microsoft.com/office/drawing/2014/main" id="{97D44AE5-98B5-B840-6B8A-D345C7C2E2F0}"/>
-              </a:ext>
-            </a:extLst>
-          </p:cNvPr>
-          <p:cNvSpPr>
-            <a:spLocks noGrp="1"/>
-          </p:cNvSpPr>
-          <p:nvPr>
-            <p:ph type="sldNum" sz="quarter" idx="12"/>
-          </p:nvPr>
-        </p:nvSpPr>
-        <p:spPr/>
-        <p:txBody>
-          <a:bodyPr/>
-          <a:lstStyle/>
-          <a:p>
-            <a:fld id="{A80A81DD-F10A-4B1C-963A-0ABBB4865886}" type="slidenum">
-              <a:rPr lang="en-US" sz="1600" smtClean="0"/>
-              <a:t>38</a:t>
-            </a:fld>
-            <a:endParaRPr lang="en-US" sz="1600"/>
-          </a:p>
-        </p:txBody>
-      </p:sp>
-      <p:sp>
-        <p:nvSpPr>
-          <p:cNvPr id="5" name="TextBox 4">
-            <a:extLst>
-              <a:ext uri="{FF2B5EF4-FFF2-40B4-BE49-F238E27FC236}">
-                <a16:creationId xmlns:a16="http://schemas.microsoft.com/office/drawing/2014/main" id="{A34AAE17-27CE-D7A3-C663-11BB48ACBF5B}"/>
-              </a:ext>
-            </a:extLst>
-          </p:cNvPr>
-          <p:cNvSpPr txBox="1"/>
-          <p:nvPr/>
-        </p:nvSpPr>
-        <p:spPr>
-          <a:xfrm>
-            <a:off x="762000" y="1879600"/>
-            <a:ext cx="10668000" cy="345440"/>
-          </a:xfrm>
-          <a:prstGeom prst="rect">
-            <a:avLst/>
-          </a:prstGeom>
-          <a:noFill/>
-        </p:spPr>
-        <p:txBody>
-          <a:bodyPr vert="horz" wrap="square" rtlCol="0">
-            <a:spAutoFit/>
-          </a:bodyPr>
-          <a:lstStyle/>
-          <a:p>
-            <a:pPr marL="304800" indent="-304800"/>
-            <a:r>
-              <a:rPr lang="en-US" sz="1600">
-                <a:solidFill>
-                  <a:srgbClr val="000000"/>
-                </a:solidFill>
-              </a:rPr>
-              <a:t>The two parameters</a:t>
-            </a:r>
-          </a:p>
-        </p:txBody>
-      </p:sp>
-      <p:sp>
-        <p:nvSpPr>
-          <p:cNvPr id="6" name="TextBox 5">
-            <a:extLst>
-              <a:ext uri="{FF2B5EF4-FFF2-40B4-BE49-F238E27FC236}">
-                <a16:creationId xmlns:a16="http://schemas.microsoft.com/office/drawing/2014/main" id="{E410A0F8-5E1E-9A1D-B64C-50827EE6C9B2}"/>
-              </a:ext>
-            </a:extLst>
-          </p:cNvPr>
-          <p:cNvSpPr txBox="1"/>
-          <p:nvPr/>
-        </p:nvSpPr>
-        <p:spPr>
-          <a:xfrm>
-            <a:off x="1117600" y="2225040"/>
-            <a:ext cx="10312400" cy="338554"/>
-          </a:xfrm>
-          <a:prstGeom prst="rect">
-            <a:avLst/>
-          </a:prstGeom>
-          <a:noFill/>
-        </p:spPr>
-        <p:txBody>
-          <a:bodyPr vert="horz" wrap="square" rtlCol="0">
-            <a:spAutoFit/>
-          </a:bodyPr>
-          <a:lstStyle/>
-          <a:p>
-            <a:r>
-              <a:rPr lang="en-US" sz="1600" b="1">
-                <a:solidFill>
-                  <a:srgbClr val="C00000"/>
-                </a:solidFill>
-              </a:rPr>
-              <a:t>x ~ N(μ, σ):  μ locates the center, σ sets the spread.</a:t>
-            </a:r>
-          </a:p>
-        </p:txBody>
-      </p:sp>
-      <p:sp>
-        <p:nvSpPr>
-          <p:cNvPr id="7" name="TextBox 6">
-            <a:extLst>
-              <a:ext uri="{FF2B5EF4-FFF2-40B4-BE49-F238E27FC236}">
-                <a16:creationId xmlns:a16="http://schemas.microsoft.com/office/drawing/2014/main" id="{47D3CD95-D52E-5227-B663-7C0A72677B6E}"/>
-              </a:ext>
-            </a:extLst>
-          </p:cNvPr>
-          <p:cNvSpPr txBox="1"/>
-          <p:nvPr/>
-        </p:nvSpPr>
-        <p:spPr>
-          <a:xfrm>
-            <a:off x="762000" y="2766794"/>
-            <a:ext cx="10668000" cy="345440"/>
-          </a:xfrm>
-          <a:prstGeom prst="rect">
-            <a:avLst/>
-          </a:prstGeom>
-          <a:noFill/>
-        </p:spPr>
-        <p:txBody>
-          <a:bodyPr vert="horz" wrap="square" rtlCol="0">
-            <a:spAutoFit/>
-          </a:bodyPr>
-          <a:lstStyle/>
-          <a:p>
-            <a:pPr marL="304800" indent="-304800"/>
-            <a:r>
-              <a:rPr lang="en-US" sz="1600">
-                <a:solidFill>
-                  <a:srgbClr val="000000"/>
-                </a:solidFill>
-              </a:rPr>
-              <a:t>The empirical rule</a:t>
-            </a:r>
-          </a:p>
-        </p:txBody>
-      </p:sp>
-      <p:sp>
-        <p:nvSpPr>
-          <p:cNvPr id="8" name="TextBox 7">
-            <a:extLst>
-              <a:ext uri="{FF2B5EF4-FFF2-40B4-BE49-F238E27FC236}">
-                <a16:creationId xmlns:a16="http://schemas.microsoft.com/office/drawing/2014/main" id="{1CE3E601-601D-C6B1-8265-C079CB8C9269}"/>
-              </a:ext>
-            </a:extLst>
-          </p:cNvPr>
-          <p:cNvSpPr txBox="1"/>
-          <p:nvPr/>
-        </p:nvSpPr>
-        <p:spPr>
-          <a:xfrm>
-            <a:off x="1117600" y="3112234"/>
-            <a:ext cx="10312400" cy="338554"/>
-          </a:xfrm>
-          <a:prstGeom prst="rect">
-            <a:avLst/>
-          </a:prstGeom>
-          <a:noFill/>
-        </p:spPr>
-        <p:txBody>
-          <a:bodyPr vert="horz" wrap="square" rtlCol="0">
-            <a:spAutoFit/>
-          </a:bodyPr>
-          <a:lstStyle/>
-          <a:p>
-            <a:r>
-              <a:rPr lang="en-US" sz="1600" b="1">
-                <a:solidFill>
-                  <a:srgbClr val="C00000"/>
-                </a:solidFill>
-              </a:rPr>
-              <a:t>68%, 95% and 99.7% within 1, 2 and 3 standard deviations (bell-shaped only).</a:t>
-            </a:r>
-          </a:p>
-        </p:txBody>
-      </p:sp>
-      <p:sp>
-        <p:nvSpPr>
-          <p:cNvPr id="9" name="TextBox 8">
-            <a:extLst>
-              <a:ext uri="{FF2B5EF4-FFF2-40B4-BE49-F238E27FC236}">
-                <a16:creationId xmlns:a16="http://schemas.microsoft.com/office/drawing/2014/main" id="{FB002BF4-8037-2F73-E27A-7A453477E389}"/>
-              </a:ext>
-            </a:extLst>
-          </p:cNvPr>
-          <p:cNvSpPr txBox="1"/>
-          <p:nvPr/>
-        </p:nvSpPr>
-        <p:spPr>
-          <a:xfrm>
-            <a:off x="762000" y="3653988"/>
-            <a:ext cx="10668000" cy="345440"/>
-          </a:xfrm>
-          <a:prstGeom prst="rect">
-            <a:avLst/>
-          </a:prstGeom>
-          <a:noFill/>
-        </p:spPr>
-        <p:txBody>
-          <a:bodyPr vert="horz" wrap="square" rtlCol="0">
-            <a:spAutoFit/>
-          </a:bodyPr>
-          <a:lstStyle/>
-          <a:p>
-            <a:pPr marL="304800" indent="-304800"/>
-            <a:r>
-              <a:rPr lang="en-US" sz="1600">
-                <a:solidFill>
-                  <a:srgbClr val="000000"/>
-                </a:solidFill>
-              </a:rPr>
-              <a:t>The z-score</a:t>
-            </a:r>
-          </a:p>
-        </p:txBody>
-      </p:sp>
-      <p:sp>
-        <p:nvSpPr>
-          <p:cNvPr id="10" name="TextBox 9">
-            <a:extLst>
-              <a:ext uri="{FF2B5EF4-FFF2-40B4-BE49-F238E27FC236}">
-                <a16:creationId xmlns:a16="http://schemas.microsoft.com/office/drawing/2014/main" id="{10F3B3E3-D27C-E008-C93E-ED70BD2A4754}"/>
-              </a:ext>
-            </a:extLst>
-          </p:cNvPr>
-          <p:cNvSpPr txBox="1"/>
-          <p:nvPr/>
-        </p:nvSpPr>
-        <p:spPr>
-          <a:xfrm>
-            <a:off x="1117600" y="3999428"/>
-            <a:ext cx="10312400" cy="338554"/>
-          </a:xfrm>
-          <a:prstGeom prst="rect">
-            <a:avLst/>
-          </a:prstGeom>
-          <a:noFill/>
-        </p:spPr>
-        <p:txBody>
-          <a:bodyPr vert="horz" wrap="square" rtlCol="0">
-            <a:spAutoFit/>
-          </a:bodyPr>
-          <a:lstStyle/>
-          <a:p>
-            <a:r>
-              <a:rPr lang="en-US" sz="1600" b="1">
-                <a:solidFill>
-                  <a:srgbClr val="C00000"/>
-                </a:solidFill>
-              </a:rPr>
-              <a:t>z = (x − x̄) / s counts standard deviations from the mean;  |z| ≥ 2 flags an outlier.</a:t>
-            </a:r>
-          </a:p>
-        </p:txBody>
-      </p:sp>
-      <p:sp>
-        <p:nvSpPr>
-          <p:cNvPr id="3" name="Title rule">
-            <a:extLst>
-              <a:ext uri="{FF2B5EF4-FFF2-40B4-BE49-F238E27FC236}">
-                <a16:creationId xmlns:a16="http://schemas.microsoft.com/office/drawing/2014/main" id="{B469CAAB-2B69-6863-7C28-0C5959E5734B}"/>
-              </a:ext>
-            </a:extLst>
-          </p:cNvPr>
-          <p:cNvSpPr/>
-          <p:nvPr/>
-        </p:nvSpPr>
-        <p:spPr>
-          <a:xfrm>
-            <a:off x="838200" y="1600200"/>
-            <a:ext cx="10515600" cy="38100"/>
-          </a:xfrm>
-          <a:prstGeom prst="rect">
-            <a:avLst/>
-          </a:prstGeom>
-          <a:solidFill>
-            <a:srgbClr val="4472C4"/>
-          </a:solidFill>
-          <a:ln w="12700" cap="flat" cmpd="sng" algn="ctr">
-            <a:noFill/>
-            <a:prstDash val="solid"/>
-            <a:miter lim="800000"/>
-          </a:ln>
-          <a:effectLst/>
-          <a:extLst>
-            <a:ext uri="{91240B29-F687-4F45-9708-019B960494DF}">
-              <a14:hiddenLine xmlns:a14="http://schemas.microsoft.com/office/drawing/2010/main" w="12700" cap="flat" cmpd="sng" algn="ctr">
-                <a:solidFill>
-                  <a:schemeClr val="accent1">
-                    <a:shade val="15000"/>
-                  </a:schemeClr>
-                </a:solidFill>
-                <a:prstDash val="solid"/>
-                <a:miter lim="800000"/>
-              </a14:hiddenLine>
-            </a:ext>
-          </a:extLst>
-        </p:spPr>
-        <p:style>
-          <a:lnRef idx="2">
-            <a:schemeClr val="accent1">
-              <a:shade val="15000"/>
-            </a:schemeClr>
-          </a:lnRef>
-          <a:fillRef idx="1">
-            <a:schemeClr val="accent1"/>
-          </a:fillRef>
-          <a:effectRef idx="0">
-            <a:schemeClr val="accent1"/>
-          </a:effectRef>
-          <a:fontRef idx="minor">
-            <a:schemeClr val="lt1"/>
-          </a:fontRef>
-        </p:style>
-        <p:txBody>
-          <a:bodyPr rtlCol="0" anchor="ctr"/>
-          <a:lstStyle/>
-          <a:p>
-            <a:pPr algn="ctr"/>
-            <a:endParaRPr lang="en-US"/>
-          </a:p>
-        </p:txBody>
-      </p:sp>
-    </p:spTree>
-    <p:extLst>
-      <p:ext uri="{BB962C8B-B14F-4D97-AF65-F5344CB8AC3E}">
-        <p14:creationId xmlns:p14="http://schemas.microsoft.com/office/powerpoint/2010/main" val="2126892714"/>
       </p:ext>
     </p:extLst>
   </p:cSld>
